--- a/user_stories.pptx
+++ b/user_stories.pptx
@@ -5,14 +5,21 @@
     <p:sldMasterId id="2147483648" r:id="rId1"/>
   </p:sldMasterIdLst>
   <p:notesMasterIdLst>
-    <p:notesMasterId r:id="rId7"/>
+    <p:notesMasterId r:id="rId14"/>
   </p:notesMasterIdLst>
   <p:sldIdLst>
-    <p:sldId id="256" r:id="rId2"/>
-    <p:sldId id="257" r:id="rId3"/>
-    <p:sldId id="258" r:id="rId4"/>
-    <p:sldId id="259" r:id="rId5"/>
-    <p:sldId id="261" r:id="rId6"/>
+    <p:sldId id="257" r:id="rId2"/>
+    <p:sldId id="258" r:id="rId3"/>
+    <p:sldId id="259" r:id="rId4"/>
+    <p:sldId id="261" r:id="rId5"/>
+    <p:sldId id="262" r:id="rId6"/>
+    <p:sldId id="265" r:id="rId7"/>
+    <p:sldId id="266" r:id="rId8"/>
+    <p:sldId id="263" r:id="rId9"/>
+    <p:sldId id="264" r:id="rId10"/>
+    <p:sldId id="267" r:id="rId11"/>
+    <p:sldId id="268" r:id="rId12"/>
+    <p:sldId id="269" r:id="rId13"/>
   </p:sldIdLst>
   <p:sldSz cx="9144000" cy="6858000" type="screen4x3"/>
   <p:notesSz cx="6858000" cy="9144000"/>
@@ -111,6 +118,22 @@
       </a:defRPr>
     </a:lvl9pPr>
   </p:defaultTextStyle>
+  <p:extLst>
+    <p:ext uri="{EFAFB233-063F-42B5-8137-9DF3F51BA10A}">
+      <p15:sldGuideLst xmlns:p15="http://schemas.microsoft.com/office/powerpoint/2012/main">
+        <p15:guide id="1" orient="horz" pos="2160">
+          <p15:clr>
+            <a:srgbClr val="A4A3A4"/>
+          </p15:clr>
+        </p15:guide>
+        <p15:guide id="2" pos="2880">
+          <p15:clr>
+            <a:srgbClr val="A4A3A4"/>
+          </p15:clr>
+        </p15:guide>
+      </p15:sldGuideLst>
+    </p:ext>
+  </p:extLst>
 </p:presentation>
 </file>
 
@@ -196,7 +219,7 @@
           <a:p>
             <a:fld id="{E8B3AC5C-49EA-8C43-A1F1-4AE9F44B070A}" type="datetimeFigureOut">
               <a:rPr lang="it-IT" smtClean="0"/>
-              <a:t>14/08/18</a:t>
+              <a:t>01/04/2019</a:t>
             </a:fld>
             <a:endParaRPr lang="it-IT"/>
           </a:p>
@@ -260,38 +283,37 @@
           <a:p>
             <a:pPr lvl="0"/>
             <a:r>
-              <a:rPr lang="it-IT" smtClean="0"/>
+              <a:rPr lang="it-IT"/>
               <a:t>Fare clic per modificare gli stili del testo dello schema</a:t>
             </a:r>
           </a:p>
           <a:p>
             <a:pPr lvl="1"/>
             <a:r>
-              <a:rPr lang="it-IT" smtClean="0"/>
+              <a:rPr lang="it-IT"/>
               <a:t>Secondo livello</a:t>
             </a:r>
           </a:p>
           <a:p>
             <a:pPr lvl="2"/>
             <a:r>
-              <a:rPr lang="it-IT" smtClean="0"/>
+              <a:rPr lang="it-IT"/>
               <a:t>Terzo livello</a:t>
             </a:r>
           </a:p>
           <a:p>
             <a:pPr lvl="3"/>
             <a:r>
-              <a:rPr lang="it-IT" smtClean="0"/>
+              <a:rPr lang="it-IT"/>
               <a:t>Quarto livello</a:t>
             </a:r>
           </a:p>
           <a:p>
             <a:pPr lvl="4"/>
             <a:r>
-              <a:rPr lang="it-IT" smtClean="0"/>
+              <a:rPr lang="it-IT"/>
               <a:t>Quinto livello</a:t>
             </a:r>
-            <a:endParaRPr lang="it-IT"/>
           </a:p>
         </p:txBody>
       </p:sp>
@@ -355,7 +377,7 @@
           <a:p>
             <a:fld id="{4C5C8C2B-EA7C-9543-B805-0B5BC93E4FF7}" type="slidenum">
               <a:rPr lang="it-IT" smtClean="0"/>
-              <a:t>‹n.›</a:t>
+              <a:t>‹N›</a:t>
             </a:fld>
             <a:endParaRPr lang="it-IT"/>
           </a:p>
@@ -529,7 +551,7 @@
           <a:p>
             <a:fld id="{4C5C8C2B-EA7C-9543-B805-0B5BC93E4FF7}" type="slidenum">
               <a:rPr lang="it-IT" smtClean="0"/>
-              <a:t>2</a:t>
+              <a:t>1</a:t>
             </a:fld>
             <a:endParaRPr lang="it-IT"/>
           </a:p>
@@ -593,25 +615,25 @@
           <a:lstStyle/>
           <a:p>
             <a:r>
-              <a:rPr lang="it-IT" dirty="0" smtClean="0"/>
+              <a:rPr lang="it-IT" dirty="0"/>
               <a:t>Ogni riga è selezionabile e</a:t>
             </a:r>
             <a:r>
-              <a:rPr lang="it-IT" baseline="0" dirty="0" smtClean="0"/>
+              <a:rPr lang="it-IT" baseline="0" dirty="0"/>
               <a:t> dà accesso al singolo record.</a:t>
             </a:r>
           </a:p>
           <a:p>
             <a:r>
-              <a:rPr lang="it-IT" baseline="0" dirty="0" smtClean="0"/>
+              <a:rPr lang="it-IT" baseline="0" dirty="0"/>
               <a:t>Una tabella espone TUTTI i record a cui l’utente è abilitato e relativi alla voce selezionata sul menu di </a:t>
             </a:r>
             <a:r>
-              <a:rPr lang="it-IT" baseline="0" dirty="0" err="1" smtClean="0"/>
+              <a:rPr lang="it-IT" baseline="0" dirty="0" err="1"/>
               <a:t>sx</a:t>
             </a:r>
             <a:r>
-              <a:rPr lang="it-IT" baseline="0" dirty="0" smtClean="0"/>
+              <a:rPr lang="it-IT" baseline="0" dirty="0"/>
               <a:t> (previo eventuale filtro attivo).</a:t>
             </a:r>
             <a:endParaRPr lang="it-IT" dirty="0"/>
@@ -635,7 +657,7 @@
           <a:p>
             <a:fld id="{4C5C8C2B-EA7C-9543-B805-0B5BC93E4FF7}" type="slidenum">
               <a:rPr lang="it-IT" smtClean="0"/>
-              <a:t>4</a:t>
+              <a:t>3</a:t>
             </a:fld>
             <a:endParaRPr lang="it-IT"/>
           </a:p>
@@ -692,10 +714,9 @@
           <a:lstStyle/>
           <a:p>
             <a:r>
-              <a:rPr lang="it-IT" smtClean="0"/>
+              <a:rPr lang="it-IT"/>
               <a:t>Fare clic per modificare stile</a:t>
             </a:r>
-            <a:endParaRPr lang="it-IT"/>
           </a:p>
         </p:txBody>
       </p:sp>
@@ -811,10 +832,9 @@
           </a:lstStyle>
           <a:p>
             <a:r>
-              <a:rPr lang="it-IT" smtClean="0"/>
+              <a:rPr lang="it-IT"/>
               <a:t>Fare clic per modificare lo stile del sottotitolo dello schema</a:t>
             </a:r>
-            <a:endParaRPr lang="it-IT"/>
           </a:p>
         </p:txBody>
       </p:sp>
@@ -835,7 +855,7 @@
           <a:p>
             <a:fld id="{61230D5F-A28A-9D43-B05A-DDA8B16E939A}" type="datetimeFigureOut">
               <a:rPr lang="it-IT" smtClean="0"/>
-              <a:t>14/08/18</a:t>
+              <a:t>01/04/2019</a:t>
             </a:fld>
             <a:endParaRPr lang="it-IT"/>
           </a:p>
@@ -877,7 +897,7 @@
           <a:p>
             <a:fld id="{CBED010B-0BA5-CA41-ABDD-7D9A9BA0872B}" type="slidenum">
               <a:rPr lang="it-IT" smtClean="0"/>
-              <a:t>‹n.›</a:t>
+              <a:t>‹N›</a:t>
             </a:fld>
             <a:endParaRPr lang="it-IT"/>
           </a:p>
@@ -929,10 +949,9 @@
           <a:lstStyle/>
           <a:p>
             <a:r>
-              <a:rPr lang="it-IT" smtClean="0"/>
+              <a:rPr lang="it-IT"/>
               <a:t>Fare clic per modificare stile</a:t>
             </a:r>
-            <a:endParaRPr lang="it-IT"/>
           </a:p>
         </p:txBody>
       </p:sp>
@@ -953,38 +972,37 @@
           <a:p>
             <a:pPr lvl="0"/>
             <a:r>
-              <a:rPr lang="it-IT" smtClean="0"/>
+              <a:rPr lang="it-IT"/>
               <a:t>Fare clic per modificare gli stili del testo dello schema</a:t>
             </a:r>
           </a:p>
           <a:p>
             <a:pPr lvl="1"/>
             <a:r>
-              <a:rPr lang="it-IT" smtClean="0"/>
+              <a:rPr lang="it-IT"/>
               <a:t>Secondo livello</a:t>
             </a:r>
           </a:p>
           <a:p>
             <a:pPr lvl="2"/>
             <a:r>
-              <a:rPr lang="it-IT" smtClean="0"/>
+              <a:rPr lang="it-IT"/>
               <a:t>Terzo livello</a:t>
             </a:r>
           </a:p>
           <a:p>
             <a:pPr lvl="3"/>
             <a:r>
-              <a:rPr lang="it-IT" smtClean="0"/>
+              <a:rPr lang="it-IT"/>
               <a:t>Quarto livello</a:t>
             </a:r>
           </a:p>
           <a:p>
             <a:pPr lvl="4"/>
             <a:r>
-              <a:rPr lang="it-IT" smtClean="0"/>
+              <a:rPr lang="it-IT"/>
               <a:t>Quinto livello</a:t>
             </a:r>
-            <a:endParaRPr lang="it-IT"/>
           </a:p>
         </p:txBody>
       </p:sp>
@@ -1005,7 +1023,7 @@
           <a:p>
             <a:fld id="{61230D5F-A28A-9D43-B05A-DDA8B16E939A}" type="datetimeFigureOut">
               <a:rPr lang="it-IT" smtClean="0"/>
-              <a:t>14/08/18</a:t>
+              <a:t>01/04/2019</a:t>
             </a:fld>
             <a:endParaRPr lang="it-IT"/>
           </a:p>
@@ -1047,7 +1065,7 @@
           <a:p>
             <a:fld id="{CBED010B-0BA5-CA41-ABDD-7D9A9BA0872B}" type="slidenum">
               <a:rPr lang="it-IT" smtClean="0"/>
-              <a:t>‹n.›</a:t>
+              <a:t>‹N›</a:t>
             </a:fld>
             <a:endParaRPr lang="it-IT"/>
           </a:p>
@@ -1104,10 +1122,9 @@
           <a:lstStyle/>
           <a:p>
             <a:r>
-              <a:rPr lang="it-IT" smtClean="0"/>
+              <a:rPr lang="it-IT"/>
               <a:t>Fare clic per modificare stile</a:t>
             </a:r>
-            <a:endParaRPr lang="it-IT"/>
           </a:p>
         </p:txBody>
       </p:sp>
@@ -1133,38 +1150,37 @@
           <a:p>
             <a:pPr lvl="0"/>
             <a:r>
-              <a:rPr lang="it-IT" smtClean="0"/>
+              <a:rPr lang="it-IT"/>
               <a:t>Fare clic per modificare gli stili del testo dello schema</a:t>
             </a:r>
           </a:p>
           <a:p>
             <a:pPr lvl="1"/>
             <a:r>
-              <a:rPr lang="it-IT" smtClean="0"/>
+              <a:rPr lang="it-IT"/>
               <a:t>Secondo livello</a:t>
             </a:r>
           </a:p>
           <a:p>
             <a:pPr lvl="2"/>
             <a:r>
-              <a:rPr lang="it-IT" smtClean="0"/>
+              <a:rPr lang="it-IT"/>
               <a:t>Terzo livello</a:t>
             </a:r>
           </a:p>
           <a:p>
             <a:pPr lvl="3"/>
             <a:r>
-              <a:rPr lang="it-IT" smtClean="0"/>
+              <a:rPr lang="it-IT"/>
               <a:t>Quarto livello</a:t>
             </a:r>
           </a:p>
           <a:p>
             <a:pPr lvl="4"/>
             <a:r>
-              <a:rPr lang="it-IT" smtClean="0"/>
+              <a:rPr lang="it-IT"/>
               <a:t>Quinto livello</a:t>
             </a:r>
-            <a:endParaRPr lang="it-IT"/>
           </a:p>
         </p:txBody>
       </p:sp>
@@ -1185,7 +1201,7 @@
           <a:p>
             <a:fld id="{61230D5F-A28A-9D43-B05A-DDA8B16E939A}" type="datetimeFigureOut">
               <a:rPr lang="it-IT" smtClean="0"/>
-              <a:t>14/08/18</a:t>
+              <a:t>01/04/2019</a:t>
             </a:fld>
             <a:endParaRPr lang="it-IT"/>
           </a:p>
@@ -1227,7 +1243,7 @@
           <a:p>
             <a:fld id="{CBED010B-0BA5-CA41-ABDD-7D9A9BA0872B}" type="slidenum">
               <a:rPr lang="it-IT" smtClean="0"/>
-              <a:t>‹n.›</a:t>
+              <a:t>‹N›</a:t>
             </a:fld>
             <a:endParaRPr lang="it-IT"/>
           </a:p>
@@ -1279,10 +1295,9 @@
           <a:lstStyle/>
           <a:p>
             <a:r>
-              <a:rPr lang="it-IT" smtClean="0"/>
+              <a:rPr lang="it-IT"/>
               <a:t>Fare clic per modificare stile</a:t>
             </a:r>
-            <a:endParaRPr lang="it-IT"/>
           </a:p>
         </p:txBody>
       </p:sp>
@@ -1303,38 +1318,37 @@
           <a:p>
             <a:pPr lvl="0"/>
             <a:r>
-              <a:rPr lang="it-IT" smtClean="0"/>
+              <a:rPr lang="it-IT"/>
               <a:t>Fare clic per modificare gli stili del testo dello schema</a:t>
             </a:r>
           </a:p>
           <a:p>
             <a:pPr lvl="1"/>
             <a:r>
-              <a:rPr lang="it-IT" smtClean="0"/>
+              <a:rPr lang="it-IT"/>
               <a:t>Secondo livello</a:t>
             </a:r>
           </a:p>
           <a:p>
             <a:pPr lvl="2"/>
             <a:r>
-              <a:rPr lang="it-IT" smtClean="0"/>
+              <a:rPr lang="it-IT"/>
               <a:t>Terzo livello</a:t>
             </a:r>
           </a:p>
           <a:p>
             <a:pPr lvl="3"/>
             <a:r>
-              <a:rPr lang="it-IT" smtClean="0"/>
+              <a:rPr lang="it-IT"/>
               <a:t>Quarto livello</a:t>
             </a:r>
           </a:p>
           <a:p>
             <a:pPr lvl="4"/>
             <a:r>
-              <a:rPr lang="it-IT" smtClean="0"/>
+              <a:rPr lang="it-IT"/>
               <a:t>Quinto livello</a:t>
             </a:r>
-            <a:endParaRPr lang="it-IT"/>
           </a:p>
         </p:txBody>
       </p:sp>
@@ -1355,7 +1369,7 @@
           <a:p>
             <a:fld id="{61230D5F-A28A-9D43-B05A-DDA8B16E939A}" type="datetimeFigureOut">
               <a:rPr lang="it-IT" smtClean="0"/>
-              <a:t>14/08/18</a:t>
+              <a:t>01/04/2019</a:t>
             </a:fld>
             <a:endParaRPr lang="it-IT"/>
           </a:p>
@@ -1397,7 +1411,7 @@
           <a:p>
             <a:fld id="{CBED010B-0BA5-CA41-ABDD-7D9A9BA0872B}" type="slidenum">
               <a:rPr lang="it-IT" smtClean="0"/>
-              <a:t>‹n.›</a:t>
+              <a:t>‹N›</a:t>
             </a:fld>
             <a:endParaRPr lang="it-IT"/>
           </a:p>
@@ -1458,10 +1472,9 @@
           </a:lstStyle>
           <a:p>
             <a:r>
-              <a:rPr lang="it-IT" smtClean="0"/>
+              <a:rPr lang="it-IT"/>
               <a:t>Fare clic per modificare stile</a:t>
             </a:r>
-            <a:endParaRPr lang="it-IT"/>
           </a:p>
         </p:txBody>
       </p:sp>
@@ -1578,7 +1591,7 @@
           <a:p>
             <a:pPr lvl="0"/>
             <a:r>
-              <a:rPr lang="it-IT" smtClean="0"/>
+              <a:rPr lang="it-IT"/>
               <a:t>Fare clic per modificare gli stili del testo dello schema</a:t>
             </a:r>
           </a:p>
@@ -1601,7 +1614,7 @@
           <a:p>
             <a:fld id="{61230D5F-A28A-9D43-B05A-DDA8B16E939A}" type="datetimeFigureOut">
               <a:rPr lang="it-IT" smtClean="0"/>
-              <a:t>14/08/18</a:t>
+              <a:t>01/04/2019</a:t>
             </a:fld>
             <a:endParaRPr lang="it-IT"/>
           </a:p>
@@ -1643,7 +1656,7 @@
           <a:p>
             <a:fld id="{CBED010B-0BA5-CA41-ABDD-7D9A9BA0872B}" type="slidenum">
               <a:rPr lang="it-IT" smtClean="0"/>
-              <a:t>‹n.›</a:t>
+              <a:t>‹N›</a:t>
             </a:fld>
             <a:endParaRPr lang="it-IT"/>
           </a:p>
@@ -1695,10 +1708,9 @@
           <a:lstStyle/>
           <a:p>
             <a:r>
-              <a:rPr lang="it-IT" smtClean="0"/>
+              <a:rPr lang="it-IT"/>
               <a:t>Fare clic per modificare stile</a:t>
             </a:r>
-            <a:endParaRPr lang="it-IT"/>
           </a:p>
         </p:txBody>
       </p:sp>
@@ -1752,38 +1764,37 @@
           <a:p>
             <a:pPr lvl="0"/>
             <a:r>
-              <a:rPr lang="it-IT" smtClean="0"/>
+              <a:rPr lang="it-IT"/>
               <a:t>Fare clic per modificare gli stili del testo dello schema</a:t>
             </a:r>
           </a:p>
           <a:p>
             <a:pPr lvl="1"/>
             <a:r>
-              <a:rPr lang="it-IT" smtClean="0"/>
+              <a:rPr lang="it-IT"/>
               <a:t>Secondo livello</a:t>
             </a:r>
           </a:p>
           <a:p>
             <a:pPr lvl="2"/>
             <a:r>
-              <a:rPr lang="it-IT" smtClean="0"/>
+              <a:rPr lang="it-IT"/>
               <a:t>Terzo livello</a:t>
             </a:r>
           </a:p>
           <a:p>
             <a:pPr lvl="3"/>
             <a:r>
-              <a:rPr lang="it-IT" smtClean="0"/>
+              <a:rPr lang="it-IT"/>
               <a:t>Quarto livello</a:t>
             </a:r>
           </a:p>
           <a:p>
             <a:pPr lvl="4"/>
             <a:r>
-              <a:rPr lang="it-IT" smtClean="0"/>
+              <a:rPr lang="it-IT"/>
               <a:t>Quinto livello</a:t>
             </a:r>
-            <a:endParaRPr lang="it-IT"/>
           </a:p>
         </p:txBody>
       </p:sp>
@@ -1837,38 +1848,37 @@
           <a:p>
             <a:pPr lvl="0"/>
             <a:r>
-              <a:rPr lang="it-IT" smtClean="0"/>
+              <a:rPr lang="it-IT"/>
               <a:t>Fare clic per modificare gli stili del testo dello schema</a:t>
             </a:r>
           </a:p>
           <a:p>
             <a:pPr lvl="1"/>
             <a:r>
-              <a:rPr lang="it-IT" smtClean="0"/>
+              <a:rPr lang="it-IT"/>
               <a:t>Secondo livello</a:t>
             </a:r>
           </a:p>
           <a:p>
             <a:pPr lvl="2"/>
             <a:r>
-              <a:rPr lang="it-IT" smtClean="0"/>
+              <a:rPr lang="it-IT"/>
               <a:t>Terzo livello</a:t>
             </a:r>
           </a:p>
           <a:p>
             <a:pPr lvl="3"/>
             <a:r>
-              <a:rPr lang="it-IT" smtClean="0"/>
+              <a:rPr lang="it-IT"/>
               <a:t>Quarto livello</a:t>
             </a:r>
           </a:p>
           <a:p>
             <a:pPr lvl="4"/>
             <a:r>
-              <a:rPr lang="it-IT" smtClean="0"/>
+              <a:rPr lang="it-IT"/>
               <a:t>Quinto livello</a:t>
             </a:r>
-            <a:endParaRPr lang="it-IT"/>
           </a:p>
         </p:txBody>
       </p:sp>
@@ -1889,7 +1899,7 @@
           <a:p>
             <a:fld id="{61230D5F-A28A-9D43-B05A-DDA8B16E939A}" type="datetimeFigureOut">
               <a:rPr lang="it-IT" smtClean="0"/>
-              <a:t>14/08/18</a:t>
+              <a:t>01/04/2019</a:t>
             </a:fld>
             <a:endParaRPr lang="it-IT"/>
           </a:p>
@@ -1931,7 +1941,7 @@
           <a:p>
             <a:fld id="{CBED010B-0BA5-CA41-ABDD-7D9A9BA0872B}" type="slidenum">
               <a:rPr lang="it-IT" smtClean="0"/>
-              <a:t>‹n.›</a:t>
+              <a:t>‹N›</a:t>
             </a:fld>
             <a:endParaRPr lang="it-IT"/>
           </a:p>
@@ -1987,10 +1997,9 @@
           </a:lstStyle>
           <a:p>
             <a:r>
-              <a:rPr lang="it-IT" smtClean="0"/>
+              <a:rPr lang="it-IT"/>
               <a:t>Fare clic per modificare stile</a:t>
             </a:r>
-            <a:endParaRPr lang="it-IT"/>
           </a:p>
         </p:txBody>
       </p:sp>
@@ -2053,7 +2062,7 @@
           <a:p>
             <a:pPr lvl="0"/>
             <a:r>
-              <a:rPr lang="it-IT" smtClean="0"/>
+              <a:rPr lang="it-IT"/>
               <a:t>Fare clic per modificare gli stili del testo dello schema</a:t>
             </a:r>
           </a:p>
@@ -2109,38 +2118,37 @@
           <a:p>
             <a:pPr lvl="0"/>
             <a:r>
-              <a:rPr lang="it-IT" smtClean="0"/>
+              <a:rPr lang="it-IT"/>
               <a:t>Fare clic per modificare gli stili del testo dello schema</a:t>
             </a:r>
           </a:p>
           <a:p>
             <a:pPr lvl="1"/>
             <a:r>
-              <a:rPr lang="it-IT" smtClean="0"/>
+              <a:rPr lang="it-IT"/>
               <a:t>Secondo livello</a:t>
             </a:r>
           </a:p>
           <a:p>
             <a:pPr lvl="2"/>
             <a:r>
-              <a:rPr lang="it-IT" smtClean="0"/>
+              <a:rPr lang="it-IT"/>
               <a:t>Terzo livello</a:t>
             </a:r>
           </a:p>
           <a:p>
             <a:pPr lvl="3"/>
             <a:r>
-              <a:rPr lang="it-IT" smtClean="0"/>
+              <a:rPr lang="it-IT"/>
               <a:t>Quarto livello</a:t>
             </a:r>
           </a:p>
           <a:p>
             <a:pPr lvl="4"/>
             <a:r>
-              <a:rPr lang="it-IT" smtClean="0"/>
+              <a:rPr lang="it-IT"/>
               <a:t>Quinto livello</a:t>
             </a:r>
-            <a:endParaRPr lang="it-IT"/>
           </a:p>
         </p:txBody>
       </p:sp>
@@ -2203,7 +2211,7 @@
           <a:p>
             <a:pPr lvl="0"/>
             <a:r>
-              <a:rPr lang="it-IT" smtClean="0"/>
+              <a:rPr lang="it-IT"/>
               <a:t>Fare clic per modificare gli stili del testo dello schema</a:t>
             </a:r>
           </a:p>
@@ -2259,38 +2267,37 @@
           <a:p>
             <a:pPr lvl="0"/>
             <a:r>
-              <a:rPr lang="it-IT" smtClean="0"/>
+              <a:rPr lang="it-IT"/>
               <a:t>Fare clic per modificare gli stili del testo dello schema</a:t>
             </a:r>
           </a:p>
           <a:p>
             <a:pPr lvl="1"/>
             <a:r>
-              <a:rPr lang="it-IT" smtClean="0"/>
+              <a:rPr lang="it-IT"/>
               <a:t>Secondo livello</a:t>
             </a:r>
           </a:p>
           <a:p>
             <a:pPr lvl="2"/>
             <a:r>
-              <a:rPr lang="it-IT" smtClean="0"/>
+              <a:rPr lang="it-IT"/>
               <a:t>Terzo livello</a:t>
             </a:r>
           </a:p>
           <a:p>
             <a:pPr lvl="3"/>
             <a:r>
-              <a:rPr lang="it-IT" smtClean="0"/>
+              <a:rPr lang="it-IT"/>
               <a:t>Quarto livello</a:t>
             </a:r>
           </a:p>
           <a:p>
             <a:pPr lvl="4"/>
             <a:r>
-              <a:rPr lang="it-IT" smtClean="0"/>
+              <a:rPr lang="it-IT"/>
               <a:t>Quinto livello</a:t>
             </a:r>
-            <a:endParaRPr lang="it-IT"/>
           </a:p>
         </p:txBody>
       </p:sp>
@@ -2311,7 +2318,7 @@
           <a:p>
             <a:fld id="{61230D5F-A28A-9D43-B05A-DDA8B16E939A}" type="datetimeFigureOut">
               <a:rPr lang="it-IT" smtClean="0"/>
-              <a:t>14/08/18</a:t>
+              <a:t>01/04/2019</a:t>
             </a:fld>
             <a:endParaRPr lang="it-IT"/>
           </a:p>
@@ -2353,7 +2360,7 @@
           <a:p>
             <a:fld id="{CBED010B-0BA5-CA41-ABDD-7D9A9BA0872B}" type="slidenum">
               <a:rPr lang="it-IT" smtClean="0"/>
-              <a:t>‹n.›</a:t>
+              <a:t>‹N›</a:t>
             </a:fld>
             <a:endParaRPr lang="it-IT"/>
           </a:p>
@@ -2405,10 +2412,9 @@
           <a:lstStyle/>
           <a:p>
             <a:r>
-              <a:rPr lang="it-IT" smtClean="0"/>
+              <a:rPr lang="it-IT"/>
               <a:t>Fare clic per modificare stile</a:t>
             </a:r>
-            <a:endParaRPr lang="it-IT"/>
           </a:p>
         </p:txBody>
       </p:sp>
@@ -2429,7 +2435,7 @@
           <a:p>
             <a:fld id="{61230D5F-A28A-9D43-B05A-DDA8B16E939A}" type="datetimeFigureOut">
               <a:rPr lang="it-IT" smtClean="0"/>
-              <a:t>14/08/18</a:t>
+              <a:t>01/04/2019</a:t>
             </a:fld>
             <a:endParaRPr lang="it-IT"/>
           </a:p>
@@ -2471,7 +2477,7 @@
           <a:p>
             <a:fld id="{CBED010B-0BA5-CA41-ABDD-7D9A9BA0872B}" type="slidenum">
               <a:rPr lang="it-IT" smtClean="0"/>
-              <a:t>‹n.›</a:t>
+              <a:t>‹N›</a:t>
             </a:fld>
             <a:endParaRPr lang="it-IT"/>
           </a:p>
@@ -2524,7 +2530,7 @@
           <a:p>
             <a:fld id="{61230D5F-A28A-9D43-B05A-DDA8B16E939A}" type="datetimeFigureOut">
               <a:rPr lang="it-IT" smtClean="0"/>
-              <a:t>14/08/18</a:t>
+              <a:t>01/04/2019</a:t>
             </a:fld>
             <a:endParaRPr lang="it-IT"/>
           </a:p>
@@ -2566,7 +2572,7 @@
           <a:p>
             <a:fld id="{CBED010B-0BA5-CA41-ABDD-7D9A9BA0872B}" type="slidenum">
               <a:rPr lang="it-IT" smtClean="0"/>
-              <a:t>‹n.›</a:t>
+              <a:t>‹N›</a:t>
             </a:fld>
             <a:endParaRPr lang="it-IT"/>
           </a:p>
@@ -2627,10 +2633,9 @@
           </a:lstStyle>
           <a:p>
             <a:r>
-              <a:rPr lang="it-IT" smtClean="0"/>
+              <a:rPr lang="it-IT"/>
               <a:t>Fare clic per modificare stile</a:t>
             </a:r>
-            <a:endParaRPr lang="it-IT"/>
           </a:p>
         </p:txBody>
       </p:sp>
@@ -2684,38 +2689,37 @@
           <a:p>
             <a:pPr lvl="0"/>
             <a:r>
-              <a:rPr lang="it-IT" smtClean="0"/>
+              <a:rPr lang="it-IT"/>
               <a:t>Fare clic per modificare gli stili del testo dello schema</a:t>
             </a:r>
           </a:p>
           <a:p>
             <a:pPr lvl="1"/>
             <a:r>
-              <a:rPr lang="it-IT" smtClean="0"/>
+              <a:rPr lang="it-IT"/>
               <a:t>Secondo livello</a:t>
             </a:r>
           </a:p>
           <a:p>
             <a:pPr lvl="2"/>
             <a:r>
-              <a:rPr lang="it-IT" smtClean="0"/>
+              <a:rPr lang="it-IT"/>
               <a:t>Terzo livello</a:t>
             </a:r>
           </a:p>
           <a:p>
             <a:pPr lvl="3"/>
             <a:r>
-              <a:rPr lang="it-IT" smtClean="0"/>
+              <a:rPr lang="it-IT"/>
               <a:t>Quarto livello</a:t>
             </a:r>
           </a:p>
           <a:p>
             <a:pPr lvl="4"/>
             <a:r>
-              <a:rPr lang="it-IT" smtClean="0"/>
+              <a:rPr lang="it-IT"/>
               <a:t>Quinto livello</a:t>
             </a:r>
-            <a:endParaRPr lang="it-IT"/>
           </a:p>
         </p:txBody>
       </p:sp>
@@ -2778,7 +2782,7 @@
           <a:p>
             <a:pPr lvl="0"/>
             <a:r>
-              <a:rPr lang="it-IT" smtClean="0"/>
+              <a:rPr lang="it-IT"/>
               <a:t>Fare clic per modificare gli stili del testo dello schema</a:t>
             </a:r>
           </a:p>
@@ -2801,7 +2805,7 @@
           <a:p>
             <a:fld id="{61230D5F-A28A-9D43-B05A-DDA8B16E939A}" type="datetimeFigureOut">
               <a:rPr lang="it-IT" smtClean="0"/>
-              <a:t>14/08/18</a:t>
+              <a:t>01/04/2019</a:t>
             </a:fld>
             <a:endParaRPr lang="it-IT"/>
           </a:p>
@@ -2843,7 +2847,7 @@
           <a:p>
             <a:fld id="{CBED010B-0BA5-CA41-ABDD-7D9A9BA0872B}" type="slidenum">
               <a:rPr lang="it-IT" smtClean="0"/>
-              <a:t>‹n.›</a:t>
+              <a:t>‹N›</a:t>
             </a:fld>
             <a:endParaRPr lang="it-IT"/>
           </a:p>
@@ -2904,10 +2908,9 @@
           </a:lstStyle>
           <a:p>
             <a:r>
-              <a:rPr lang="it-IT" smtClean="0"/>
+              <a:rPr lang="it-IT"/>
               <a:t>Fare clic per modificare stile</a:t>
             </a:r>
-            <a:endParaRPr lang="it-IT"/>
           </a:p>
         </p:txBody>
       </p:sp>
@@ -3031,7 +3034,7 @@
           <a:p>
             <a:pPr lvl="0"/>
             <a:r>
-              <a:rPr lang="it-IT" smtClean="0"/>
+              <a:rPr lang="it-IT"/>
               <a:t>Fare clic per modificare gli stili del testo dello schema</a:t>
             </a:r>
           </a:p>
@@ -3054,7 +3057,7 @@
           <a:p>
             <a:fld id="{61230D5F-A28A-9D43-B05A-DDA8B16E939A}" type="datetimeFigureOut">
               <a:rPr lang="it-IT" smtClean="0"/>
-              <a:t>14/08/18</a:t>
+              <a:t>01/04/2019</a:t>
             </a:fld>
             <a:endParaRPr lang="it-IT"/>
           </a:p>
@@ -3096,7 +3099,7 @@
           <a:p>
             <a:fld id="{CBED010B-0BA5-CA41-ABDD-7D9A9BA0872B}" type="slidenum">
               <a:rPr lang="it-IT" smtClean="0"/>
-              <a:t>‹n.›</a:t>
+              <a:t>‹N›</a:t>
             </a:fld>
             <a:endParaRPr lang="it-IT"/>
           </a:p>
@@ -3163,10 +3166,9 @@
           <a:lstStyle/>
           <a:p>
             <a:r>
-              <a:rPr lang="it-IT" smtClean="0"/>
+              <a:rPr lang="it-IT"/>
               <a:t>Fare clic per modificare stile</a:t>
             </a:r>
-            <a:endParaRPr lang="it-IT"/>
           </a:p>
         </p:txBody>
       </p:sp>
@@ -3197,38 +3199,37 @@
           <a:p>
             <a:pPr lvl="0"/>
             <a:r>
-              <a:rPr lang="it-IT" smtClean="0"/>
+              <a:rPr lang="it-IT"/>
               <a:t>Fare clic per modificare gli stili del testo dello schema</a:t>
             </a:r>
           </a:p>
           <a:p>
             <a:pPr lvl="1"/>
             <a:r>
-              <a:rPr lang="it-IT" smtClean="0"/>
+              <a:rPr lang="it-IT"/>
               <a:t>Secondo livello</a:t>
             </a:r>
           </a:p>
           <a:p>
             <a:pPr lvl="2"/>
             <a:r>
-              <a:rPr lang="it-IT" smtClean="0"/>
+              <a:rPr lang="it-IT"/>
               <a:t>Terzo livello</a:t>
             </a:r>
           </a:p>
           <a:p>
             <a:pPr lvl="3"/>
             <a:r>
-              <a:rPr lang="it-IT" smtClean="0"/>
+              <a:rPr lang="it-IT"/>
               <a:t>Quarto livello</a:t>
             </a:r>
           </a:p>
           <a:p>
             <a:pPr lvl="4"/>
             <a:r>
-              <a:rPr lang="it-IT" smtClean="0"/>
+              <a:rPr lang="it-IT"/>
               <a:t>Quinto livello</a:t>
             </a:r>
-            <a:endParaRPr lang="it-IT"/>
           </a:p>
         </p:txBody>
       </p:sp>
@@ -3267,7 +3268,7 @@
           <a:p>
             <a:fld id="{61230D5F-A28A-9D43-B05A-DDA8B16E939A}" type="datetimeFigureOut">
               <a:rPr lang="it-IT" smtClean="0"/>
-              <a:t>14/08/18</a:t>
+              <a:t>01/04/2019</a:t>
             </a:fld>
             <a:endParaRPr lang="it-IT"/>
           </a:p>
@@ -3345,7 +3346,7 @@
           <a:p>
             <a:fld id="{CBED010B-0BA5-CA41-ABDD-7D9A9BA0872B}" type="slidenum">
               <a:rPr lang="it-IT" smtClean="0"/>
-              <a:t>‹n.›</a:t>
+              <a:t>‹N›</a:t>
             </a:fld>
             <a:endParaRPr lang="it-IT"/>
           </a:p>
@@ -3649,41 +3650,1322 @@
             <a:spLocks noGrp="1"/>
           </p:cNvSpPr>
           <p:nvPr>
-            <p:ph type="ctrTitle"/>
+            <p:ph type="title"/>
           </p:nvPr>
         </p:nvSpPr>
-        <p:spPr/>
-        <p:txBody>
-          <a:bodyPr/>
-          <a:lstStyle/>
-          <a:p>
+        <p:spPr>
+          <a:xfrm>
+            <a:off x="457200" y="274638"/>
+            <a:ext cx="8229600" cy="581318"/>
+          </a:xfrm>
+        </p:spPr>
+        <p:txBody>
+          <a:bodyPr>
+            <a:normAutofit fontScale="90000"/>
+          </a:bodyPr>
+          <a:lstStyle/>
+          <a:p>
+            <a:r>
+              <a:rPr lang="it-IT" dirty="0"/>
+              <a:t>Vista iniziale</a:t>
+            </a:r>
+          </a:p>
+        </p:txBody>
+      </p:sp>
+      <p:sp>
+        <p:nvSpPr>
+          <p:cNvPr id="4" name="Rettangolo 3"/>
+          <p:cNvSpPr/>
+          <p:nvPr/>
+        </p:nvSpPr>
+        <p:spPr>
+          <a:xfrm>
+            <a:off x="800682" y="1417638"/>
+            <a:ext cx="7886118" cy="5209116"/>
+          </a:xfrm>
+          <a:prstGeom prst="rect">
+            <a:avLst/>
+          </a:prstGeom>
+        </p:spPr>
+        <p:style>
+          <a:lnRef idx="2">
+            <a:schemeClr val="accent1"/>
+          </a:lnRef>
+          <a:fillRef idx="1">
+            <a:schemeClr val="lt1"/>
+          </a:fillRef>
+          <a:effectRef idx="0">
+            <a:schemeClr val="accent1"/>
+          </a:effectRef>
+          <a:fontRef idx="minor">
+            <a:schemeClr val="dk1"/>
+          </a:fontRef>
+        </p:style>
+        <p:txBody>
+          <a:bodyPr rtlCol="0" anchor="ctr"/>
+          <a:lstStyle/>
+          <a:p>
+            <a:pPr algn="ctr"/>
+            <a:r>
+              <a:rPr lang="it-IT" dirty="0"/>
+              <a:t>                User Dashboard</a:t>
+            </a:r>
+          </a:p>
+        </p:txBody>
+      </p:sp>
+      <p:sp>
+        <p:nvSpPr>
+          <p:cNvPr id="5" name="Rettangolo 4"/>
+          <p:cNvSpPr/>
+          <p:nvPr/>
+        </p:nvSpPr>
+        <p:spPr>
+          <a:xfrm>
+            <a:off x="800682" y="855956"/>
+            <a:ext cx="7886118" cy="561682"/>
+          </a:xfrm>
+          <a:prstGeom prst="rect">
+            <a:avLst/>
+          </a:prstGeom>
+        </p:spPr>
+        <p:style>
+          <a:lnRef idx="2">
+            <a:schemeClr val="accent1"/>
+          </a:lnRef>
+          <a:fillRef idx="1">
+            <a:schemeClr val="lt1"/>
+          </a:fillRef>
+          <a:effectRef idx="0">
+            <a:schemeClr val="accent1"/>
+          </a:effectRef>
+          <a:fontRef idx="minor">
+            <a:schemeClr val="dk1"/>
+          </a:fontRef>
+        </p:style>
+        <p:txBody>
+          <a:bodyPr rtlCol="0" anchor="ctr"/>
+          <a:lstStyle/>
+          <a:p>
+            <a:r>
+              <a:rPr lang="it-IT" dirty="0" err="1"/>
+              <a:t>Gorico</a:t>
+            </a:r>
+            <a:r>
+              <a:rPr lang="it-IT" dirty="0"/>
+              <a:t>		Azienda 					        Amedeo Poli</a:t>
+            </a:r>
+          </a:p>
+        </p:txBody>
+      </p:sp>
+      <p:pic>
+        <p:nvPicPr>
+          <p:cNvPr id="6" name="Immagine 5" descr="Schermata 2018-08-13 alle 10.02.11.png"/>
+          <p:cNvPicPr>
+            <a:picLocks noChangeAspect="1"/>
+          </p:cNvPicPr>
+          <p:nvPr/>
+        </p:nvPicPr>
+        <p:blipFill>
+          <a:blip r:embed="rId3">
+            <a:extLst>
+              <a:ext uri="{28A0092B-C50C-407E-A947-70E740481C1C}">
+                <a14:useLocalDpi xmlns:a14="http://schemas.microsoft.com/office/drawing/2010/main" val="0"/>
+              </a:ext>
+            </a:extLst>
+          </a:blip>
+          <a:stretch>
+            <a:fillRect/>
+          </a:stretch>
+        </p:blipFill>
+        <p:spPr>
+          <a:xfrm>
+            <a:off x="7485398" y="922338"/>
+            <a:ext cx="952500" cy="495300"/>
+          </a:xfrm>
+          <a:prstGeom prst="rect">
+            <a:avLst/>
+          </a:prstGeom>
+        </p:spPr>
+      </p:pic>
+      <p:sp>
+        <p:nvSpPr>
+          <p:cNvPr id="9" name="Rettangolo 8"/>
+          <p:cNvSpPr/>
+          <p:nvPr/>
+        </p:nvSpPr>
+        <p:spPr>
+          <a:xfrm>
+            <a:off x="806566" y="1417638"/>
+            <a:ext cx="1808438" cy="4652534"/>
+          </a:xfrm>
+          <a:prstGeom prst="rect">
+            <a:avLst/>
+          </a:prstGeom>
+        </p:spPr>
+        <p:style>
+          <a:lnRef idx="2">
+            <a:schemeClr val="accent1"/>
+          </a:lnRef>
+          <a:fillRef idx="1">
+            <a:schemeClr val="lt1"/>
+          </a:fillRef>
+          <a:effectRef idx="0">
+            <a:schemeClr val="accent1"/>
+          </a:effectRef>
+          <a:fontRef idx="minor">
+            <a:schemeClr val="dk1"/>
+          </a:fontRef>
+        </p:style>
+        <p:txBody>
+          <a:bodyPr rtlCol="0" anchor="ctr"/>
+          <a:lstStyle/>
+          <a:p>
+            <a:pPr algn="ctr"/>
+            <a:endParaRPr lang="it-IT" dirty="0"/>
+          </a:p>
+          <a:p>
+            <a:pPr algn="ctr"/>
+            <a:endParaRPr lang="it-IT" dirty="0"/>
+          </a:p>
+          <a:p>
+            <a:pPr algn="ctr"/>
+            <a:endParaRPr lang="it-IT" dirty="0"/>
+          </a:p>
+          <a:p>
+            <a:pPr algn="ctr"/>
+            <a:endParaRPr lang="it-IT" dirty="0"/>
+          </a:p>
+          <a:p>
+            <a:pPr algn="ctr"/>
+            <a:endParaRPr lang="it-IT" dirty="0"/>
+          </a:p>
+          <a:p>
+            <a:pPr algn="ctr"/>
+            <a:endParaRPr lang="it-IT" dirty="0"/>
+          </a:p>
+          <a:p>
+            <a:pPr algn="ctr"/>
+            <a:endParaRPr lang="it-IT" dirty="0"/>
+          </a:p>
+          <a:p>
+            <a:pPr algn="ctr"/>
+            <a:endParaRPr lang="it-IT" dirty="0"/>
+          </a:p>
+          <a:p>
+            <a:pPr algn="ctr"/>
+            <a:endParaRPr lang="it-IT" dirty="0"/>
+          </a:p>
+          <a:p>
+            <a:pPr algn="ctr"/>
+            <a:endParaRPr lang="it-IT" dirty="0"/>
+          </a:p>
+          <a:p>
+            <a:pPr algn="ctr"/>
+            <a:endParaRPr lang="it-IT" dirty="0"/>
+          </a:p>
+          <a:p>
+            <a:pPr algn="ctr"/>
+            <a:endParaRPr lang="it-IT" dirty="0"/>
+          </a:p>
+          <a:p>
+            <a:pPr algn="ctr"/>
+            <a:endParaRPr lang="it-IT" dirty="0"/>
+          </a:p>
+          <a:p>
+            <a:pPr algn="ctr"/>
+            <a:endParaRPr lang="it-IT" dirty="0"/>
+          </a:p>
+          <a:p>
+            <a:pPr algn="ctr"/>
+            <a:endParaRPr lang="it-IT" dirty="0"/>
+          </a:p>
+          <a:p>
+            <a:pPr algn="ctr"/>
+            <a:endParaRPr lang="it-IT" dirty="0"/>
+          </a:p>
+        </p:txBody>
+      </p:sp>
+      <p:sp>
+        <p:nvSpPr>
+          <p:cNvPr id="30" name="Rettangolo 29"/>
+          <p:cNvSpPr/>
+          <p:nvPr/>
+        </p:nvSpPr>
+        <p:spPr>
+          <a:xfrm>
+            <a:off x="806566" y="1417639"/>
+            <a:ext cx="1808438" cy="466985"/>
+          </a:xfrm>
+          <a:prstGeom prst="rect">
+            <a:avLst/>
+          </a:prstGeom>
+        </p:spPr>
+        <p:style>
+          <a:lnRef idx="2">
+            <a:schemeClr val="accent1"/>
+          </a:lnRef>
+          <a:fillRef idx="1">
+            <a:schemeClr val="lt1"/>
+          </a:fillRef>
+          <a:effectRef idx="0">
+            <a:schemeClr val="accent1"/>
+          </a:effectRef>
+          <a:fontRef idx="minor">
+            <a:schemeClr val="dk1"/>
+          </a:fontRef>
+        </p:style>
+        <p:txBody>
+          <a:bodyPr rtlCol="0" anchor="ctr"/>
+          <a:lstStyle/>
+          <a:p>
+            <a:pPr algn="ctr"/>
+            <a:r>
+              <a:rPr lang="it-IT" dirty="0"/>
+              <a:t>Processi</a:t>
+            </a:r>
+          </a:p>
+        </p:txBody>
+      </p:sp>
+      <p:sp>
+        <p:nvSpPr>
+          <p:cNvPr id="31" name="Rettangolo 30"/>
+          <p:cNvSpPr/>
+          <p:nvPr/>
+        </p:nvSpPr>
+        <p:spPr>
+          <a:xfrm>
+            <a:off x="806566" y="1884624"/>
+            <a:ext cx="1808438" cy="466985"/>
+          </a:xfrm>
+          <a:prstGeom prst="rect">
+            <a:avLst/>
+          </a:prstGeom>
+        </p:spPr>
+        <p:style>
+          <a:lnRef idx="2">
+            <a:schemeClr val="accent1"/>
+          </a:lnRef>
+          <a:fillRef idx="1">
+            <a:schemeClr val="lt1"/>
+          </a:fillRef>
+          <a:effectRef idx="0">
+            <a:schemeClr val="accent1"/>
+          </a:effectRef>
+          <a:fontRef idx="minor">
+            <a:schemeClr val="dk1"/>
+          </a:fontRef>
+        </p:style>
+        <p:txBody>
+          <a:bodyPr rtlCol="0" anchor="ctr"/>
+          <a:lstStyle/>
+          <a:p>
+            <a:pPr algn="ctr"/>
+            <a:r>
+              <a:rPr lang="it-IT" dirty="0" err="1"/>
+              <a:t>Workflow</a:t>
+            </a:r>
+            <a:endParaRPr lang="it-IT" dirty="0"/>
+          </a:p>
+        </p:txBody>
+      </p:sp>
+      <p:sp>
+        <p:nvSpPr>
+          <p:cNvPr id="32" name="Rettangolo 31"/>
+          <p:cNvSpPr/>
+          <p:nvPr/>
+        </p:nvSpPr>
+        <p:spPr>
+          <a:xfrm>
+            <a:off x="806566" y="2351609"/>
+            <a:ext cx="1808438" cy="466985"/>
+          </a:xfrm>
+          <a:prstGeom prst="rect">
+            <a:avLst/>
+          </a:prstGeom>
+        </p:spPr>
+        <p:style>
+          <a:lnRef idx="2">
+            <a:schemeClr val="accent1"/>
+          </a:lnRef>
+          <a:fillRef idx="1">
+            <a:schemeClr val="lt1"/>
+          </a:fillRef>
+          <a:effectRef idx="0">
+            <a:schemeClr val="accent1"/>
+          </a:effectRef>
+          <a:fontRef idx="minor">
+            <a:schemeClr val="dk1"/>
+          </a:fontRef>
+        </p:style>
+        <p:txBody>
+          <a:bodyPr rtlCol="0" anchor="ctr"/>
+          <a:lstStyle/>
+          <a:p>
+            <a:pPr algn="ctr"/>
+            <a:r>
+              <a:rPr lang="it-IT" dirty="0"/>
+              <a:t>Presidi</a:t>
+            </a:r>
+          </a:p>
+        </p:txBody>
+      </p:sp>
+      <p:sp>
+        <p:nvSpPr>
+          <p:cNvPr id="33" name="Rettangolo 32"/>
+          <p:cNvSpPr/>
+          <p:nvPr/>
+        </p:nvSpPr>
+        <p:spPr>
+          <a:xfrm>
+            <a:off x="800682" y="2825172"/>
+            <a:ext cx="1808438" cy="466985"/>
+          </a:xfrm>
+          <a:prstGeom prst="rect">
+            <a:avLst/>
+          </a:prstGeom>
+        </p:spPr>
+        <p:style>
+          <a:lnRef idx="2">
+            <a:schemeClr val="accent1"/>
+          </a:lnRef>
+          <a:fillRef idx="1">
+            <a:schemeClr val="lt1"/>
+          </a:fillRef>
+          <a:effectRef idx="0">
+            <a:schemeClr val="accent1"/>
+          </a:effectRef>
+          <a:fontRef idx="minor">
+            <a:schemeClr val="dk1"/>
+          </a:fontRef>
+        </p:style>
+        <p:txBody>
+          <a:bodyPr rtlCol="0" anchor="ctr"/>
+          <a:lstStyle/>
+          <a:p>
+            <a:pPr algn="ctr"/>
+            <a:r>
+              <a:rPr lang="it-IT" dirty="0"/>
+              <a:t>Rischi</a:t>
+            </a:r>
+          </a:p>
+        </p:txBody>
+      </p:sp>
+      <p:sp>
+        <p:nvSpPr>
+          <p:cNvPr id="34" name="Rettangolo 33"/>
+          <p:cNvSpPr/>
+          <p:nvPr/>
+        </p:nvSpPr>
+        <p:spPr>
+          <a:xfrm>
+            <a:off x="806566" y="3298735"/>
+            <a:ext cx="1808438" cy="466985"/>
+          </a:xfrm>
+          <a:prstGeom prst="rect">
+            <a:avLst/>
+          </a:prstGeom>
+        </p:spPr>
+        <p:style>
+          <a:lnRef idx="2">
+            <a:schemeClr val="accent1"/>
+          </a:lnRef>
+          <a:fillRef idx="1">
+            <a:schemeClr val="lt1"/>
+          </a:fillRef>
+          <a:effectRef idx="0">
+            <a:schemeClr val="accent1"/>
+          </a:effectRef>
+          <a:fontRef idx="minor">
+            <a:schemeClr val="dk1"/>
+          </a:fontRef>
+        </p:style>
+        <p:txBody>
+          <a:bodyPr rtlCol="0" anchor="ctr"/>
+          <a:lstStyle/>
+          <a:p>
+            <a:pPr algn="ctr"/>
+            <a:r>
+              <a:rPr lang="it-IT" dirty="0"/>
+              <a:t>Segnalazioni</a:t>
+            </a:r>
+          </a:p>
+        </p:txBody>
+      </p:sp>
+      <p:sp>
+        <p:nvSpPr>
+          <p:cNvPr id="35" name="Rettangolo 34"/>
+          <p:cNvSpPr/>
+          <p:nvPr/>
+        </p:nvSpPr>
+        <p:spPr>
+          <a:xfrm>
+            <a:off x="800682" y="3766257"/>
+            <a:ext cx="1808438" cy="466985"/>
+          </a:xfrm>
+          <a:prstGeom prst="rect">
+            <a:avLst/>
+          </a:prstGeom>
+        </p:spPr>
+        <p:style>
+          <a:lnRef idx="2">
+            <a:schemeClr val="accent1"/>
+          </a:lnRef>
+          <a:fillRef idx="1">
+            <a:schemeClr val="lt1"/>
+          </a:fillRef>
+          <a:effectRef idx="0">
+            <a:schemeClr val="accent1"/>
+          </a:effectRef>
+          <a:fontRef idx="minor">
+            <a:schemeClr val="dk1"/>
+          </a:fontRef>
+        </p:style>
+        <p:txBody>
+          <a:bodyPr rtlCol="0" anchor="ctr"/>
+          <a:lstStyle/>
+          <a:p>
+            <a:pPr algn="ctr"/>
+            <a:r>
+              <a:rPr lang="it-IT" dirty="0"/>
+              <a:t>Questionari</a:t>
+            </a:r>
+          </a:p>
+        </p:txBody>
+      </p:sp>
+      <p:sp>
+        <p:nvSpPr>
+          <p:cNvPr id="36" name="Rettangolo 35"/>
+          <p:cNvSpPr/>
+          <p:nvPr/>
+        </p:nvSpPr>
+        <p:spPr>
+          <a:xfrm>
+            <a:off x="806566" y="4233242"/>
+            <a:ext cx="1808438" cy="466985"/>
+          </a:xfrm>
+          <a:prstGeom prst="rect">
+            <a:avLst/>
+          </a:prstGeom>
+        </p:spPr>
+        <p:style>
+          <a:lnRef idx="2">
+            <a:schemeClr val="accent1"/>
+          </a:lnRef>
+          <a:fillRef idx="1">
+            <a:schemeClr val="lt1"/>
+          </a:fillRef>
+          <a:effectRef idx="0">
+            <a:schemeClr val="accent1"/>
+          </a:effectRef>
+          <a:fontRef idx="minor">
+            <a:schemeClr val="dk1"/>
+          </a:fontRef>
+        </p:style>
+        <p:txBody>
+          <a:bodyPr rtlCol="0" anchor="ctr"/>
+          <a:lstStyle/>
+          <a:p>
+            <a:pPr algn="ctr"/>
+            <a:r>
+              <a:rPr lang="it-IT" dirty="0" err="1"/>
+              <a:t>Checklist</a:t>
+            </a:r>
+            <a:endParaRPr lang="it-IT" dirty="0"/>
+          </a:p>
+        </p:txBody>
+      </p:sp>
+      <p:sp>
+        <p:nvSpPr>
+          <p:cNvPr id="37" name="Rettangolo 36"/>
+          <p:cNvSpPr/>
+          <p:nvPr/>
+        </p:nvSpPr>
+        <p:spPr>
+          <a:xfrm>
+            <a:off x="800682" y="4700227"/>
+            <a:ext cx="1808438" cy="466985"/>
+          </a:xfrm>
+          <a:prstGeom prst="rect">
+            <a:avLst/>
+          </a:prstGeom>
+        </p:spPr>
+        <p:style>
+          <a:lnRef idx="2">
+            <a:schemeClr val="accent1"/>
+          </a:lnRef>
+          <a:fillRef idx="1">
+            <a:schemeClr val="lt1"/>
+          </a:fillRef>
+          <a:effectRef idx="0">
+            <a:schemeClr val="accent1"/>
+          </a:effectRef>
+          <a:fontRef idx="minor">
+            <a:schemeClr val="dk1"/>
+          </a:fontRef>
+        </p:style>
+        <p:txBody>
+          <a:bodyPr rtlCol="0" anchor="ctr"/>
+          <a:lstStyle/>
+          <a:p>
+            <a:pPr algn="ctr"/>
+            <a:r>
+              <a:rPr lang="it-IT" dirty="0"/>
+              <a:t>Modulistica</a:t>
+            </a:r>
+          </a:p>
+        </p:txBody>
+      </p:sp>
+      <p:sp>
+        <p:nvSpPr>
+          <p:cNvPr id="38" name="Rettangolo 37"/>
+          <p:cNvSpPr/>
+          <p:nvPr/>
+        </p:nvSpPr>
+        <p:spPr>
+          <a:xfrm>
+            <a:off x="800682" y="5173790"/>
+            <a:ext cx="1808438" cy="466985"/>
+          </a:xfrm>
+          <a:prstGeom prst="rect">
+            <a:avLst/>
+          </a:prstGeom>
+        </p:spPr>
+        <p:style>
+          <a:lnRef idx="2">
+            <a:schemeClr val="accent1"/>
+          </a:lnRef>
+          <a:fillRef idx="1">
+            <a:schemeClr val="lt1"/>
+          </a:fillRef>
+          <a:effectRef idx="0">
+            <a:schemeClr val="accent1"/>
+          </a:effectRef>
+          <a:fontRef idx="minor">
+            <a:schemeClr val="dk1"/>
+          </a:fontRef>
+        </p:style>
+        <p:txBody>
+          <a:bodyPr rtlCol="0" anchor="ctr"/>
+          <a:lstStyle/>
+          <a:p>
+            <a:pPr algn="ctr"/>
+            <a:r>
+              <a:rPr lang="it-IT" dirty="0"/>
+              <a:t>Modelli di test</a:t>
+            </a:r>
+          </a:p>
+        </p:txBody>
+      </p:sp>
+      <p:sp>
+        <p:nvSpPr>
+          <p:cNvPr id="39" name="Rettangolo 38"/>
+          <p:cNvSpPr/>
+          <p:nvPr/>
+        </p:nvSpPr>
+        <p:spPr>
+          <a:xfrm>
+            <a:off x="800682" y="5603724"/>
+            <a:ext cx="1808438" cy="466985"/>
+          </a:xfrm>
+          <a:prstGeom prst="rect">
+            <a:avLst/>
+          </a:prstGeom>
+        </p:spPr>
+        <p:style>
+          <a:lnRef idx="2">
+            <a:schemeClr val="accent1"/>
+          </a:lnRef>
+          <a:fillRef idx="1">
+            <a:schemeClr val="lt1"/>
+          </a:fillRef>
+          <a:effectRef idx="0">
+            <a:schemeClr val="accent1"/>
+          </a:effectRef>
+          <a:fontRef idx="minor">
+            <a:schemeClr val="dk1"/>
+          </a:fontRef>
+        </p:style>
+        <p:txBody>
+          <a:bodyPr rtlCol="0" anchor="ctr"/>
+          <a:lstStyle/>
+          <a:p>
+            <a:pPr algn="ctr"/>
+            <a:r>
+              <a:rPr lang="it-IT" dirty="0"/>
+              <a:t>Sondaggi</a:t>
+            </a:r>
+          </a:p>
+        </p:txBody>
+      </p:sp>
+      <p:sp>
+        <p:nvSpPr>
+          <p:cNvPr id="40" name="Rettangolo 39"/>
+          <p:cNvSpPr/>
+          <p:nvPr/>
+        </p:nvSpPr>
+        <p:spPr>
+          <a:xfrm>
+            <a:off x="800682" y="6070709"/>
+            <a:ext cx="1808438" cy="556045"/>
+          </a:xfrm>
+          <a:prstGeom prst="rect">
+            <a:avLst/>
+          </a:prstGeom>
+        </p:spPr>
+        <p:style>
+          <a:lnRef idx="2">
+            <a:schemeClr val="accent1"/>
+          </a:lnRef>
+          <a:fillRef idx="1">
+            <a:schemeClr val="lt1"/>
+          </a:fillRef>
+          <a:effectRef idx="0">
+            <a:schemeClr val="accent1"/>
+          </a:effectRef>
+          <a:fontRef idx="minor">
+            <a:schemeClr val="dk1"/>
+          </a:fontRef>
+        </p:style>
+        <p:txBody>
+          <a:bodyPr rtlCol="0" anchor="ctr"/>
+          <a:lstStyle/>
+          <a:p>
+            <a:pPr algn="ctr"/>
+            <a:r>
+              <a:rPr lang="it-IT" dirty="0"/>
+              <a:t>Configurazioni &gt;</a:t>
+            </a:r>
+          </a:p>
+        </p:txBody>
+      </p:sp>
+      <p:pic>
+        <p:nvPicPr>
+          <p:cNvPr id="41" name="Immagine 40"/>
+          <p:cNvPicPr>
+            <a:picLocks noChangeAspect="1"/>
+          </p:cNvPicPr>
+          <p:nvPr/>
+        </p:nvPicPr>
+        <p:blipFill>
+          <a:blip r:embed="rId4"/>
+          <a:stretch>
+            <a:fillRect/>
+          </a:stretch>
+        </p:blipFill>
+        <p:spPr>
+          <a:xfrm>
+            <a:off x="6623213" y="1028739"/>
+            <a:ext cx="486294" cy="280933"/>
+          </a:xfrm>
+          <a:prstGeom prst="rect">
+            <a:avLst/>
+          </a:prstGeom>
+        </p:spPr>
+      </p:pic>
+      <p:sp>
+        <p:nvSpPr>
+          <p:cNvPr id="42" name="Rettangolo 41"/>
+          <p:cNvSpPr/>
+          <p:nvPr/>
+        </p:nvSpPr>
+        <p:spPr>
+          <a:xfrm>
+            <a:off x="3037070" y="1028739"/>
+            <a:ext cx="1996365" cy="280933"/>
+          </a:xfrm>
+          <a:prstGeom prst="rect">
+            <a:avLst/>
+          </a:prstGeom>
+        </p:spPr>
+        <p:style>
+          <a:lnRef idx="1">
+            <a:schemeClr val="accent1"/>
+          </a:lnRef>
+          <a:fillRef idx="3">
+            <a:schemeClr val="accent1"/>
+          </a:fillRef>
+          <a:effectRef idx="2">
+            <a:schemeClr val="accent1"/>
+          </a:effectRef>
+          <a:fontRef idx="minor">
+            <a:schemeClr val="lt1"/>
+          </a:fontRef>
+        </p:style>
+        <p:txBody>
+          <a:bodyPr rtlCol="0" anchor="ctr"/>
+          <a:lstStyle/>
+          <a:p>
+            <a:r>
+              <a:rPr lang="it-IT" dirty="0"/>
+              <a:t>    </a:t>
+            </a:r>
+            <a:r>
+              <a:rPr lang="it-IT" dirty="0" err="1"/>
+              <a:t>Alacritas</a:t>
+            </a:r>
+            <a:r>
+              <a:rPr lang="it-IT" dirty="0"/>
+              <a:t>   </a:t>
+            </a:r>
+          </a:p>
+        </p:txBody>
+      </p:sp>
+      <p:pic>
+        <p:nvPicPr>
+          <p:cNvPr id="43" name="Immagine 42"/>
+          <p:cNvPicPr>
+            <a:picLocks noChangeAspect="1"/>
+          </p:cNvPicPr>
+          <p:nvPr/>
+        </p:nvPicPr>
+        <p:blipFill>
+          <a:blip r:embed="rId4"/>
+          <a:stretch>
+            <a:fillRect/>
+          </a:stretch>
+        </p:blipFill>
+        <p:spPr>
+          <a:xfrm>
+            <a:off x="4547142" y="1040672"/>
+            <a:ext cx="486294" cy="280933"/>
+          </a:xfrm>
+          <a:prstGeom prst="rect">
+            <a:avLst/>
+          </a:prstGeom>
+        </p:spPr>
+      </p:pic>
+      <p:sp>
+        <p:nvSpPr>
+          <p:cNvPr id="44" name="Rettangolo 43"/>
+          <p:cNvSpPr/>
+          <p:nvPr/>
+        </p:nvSpPr>
+        <p:spPr>
+          <a:xfrm>
+            <a:off x="5781116" y="1351531"/>
+            <a:ext cx="1328391" cy="710889"/>
+          </a:xfrm>
+          <a:prstGeom prst="rect">
+            <a:avLst/>
+          </a:prstGeom>
+        </p:spPr>
+        <p:style>
+          <a:lnRef idx="1">
+            <a:schemeClr val="accent1"/>
+          </a:lnRef>
+          <a:fillRef idx="3">
+            <a:schemeClr val="accent1"/>
+          </a:fillRef>
+          <a:effectRef idx="2">
+            <a:schemeClr val="accent1"/>
+          </a:effectRef>
+          <a:fontRef idx="minor">
+            <a:schemeClr val="lt1"/>
+          </a:fontRef>
+        </p:style>
+        <p:txBody>
+          <a:bodyPr rtlCol="0" anchor="ctr"/>
+          <a:lstStyle/>
+          <a:p>
+            <a:pPr algn="ctr"/>
             <a:endParaRPr lang="it-IT"/>
           </a:p>
         </p:txBody>
       </p:sp>
       <p:sp>
         <p:nvSpPr>
-          <p:cNvPr id="3" name="Sottotitolo 2"/>
+          <p:cNvPr id="45" name="Rettangolo 44"/>
+          <p:cNvSpPr/>
+          <p:nvPr/>
+        </p:nvSpPr>
+        <p:spPr>
+          <a:xfrm>
+            <a:off x="5781116" y="1312092"/>
+            <a:ext cx="1328391" cy="375164"/>
+          </a:xfrm>
+          <a:prstGeom prst="rect">
+            <a:avLst/>
+          </a:prstGeom>
+        </p:spPr>
+        <p:style>
+          <a:lnRef idx="2">
+            <a:schemeClr val="accent1"/>
+          </a:lnRef>
+          <a:fillRef idx="1">
+            <a:schemeClr val="lt1"/>
+          </a:fillRef>
+          <a:effectRef idx="0">
+            <a:schemeClr val="accent1"/>
+          </a:effectRef>
+          <a:fontRef idx="minor">
+            <a:schemeClr val="dk1"/>
+          </a:fontRef>
+        </p:style>
+        <p:txBody>
+          <a:bodyPr rtlCol="0" anchor="ctr"/>
+          <a:lstStyle/>
+          <a:p>
+            <a:pPr algn="ctr"/>
+            <a:r>
+              <a:rPr lang="it-IT" dirty="0"/>
+              <a:t>User </a:t>
+            </a:r>
+            <a:r>
+              <a:rPr lang="it-IT" dirty="0" err="1"/>
+              <a:t>Profile</a:t>
+            </a:r>
+            <a:endParaRPr lang="it-IT" dirty="0"/>
+          </a:p>
+        </p:txBody>
+      </p:sp>
+      <p:sp>
+        <p:nvSpPr>
+          <p:cNvPr id="46" name="Rettangolo 45"/>
+          <p:cNvSpPr/>
+          <p:nvPr/>
+        </p:nvSpPr>
+        <p:spPr>
+          <a:xfrm>
+            <a:off x="5781116" y="1687256"/>
+            <a:ext cx="1328391" cy="375164"/>
+          </a:xfrm>
+          <a:prstGeom prst="rect">
+            <a:avLst/>
+          </a:prstGeom>
+        </p:spPr>
+        <p:style>
+          <a:lnRef idx="1">
+            <a:schemeClr val="accent1"/>
+          </a:lnRef>
+          <a:fillRef idx="3">
+            <a:schemeClr val="accent1"/>
+          </a:fillRef>
+          <a:effectRef idx="2">
+            <a:schemeClr val="accent1"/>
+          </a:effectRef>
+          <a:fontRef idx="minor">
+            <a:schemeClr val="lt1"/>
+          </a:fontRef>
+        </p:style>
+        <p:txBody>
+          <a:bodyPr rtlCol="0" anchor="ctr"/>
+          <a:lstStyle/>
+          <a:p>
+            <a:pPr algn="ctr"/>
+            <a:r>
+              <a:rPr lang="it-IT" dirty="0">
+                <a:latin typeface="ＭＳ ゴシック"/>
+                <a:ea typeface="ＭＳ ゴシック"/>
+                <a:cs typeface="ＭＳ ゴシック"/>
+              </a:rPr>
+              <a:t>Dashboard</a:t>
+            </a:r>
+            <a:endParaRPr lang="it-IT" dirty="0"/>
+          </a:p>
+        </p:txBody>
+      </p:sp>
+    </p:spTree>
+    <p:extLst>
+      <p:ext uri="{BB962C8B-B14F-4D97-AF65-F5344CB8AC3E}">
+        <p14:creationId xmlns:p14="http://schemas.microsoft.com/office/powerpoint/2010/main" val="353263147"/>
+      </p:ext>
+    </p:extLst>
+  </p:cSld>
+  <p:clrMapOvr>
+    <a:masterClrMapping/>
+  </p:clrMapOvr>
+</p:sld>
+</file>
+
+<file path=ppt/slides/slide10.xml><?xml version="1.0" encoding="utf-8"?>
+<p:sld xmlns:a="http://schemas.openxmlformats.org/drawingml/2006/main" xmlns:r="http://schemas.openxmlformats.org/officeDocument/2006/relationships" xmlns:p="http://schemas.openxmlformats.org/presentationml/2006/main">
+  <p:cSld>
+    <p:spTree>
+      <p:nvGrpSpPr>
+        <p:cNvPr id="1" name=""/>
+        <p:cNvGrpSpPr/>
+        <p:nvPr/>
+      </p:nvGrpSpPr>
+      <p:grpSpPr>
+        <a:xfrm>
+          <a:off x="0" y="0"/>
+          <a:ext cx="0" cy="0"/>
+          <a:chOff x="0" y="0"/>
+          <a:chExt cx="0" cy="0"/>
+        </a:xfrm>
+      </p:grpSpPr>
+      <p:sp>
+        <p:nvSpPr>
+          <p:cNvPr id="4" name="Titolo 3">
+            <a:extLst>
+              <a:ext uri="{FF2B5EF4-FFF2-40B4-BE49-F238E27FC236}">
+                <a16:creationId xmlns:a16="http://schemas.microsoft.com/office/drawing/2014/main" id="{5E3C0A3E-16B7-4799-AEC3-552BE0E90CCE}"/>
+              </a:ext>
+            </a:extLst>
+          </p:cNvPr>
           <p:cNvSpPr>
             <a:spLocks noGrp="1"/>
           </p:cNvSpPr>
           <p:nvPr>
-            <p:ph type="subTitle" idx="1"/>
+            <p:ph type="title"/>
           </p:nvPr>
         </p:nvSpPr>
-        <p:spPr/>
-        <p:txBody>
-          <a:bodyPr/>
-          <a:lstStyle/>
-          <a:p>
-            <a:endParaRPr lang="it-IT"/>
+        <p:spPr>
+          <a:xfrm>
+            <a:off x="569626" y="2066925"/>
+            <a:ext cx="7925087" cy="1362075"/>
+          </a:xfrm>
+        </p:spPr>
+        <p:txBody>
+          <a:bodyPr>
+            <a:normAutofit fontScale="90000"/>
+          </a:bodyPr>
+          <a:lstStyle/>
+          <a:p>
+            <a:pPr algn="ctr"/>
+            <a:r>
+              <a:rPr lang="it-IT" dirty="0"/>
+              <a:t>Record particolari (SECONDO CASO): </a:t>
+            </a:r>
+            <a:br>
+              <a:rPr lang="it-IT" dirty="0"/>
+            </a:br>
+            <a:r>
+              <a:rPr lang="it-IT" dirty="0"/>
+              <a:t>SONDAGGI  E RELATIVE RISPOSTE</a:t>
+            </a:r>
+            <a:endParaRPr lang="en-GB" dirty="0"/>
           </a:p>
         </p:txBody>
       </p:sp>
     </p:spTree>
     <p:extLst>
       <p:ext uri="{BB962C8B-B14F-4D97-AF65-F5344CB8AC3E}">
-        <p14:creationId xmlns:p14="http://schemas.microsoft.com/office/powerpoint/2010/main" val="1822742727"/>
+        <p14:creationId xmlns:p14="http://schemas.microsoft.com/office/powerpoint/2010/main" val="1534605638"/>
+      </p:ext>
+    </p:extLst>
+  </p:cSld>
+  <p:clrMapOvr>
+    <a:masterClrMapping/>
+  </p:clrMapOvr>
+</p:sld>
+</file>
+
+<file path=ppt/slides/slide11.xml><?xml version="1.0" encoding="utf-8"?>
+<p:sld xmlns:a="http://schemas.openxmlformats.org/drawingml/2006/main" xmlns:r="http://schemas.openxmlformats.org/officeDocument/2006/relationships" xmlns:p="http://schemas.openxmlformats.org/presentationml/2006/main">
+  <p:cSld>
+    <p:spTree>
+      <p:nvGrpSpPr>
+        <p:cNvPr id="1" name=""/>
+        <p:cNvGrpSpPr/>
+        <p:nvPr/>
+      </p:nvGrpSpPr>
+      <p:grpSpPr>
+        <a:xfrm>
+          <a:off x="0" y="0"/>
+          <a:ext cx="0" cy="0"/>
+          <a:chOff x="0" y="0"/>
+          <a:chExt cx="0" cy="0"/>
+        </a:xfrm>
+      </p:grpSpPr>
+      <p:sp>
+        <p:nvSpPr>
+          <p:cNvPr id="2" name="Titolo 1"/>
+          <p:cNvSpPr>
+            <a:spLocks noGrp="1"/>
+          </p:cNvSpPr>
+          <p:nvPr>
+            <p:ph type="title"/>
+          </p:nvPr>
+        </p:nvSpPr>
+        <p:spPr>
+          <a:xfrm>
+            <a:off x="172386" y="184698"/>
+            <a:ext cx="8514414" cy="581318"/>
+          </a:xfrm>
+        </p:spPr>
+        <p:txBody>
+          <a:bodyPr>
+            <a:normAutofit fontScale="90000"/>
+          </a:bodyPr>
+          <a:lstStyle/>
+          <a:p>
+            <a:r>
+              <a:rPr lang="it-IT" dirty="0"/>
+              <a:t>Record particolare (risposte ai sondaggi)</a:t>
+            </a:r>
+          </a:p>
+        </p:txBody>
+      </p:sp>
+      <p:sp>
+        <p:nvSpPr>
+          <p:cNvPr id="14" name="CasellaDiTesto 13">
+            <a:extLst>
+              <a:ext uri="{FF2B5EF4-FFF2-40B4-BE49-F238E27FC236}">
+                <a16:creationId xmlns:a16="http://schemas.microsoft.com/office/drawing/2014/main" id="{6907433D-6EFD-45F6-876C-60A61519091E}"/>
+              </a:ext>
+            </a:extLst>
+          </p:cNvPr>
+          <p:cNvSpPr txBox="1"/>
+          <p:nvPr/>
+        </p:nvSpPr>
+        <p:spPr>
+          <a:xfrm>
+            <a:off x="172386" y="956153"/>
+            <a:ext cx="8971613" cy="1200329"/>
+          </a:xfrm>
+          <a:prstGeom prst="rect">
+            <a:avLst/>
+          </a:prstGeom>
+          <a:noFill/>
+        </p:spPr>
+        <p:txBody>
+          <a:bodyPr wrap="square" rtlCol="0">
+            <a:spAutoFit/>
+          </a:bodyPr>
+          <a:lstStyle/>
+          <a:p>
+            <a:r>
+              <a:rPr lang="it-IT" dirty="0"/>
+              <a:t>Le risposte ai sondaggi (tabella «risposte») sono alimentate tramite un radio botton tramite il quale selezionare tutte tra tutte le risposte previste a quella domanda (tabella «</a:t>
+            </a:r>
+            <a:r>
+              <a:rPr lang="it-IT" dirty="0" err="1"/>
+              <a:t>Risposte_previste</a:t>
+            </a:r>
+            <a:r>
+              <a:rPr lang="it-IT" dirty="0"/>
+              <a:t>»). E’ necessario anche che la rispostasi colori sulla base della correttezza o meno della risposta (definita in altra tabella di configurazione).</a:t>
+            </a:r>
+          </a:p>
+        </p:txBody>
+      </p:sp>
+      <p:pic>
+        <p:nvPicPr>
+          <p:cNvPr id="3" name="Immagine 2">
+            <a:extLst>
+              <a:ext uri="{FF2B5EF4-FFF2-40B4-BE49-F238E27FC236}">
+                <a16:creationId xmlns:a16="http://schemas.microsoft.com/office/drawing/2014/main" id="{6D46A56E-D023-4E67-96A6-30D05C7FFCFB}"/>
+              </a:ext>
+            </a:extLst>
+          </p:cNvPr>
+          <p:cNvPicPr>
+            <a:picLocks noChangeAspect="1"/>
+          </p:cNvPicPr>
+          <p:nvPr/>
+        </p:nvPicPr>
+        <p:blipFill>
+          <a:blip r:embed="rId2"/>
+          <a:stretch>
+            <a:fillRect/>
+          </a:stretch>
+        </p:blipFill>
+        <p:spPr>
+          <a:xfrm>
+            <a:off x="604440" y="2218545"/>
+            <a:ext cx="7304667" cy="3357874"/>
+          </a:xfrm>
+          <a:prstGeom prst="rect">
+            <a:avLst/>
+          </a:prstGeom>
+        </p:spPr>
+      </p:pic>
+    </p:spTree>
+    <p:extLst>
+      <p:ext uri="{BB962C8B-B14F-4D97-AF65-F5344CB8AC3E}">
+        <p14:creationId xmlns:p14="http://schemas.microsoft.com/office/powerpoint/2010/main" val="4172718097"/>
+      </p:ext>
+    </p:extLst>
+  </p:cSld>
+  <p:clrMapOvr>
+    <a:masterClrMapping/>
+  </p:clrMapOvr>
+</p:sld>
+</file>
+
+<file path=ppt/slides/slide12.xml><?xml version="1.0" encoding="utf-8"?>
+<p:sld xmlns:a="http://schemas.openxmlformats.org/drawingml/2006/main" xmlns:r="http://schemas.openxmlformats.org/officeDocument/2006/relationships" xmlns:p="http://schemas.openxmlformats.org/presentationml/2006/main">
+  <p:cSld>
+    <p:spTree>
+      <p:nvGrpSpPr>
+        <p:cNvPr id="1" name=""/>
+        <p:cNvGrpSpPr/>
+        <p:nvPr/>
+      </p:nvGrpSpPr>
+      <p:grpSpPr>
+        <a:xfrm>
+          <a:off x="0" y="0"/>
+          <a:ext cx="0" cy="0"/>
+          <a:chOff x="0" y="0"/>
+          <a:chExt cx="0" cy="0"/>
+        </a:xfrm>
+      </p:grpSpPr>
+      <p:sp>
+        <p:nvSpPr>
+          <p:cNvPr id="2" name="Titolo 1"/>
+          <p:cNvSpPr>
+            <a:spLocks noGrp="1"/>
+          </p:cNvSpPr>
+          <p:nvPr>
+            <p:ph type="title"/>
+          </p:nvPr>
+        </p:nvSpPr>
+        <p:spPr>
+          <a:xfrm>
+            <a:off x="172386" y="205533"/>
+            <a:ext cx="8791732" cy="1095393"/>
+          </a:xfrm>
+        </p:spPr>
+        <p:txBody>
+          <a:bodyPr>
+            <a:normAutofit fontScale="90000"/>
+          </a:bodyPr>
+          <a:lstStyle/>
+          <a:p>
+            <a:r>
+              <a:rPr lang="it-IT" dirty="0"/>
+              <a:t>Record particolare (sondaggi, somministrazioni e modelli test)</a:t>
+            </a:r>
+          </a:p>
+        </p:txBody>
+      </p:sp>
+      <p:sp>
+        <p:nvSpPr>
+          <p:cNvPr id="14" name="CasellaDiTesto 13">
+            <a:extLst>
+              <a:ext uri="{FF2B5EF4-FFF2-40B4-BE49-F238E27FC236}">
+                <a16:creationId xmlns:a16="http://schemas.microsoft.com/office/drawing/2014/main" id="{6907433D-6EFD-45F6-876C-60A61519091E}"/>
+              </a:ext>
+            </a:extLst>
+          </p:cNvPr>
+          <p:cNvSpPr txBox="1"/>
+          <p:nvPr/>
+        </p:nvSpPr>
+        <p:spPr>
+          <a:xfrm>
+            <a:off x="172387" y="1570750"/>
+            <a:ext cx="8971613" cy="4247317"/>
+          </a:xfrm>
+          <a:prstGeom prst="rect">
+            <a:avLst/>
+          </a:prstGeom>
+          <a:noFill/>
+        </p:spPr>
+        <p:txBody>
+          <a:bodyPr wrap="square" rtlCol="0">
+            <a:spAutoFit/>
+          </a:bodyPr>
+          <a:lstStyle/>
+          <a:p>
+            <a:r>
+              <a:rPr lang="it-IT" dirty="0"/>
+              <a:t>La modificabilità/ </a:t>
+            </a:r>
+            <a:r>
+              <a:rPr lang="it-IT" dirty="0" err="1"/>
+              <a:t>visualizzabilità</a:t>
+            </a:r>
+            <a:r>
+              <a:rPr lang="it-IT" dirty="0"/>
+              <a:t> dei singoli record è una funzione:</a:t>
+            </a:r>
+          </a:p>
+          <a:p>
+            <a:pPr marL="285750" indent="-285750">
+              <a:buFont typeface="Arial" panose="020B0604020202020204" pitchFamily="34" charset="0"/>
+              <a:buChar char="•"/>
+            </a:pPr>
+            <a:r>
+              <a:rPr lang="it-IT" dirty="0"/>
+              <a:t>Nel caso dei sondaggi la </a:t>
+            </a:r>
+            <a:r>
+              <a:rPr lang="it-IT" dirty="0" err="1"/>
+              <a:t>visualizzabilità</a:t>
+            </a:r>
+            <a:r>
+              <a:rPr lang="it-IT" dirty="0"/>
+              <a:t> è legata a:</a:t>
+            </a:r>
+          </a:p>
+          <a:p>
+            <a:pPr marL="742950" lvl="1" indent="-285750">
+              <a:buFont typeface="Arial" panose="020B0604020202020204" pitchFamily="34" charset="0"/>
+              <a:buChar char="•"/>
+            </a:pPr>
+            <a:r>
+              <a:rPr lang="it-IT" dirty="0"/>
+              <a:t>Ufficio di appartenenza dell’utente (per poter modificare il sondaggio l’utente deve o a) appartenere all’ufficio proprietario del sondaggio oppure b) l’ufficio al quale appartiene il cliente deve essere un ufficio supervisore dei sondaggi (c’è un flag apposta)).</a:t>
+            </a:r>
+          </a:p>
+          <a:p>
+            <a:pPr marL="742950" lvl="1" indent="-285750">
+              <a:buFont typeface="Arial" panose="020B0604020202020204" pitchFamily="34" charset="0"/>
+              <a:buChar char="•"/>
+            </a:pPr>
+            <a:r>
+              <a:rPr lang="it-IT" dirty="0"/>
+              <a:t>Stato del sondaggio (aperto/ chiuso).</a:t>
+            </a:r>
+          </a:p>
+          <a:p>
+            <a:pPr marL="285750" indent="-285750">
+              <a:buFont typeface="Arial" panose="020B0604020202020204" pitchFamily="34" charset="0"/>
+              <a:buChar char="•"/>
+            </a:pPr>
+            <a:r>
+              <a:rPr lang="it-IT" dirty="0"/>
+              <a:t>Nel caso dei modelli di test la </a:t>
+            </a:r>
+            <a:r>
+              <a:rPr lang="it-IT" dirty="0" err="1"/>
+              <a:t>visualizzabilità</a:t>
+            </a:r>
+            <a:r>
+              <a:rPr lang="it-IT" dirty="0"/>
+              <a:t> è legata a:</a:t>
+            </a:r>
+          </a:p>
+          <a:p>
+            <a:pPr marL="742950" lvl="1" indent="-285750">
+              <a:buFont typeface="Arial" panose="020B0604020202020204" pitchFamily="34" charset="0"/>
+              <a:buChar char="•"/>
+            </a:pPr>
+            <a:r>
+              <a:rPr lang="it-IT" dirty="0"/>
+              <a:t>Ufficio di appartenenza dell’utente (per poter modificare il modello di test l’utente deve o a) appartenere all’ufficio proprietario del modello di test oppure b) l’ufficio al quale appartiene il cliente deve essere un ufficio supervisore dei modelli di test (c’è un flag apposta)).</a:t>
+            </a:r>
+          </a:p>
+          <a:p>
+            <a:pPr marL="742950" lvl="1" indent="-285750">
+              <a:buFont typeface="Arial" panose="020B0604020202020204" pitchFamily="34" charset="0"/>
+              <a:buChar char="•"/>
+            </a:pPr>
+            <a:r>
+              <a:rPr lang="it-IT" dirty="0"/>
+              <a:t>Stato dei sondaggi (aperto/ chiuso) collegati a quella versione del modello di test.</a:t>
+            </a:r>
+          </a:p>
+          <a:p>
+            <a:pPr marL="285750" indent="-285750">
+              <a:buFont typeface="Arial" panose="020B0604020202020204" pitchFamily="34" charset="0"/>
+              <a:buChar char="•"/>
+            </a:pPr>
+            <a:endParaRPr lang="it-IT" dirty="0"/>
+          </a:p>
+          <a:p>
+            <a:pPr marL="285750" indent="-285750">
+              <a:buFont typeface="Arial" panose="020B0604020202020204" pitchFamily="34" charset="0"/>
+              <a:buChar char="•"/>
+            </a:pPr>
+            <a:endParaRPr lang="it-IT" dirty="0"/>
+          </a:p>
+        </p:txBody>
+      </p:sp>
+    </p:spTree>
+    <p:extLst>
+      <p:ext uri="{BB962C8B-B14F-4D97-AF65-F5344CB8AC3E}">
+        <p14:creationId xmlns:p14="http://schemas.microsoft.com/office/powerpoint/2010/main" val="3524880801"/>
       </p:ext>
     </p:extLst>
   </p:cSld>
@@ -3733,10 +5015,9 @@
           <a:lstStyle/>
           <a:p>
             <a:r>
-              <a:rPr lang="it-IT" dirty="0" smtClean="0"/>
-              <a:t>Vista iniziale</a:t>
-            </a:r>
-            <a:endParaRPr lang="it-IT" dirty="0"/>
+              <a:rPr lang="it-IT" dirty="0"/>
+              <a:t>Vista principale</a:t>
+            </a:r>
           </a:p>
         </p:txBody>
       </p:sp>
@@ -3775,9 +5056,25 @@
           <a:p>
             <a:pPr algn="ctr"/>
             <a:r>
-              <a:rPr lang="it-IT" dirty="0" smtClean="0"/>
-              <a:t>                User Dashboard</a:t>
-            </a:r>
+              <a:rPr lang="it-IT" dirty="0" err="1"/>
+              <a:t>Table</a:t>
+            </a:r>
+            <a:endParaRPr lang="it-IT" dirty="0"/>
+          </a:p>
+          <a:p>
+            <a:pPr algn="ctr"/>
+            <a:endParaRPr lang="it-IT" dirty="0"/>
+          </a:p>
+          <a:p>
+            <a:pPr algn="ctr"/>
+            <a:endParaRPr lang="it-IT" dirty="0"/>
+          </a:p>
+          <a:p>
+            <a:pPr algn="ctr"/>
+            <a:endParaRPr lang="it-IT" dirty="0"/>
+          </a:p>
+          <a:p>
+            <a:pPr algn="ctr"/>
             <a:endParaRPr lang="it-IT" dirty="0"/>
           </a:p>
         </p:txBody>
@@ -3816,20 +5113,87 @@
           <a:lstStyle/>
           <a:p>
             <a:r>
-              <a:rPr lang="it-IT" dirty="0" err="1" smtClean="0"/>
+              <a:rPr lang="it-IT" dirty="0" err="1"/>
               <a:t>Gorico</a:t>
             </a:r>
             <a:r>
-              <a:rPr lang="it-IT" dirty="0" smtClean="0"/>
+              <a:rPr lang="it-IT" dirty="0"/>
               <a:t>		Azienda 					        Amedeo Poli</a:t>
             </a:r>
-            <a:endParaRPr lang="it-IT" dirty="0"/>
           </a:p>
         </p:txBody>
       </p:sp>
       <p:pic>
         <p:nvPicPr>
           <p:cNvPr id="6" name="Immagine 5" descr="Schermata 2018-08-13 alle 10.02.11.png"/>
+          <p:cNvPicPr>
+            <a:picLocks noChangeAspect="1"/>
+          </p:cNvPicPr>
+          <p:nvPr/>
+        </p:nvPicPr>
+        <p:blipFill>
+          <a:blip r:embed="rId2">
+            <a:extLst>
+              <a:ext uri="{28A0092B-C50C-407E-A947-70E740481C1C}">
+                <a14:useLocalDpi xmlns:a14="http://schemas.microsoft.com/office/drawing/2010/main" val="0"/>
+              </a:ext>
+            </a:extLst>
+          </a:blip>
+          <a:stretch>
+            <a:fillRect/>
+          </a:stretch>
+        </p:blipFill>
+        <p:spPr>
+          <a:xfrm>
+            <a:off x="7485398" y="922338"/>
+            <a:ext cx="952500" cy="495300"/>
+          </a:xfrm>
+          <a:prstGeom prst="rect">
+            <a:avLst/>
+          </a:prstGeom>
+        </p:spPr>
+      </p:pic>
+      <p:sp>
+        <p:nvSpPr>
+          <p:cNvPr id="7" name="Rettangolo 6"/>
+          <p:cNvSpPr/>
+          <p:nvPr/>
+        </p:nvSpPr>
+        <p:spPr>
+          <a:xfrm>
+            <a:off x="2609120" y="1417639"/>
+            <a:ext cx="6075290" cy="556582"/>
+          </a:xfrm>
+          <a:prstGeom prst="rect">
+            <a:avLst/>
+          </a:prstGeom>
+        </p:spPr>
+        <p:style>
+          <a:lnRef idx="2">
+            <a:schemeClr val="accent1"/>
+          </a:lnRef>
+          <a:fillRef idx="1">
+            <a:schemeClr val="lt1"/>
+          </a:fillRef>
+          <a:effectRef idx="0">
+            <a:schemeClr val="accent1"/>
+          </a:effectRef>
+          <a:fontRef idx="minor">
+            <a:schemeClr val="dk1"/>
+          </a:fontRef>
+        </p:style>
+        <p:txBody>
+          <a:bodyPr rtlCol="0" anchor="ctr"/>
+          <a:lstStyle/>
+          <a:p>
+            <a:pPr algn="ctr"/>
+            <a:endParaRPr lang="it-IT"/>
+          </a:p>
+        </p:txBody>
+      </p:sp>
+      <p:pic>
+        <p:nvPicPr>
+          <p:cNvPr id="8" name="Immagine 7" descr="Schermata 2018-08-13 alle 10.04.23.png"/>
           <p:cNvPicPr>
             <a:picLocks noChangeAspect="1"/>
           </p:cNvPicPr>
@@ -3849,8 +5213,8 @@
         </p:blipFill>
         <p:spPr>
           <a:xfrm>
-            <a:off x="7485398" y="922338"/>
-            <a:ext cx="952500" cy="495300"/>
+            <a:off x="2808470" y="1466801"/>
+            <a:ext cx="457200" cy="457200"/>
           </a:xfrm>
           <a:prstGeom prst="rect">
             <a:avLst/>
@@ -3865,8 +5229,8 @@
         </p:nvSpPr>
         <p:spPr>
           <a:xfrm>
-            <a:off x="806566" y="1417638"/>
-            <a:ext cx="1808438" cy="4652534"/>
+            <a:off x="800682" y="1457014"/>
+            <a:ext cx="1808438" cy="5169739"/>
           </a:xfrm>
           <a:prstGeom prst="rect">
             <a:avLst/>
@@ -3891,80 +5255,158 @@
           <a:lstStyle/>
           <a:p>
             <a:pPr algn="ctr"/>
-            <a:endParaRPr lang="it-IT" dirty="0" smtClean="0"/>
-          </a:p>
-          <a:p>
-            <a:pPr algn="ctr"/>
             <a:endParaRPr lang="it-IT" dirty="0"/>
           </a:p>
           <a:p>
             <a:pPr algn="ctr"/>
-            <a:endParaRPr lang="it-IT" dirty="0" smtClean="0"/>
-          </a:p>
-          <a:p>
-            <a:pPr algn="ctr"/>
             <a:endParaRPr lang="it-IT" dirty="0"/>
           </a:p>
           <a:p>
             <a:pPr algn="ctr"/>
-            <a:endParaRPr lang="it-IT" dirty="0" smtClean="0"/>
-          </a:p>
-          <a:p>
-            <a:pPr algn="ctr"/>
             <a:endParaRPr lang="it-IT" dirty="0"/>
           </a:p>
           <a:p>
             <a:pPr algn="ctr"/>
-            <a:endParaRPr lang="it-IT" dirty="0" smtClean="0"/>
-          </a:p>
-          <a:p>
-            <a:pPr algn="ctr"/>
             <a:endParaRPr lang="it-IT" dirty="0"/>
           </a:p>
           <a:p>
             <a:pPr algn="ctr"/>
-            <a:endParaRPr lang="it-IT" dirty="0" smtClean="0"/>
-          </a:p>
-          <a:p>
-            <a:pPr algn="ctr"/>
             <a:endParaRPr lang="it-IT" dirty="0"/>
           </a:p>
           <a:p>
             <a:pPr algn="ctr"/>
-            <a:endParaRPr lang="it-IT" dirty="0" smtClean="0"/>
-          </a:p>
-          <a:p>
-            <a:pPr algn="ctr"/>
             <a:endParaRPr lang="it-IT" dirty="0"/>
           </a:p>
           <a:p>
             <a:pPr algn="ctr"/>
-            <a:endParaRPr lang="it-IT" dirty="0" smtClean="0"/>
-          </a:p>
-          <a:p>
-            <a:pPr algn="ctr"/>
             <a:endParaRPr lang="it-IT" dirty="0"/>
           </a:p>
           <a:p>
             <a:pPr algn="ctr"/>
-            <a:endParaRPr lang="it-IT" dirty="0" smtClean="0"/>
-          </a:p>
-          <a:p>
-            <a:pPr algn="ctr"/>
             <a:endParaRPr lang="it-IT" dirty="0"/>
           </a:p>
-        </p:txBody>
-      </p:sp>
-      <p:sp>
-        <p:nvSpPr>
-          <p:cNvPr id="30" name="Rettangolo 29"/>
+          <a:p>
+            <a:pPr algn="ctr"/>
+            <a:endParaRPr lang="it-IT" dirty="0"/>
+          </a:p>
+          <a:p>
+            <a:pPr algn="ctr"/>
+            <a:endParaRPr lang="it-IT" dirty="0"/>
+          </a:p>
+          <a:p>
+            <a:pPr algn="ctr"/>
+            <a:endParaRPr lang="it-IT" dirty="0"/>
+          </a:p>
+          <a:p>
+            <a:pPr algn="ctr"/>
+            <a:endParaRPr lang="it-IT" dirty="0"/>
+          </a:p>
+          <a:p>
+            <a:pPr algn="ctr"/>
+            <a:endParaRPr lang="it-IT" dirty="0"/>
+          </a:p>
+          <a:p>
+            <a:pPr algn="ctr"/>
+            <a:endParaRPr lang="it-IT" dirty="0"/>
+          </a:p>
+          <a:p>
+            <a:pPr algn="ctr"/>
+            <a:endParaRPr lang="it-IT" dirty="0"/>
+          </a:p>
+          <a:p>
+            <a:pPr algn="ctr"/>
+            <a:endParaRPr lang="it-IT" dirty="0"/>
+          </a:p>
+        </p:txBody>
+      </p:sp>
+      <p:pic>
+        <p:nvPicPr>
+          <p:cNvPr id="11" name="Immagine 10" descr="Schermata 2018-08-13 alle 10.04.04.png"/>
+          <p:cNvPicPr>
+            <a:picLocks noChangeAspect="1"/>
+          </p:cNvPicPr>
+          <p:nvPr/>
+        </p:nvPicPr>
+        <p:blipFill>
+          <a:blip r:embed="rId4">
+            <a:extLst>
+              <a:ext uri="{28A0092B-C50C-407E-A947-70E740481C1C}">
+                <a14:useLocalDpi xmlns:a14="http://schemas.microsoft.com/office/drawing/2010/main" val="0"/>
+              </a:ext>
+            </a:extLst>
+          </a:blip>
+          <a:stretch>
+            <a:fillRect/>
+          </a:stretch>
+        </p:blipFill>
+        <p:spPr>
+          <a:xfrm>
+            <a:off x="3472210" y="1456142"/>
+            <a:ext cx="457200" cy="457200"/>
+          </a:xfrm>
+          <a:prstGeom prst="rect">
+            <a:avLst/>
+          </a:prstGeom>
+        </p:spPr>
+      </p:pic>
+      <p:pic>
+        <p:nvPicPr>
+          <p:cNvPr id="16" name="Immagine 15"/>
+          <p:cNvPicPr>
+            <a:picLocks noChangeAspect="1"/>
+          </p:cNvPicPr>
+          <p:nvPr/>
+        </p:nvPicPr>
+        <p:blipFill>
+          <a:blip r:embed="rId5"/>
+          <a:stretch>
+            <a:fillRect/>
+          </a:stretch>
+        </p:blipFill>
+        <p:spPr>
+          <a:xfrm>
+            <a:off x="6925182" y="1466801"/>
+            <a:ext cx="1120432" cy="548496"/>
+          </a:xfrm>
+          <a:prstGeom prst="rect">
+            <a:avLst/>
+          </a:prstGeom>
+        </p:spPr>
+      </p:pic>
+      <p:pic>
+        <p:nvPicPr>
+          <p:cNvPr id="13" name="Immagine 12"/>
+          <p:cNvPicPr>
+            <a:picLocks noChangeAspect="1"/>
+          </p:cNvPicPr>
+          <p:nvPr/>
+        </p:nvPicPr>
+        <p:blipFill>
+          <a:blip r:embed="rId6"/>
+          <a:stretch>
+            <a:fillRect/>
+          </a:stretch>
+        </p:blipFill>
+        <p:spPr>
+          <a:xfrm>
+            <a:off x="7920692" y="1456142"/>
+            <a:ext cx="517206" cy="517206"/>
+          </a:xfrm>
+          <a:prstGeom prst="rect">
+            <a:avLst/>
+          </a:prstGeom>
+        </p:spPr>
+      </p:pic>
+      <p:sp>
+        <p:nvSpPr>
+          <p:cNvPr id="17" name="Rettangolo 16"/>
           <p:cNvSpPr/>
           <p:nvPr/>
         </p:nvSpPr>
         <p:spPr>
           <a:xfrm>
-            <a:off x="806566" y="1417639"/>
-            <a:ext cx="1808438" cy="466985"/>
+            <a:off x="2609120" y="1974221"/>
+            <a:ext cx="6077680" cy="607452"/>
           </a:xfrm>
           <a:prstGeom prst="rect">
             <a:avLst/>
@@ -3988,12 +5430,310 @@
           <a:bodyPr rtlCol="0" anchor="ctr"/>
           <a:lstStyle/>
           <a:p>
-            <a:pPr algn="ctr"/>
-            <a:r>
-              <a:rPr lang="it-IT" dirty="0" smtClean="0"/>
+            <a:r>
+              <a:rPr lang="it-IT" dirty="0"/>
+              <a:t> __</a:t>
+            </a:r>
+            <a:r>
+              <a:rPr lang="it-IT" i="1" u="sng" dirty="0"/>
+              <a:t>Filtro__</a:t>
+            </a:r>
+            <a:r>
+              <a:rPr lang="it-IT" dirty="0"/>
+              <a:t>              </a:t>
+            </a:r>
+          </a:p>
+        </p:txBody>
+      </p:sp>
+      <p:pic>
+        <p:nvPicPr>
+          <p:cNvPr id="22" name="Immagine 21" descr="Schermata 2018-08-13 alle 10.04.34.png"/>
+          <p:cNvPicPr>
+            <a:picLocks noChangeAspect="1"/>
+          </p:cNvPicPr>
+          <p:nvPr/>
+        </p:nvPicPr>
+        <p:blipFill>
+          <a:blip r:embed="rId7">
+            <a:extLst>
+              <a:ext uri="{28A0092B-C50C-407E-A947-70E740481C1C}">
+                <a14:useLocalDpi xmlns:a14="http://schemas.microsoft.com/office/drawing/2010/main" val="0"/>
+              </a:ext>
+            </a:extLst>
+          </a:blip>
+          <a:stretch>
+            <a:fillRect/>
+          </a:stretch>
+        </p:blipFill>
+        <p:spPr>
+          <a:xfrm>
+            <a:off x="4004516" y="1457015"/>
+            <a:ext cx="469365" cy="456327"/>
+          </a:xfrm>
+          <a:prstGeom prst="rect">
+            <a:avLst/>
+          </a:prstGeom>
+        </p:spPr>
+      </p:pic>
+      <p:pic>
+        <p:nvPicPr>
+          <p:cNvPr id="23" name="Immagine 22"/>
+          <p:cNvPicPr>
+            <a:picLocks noChangeAspect="1"/>
+          </p:cNvPicPr>
+          <p:nvPr/>
+        </p:nvPicPr>
+        <p:blipFill>
+          <a:blip r:embed="rId8"/>
+          <a:stretch>
+            <a:fillRect/>
+          </a:stretch>
+        </p:blipFill>
+        <p:spPr>
+          <a:xfrm>
+            <a:off x="7951604" y="2160273"/>
+            <a:ext cx="486294" cy="280933"/>
+          </a:xfrm>
+          <a:prstGeom prst="rect">
+            <a:avLst/>
+          </a:prstGeom>
+        </p:spPr>
+      </p:pic>
+      <p:sp>
+        <p:nvSpPr>
+          <p:cNvPr id="24" name="Rettangolo 23"/>
+          <p:cNvSpPr/>
+          <p:nvPr/>
+        </p:nvSpPr>
+        <p:spPr>
+          <a:xfrm>
+            <a:off x="7109507" y="2441206"/>
+            <a:ext cx="1328391" cy="1123619"/>
+          </a:xfrm>
+          <a:prstGeom prst="rect">
+            <a:avLst/>
+          </a:prstGeom>
+        </p:spPr>
+        <p:style>
+          <a:lnRef idx="1">
+            <a:schemeClr val="accent1"/>
+          </a:lnRef>
+          <a:fillRef idx="3">
+            <a:schemeClr val="accent1"/>
+          </a:fillRef>
+          <a:effectRef idx="2">
+            <a:schemeClr val="accent1"/>
+          </a:effectRef>
+          <a:fontRef idx="minor">
+            <a:schemeClr val="lt1"/>
+          </a:fontRef>
+        </p:style>
+        <p:txBody>
+          <a:bodyPr rtlCol="0" anchor="ctr"/>
+          <a:lstStyle/>
+          <a:p>
+            <a:pPr algn="ctr"/>
+            <a:endParaRPr lang="it-IT"/>
+          </a:p>
+        </p:txBody>
+      </p:sp>
+      <p:sp>
+        <p:nvSpPr>
+          <p:cNvPr id="25" name="Rettangolo 24"/>
+          <p:cNvSpPr/>
+          <p:nvPr/>
+        </p:nvSpPr>
+        <p:spPr>
+          <a:xfrm>
+            <a:off x="7109507" y="2441206"/>
+            <a:ext cx="1328391" cy="375164"/>
+          </a:xfrm>
+          <a:prstGeom prst="rect">
+            <a:avLst/>
+          </a:prstGeom>
+        </p:spPr>
+        <p:style>
+          <a:lnRef idx="1">
+            <a:schemeClr val="accent1"/>
+          </a:lnRef>
+          <a:fillRef idx="3">
+            <a:schemeClr val="accent1"/>
+          </a:fillRef>
+          <a:effectRef idx="2">
+            <a:schemeClr val="accent1"/>
+          </a:effectRef>
+          <a:fontRef idx="minor">
+            <a:schemeClr val="lt1"/>
+          </a:fontRef>
+        </p:style>
+        <p:txBody>
+          <a:bodyPr rtlCol="0" anchor="ctr"/>
+          <a:lstStyle/>
+          <a:p>
+            <a:pPr algn="ctr"/>
+            <a:r>
+              <a:rPr lang="it-IT" dirty="0">
+                <a:latin typeface="Wingdings"/>
+                <a:ea typeface="Wingdings"/>
+                <a:cs typeface="Wingdings"/>
+                <a:sym typeface="Wingdings"/>
+              </a:rPr>
+              <a:t></a:t>
+            </a:r>
+            <a:r>
+              <a:rPr lang="it-IT" dirty="0"/>
+              <a:t>Column1</a:t>
+            </a:r>
+          </a:p>
+        </p:txBody>
+      </p:sp>
+      <p:sp>
+        <p:nvSpPr>
+          <p:cNvPr id="26" name="Rettangolo 25"/>
+          <p:cNvSpPr/>
+          <p:nvPr/>
+        </p:nvSpPr>
+        <p:spPr>
+          <a:xfrm>
+            <a:off x="7109507" y="2816370"/>
+            <a:ext cx="1328391" cy="375164"/>
+          </a:xfrm>
+          <a:prstGeom prst="rect">
+            <a:avLst/>
+          </a:prstGeom>
+        </p:spPr>
+        <p:style>
+          <a:lnRef idx="1">
+            <a:schemeClr val="accent1"/>
+          </a:lnRef>
+          <a:fillRef idx="3">
+            <a:schemeClr val="accent1"/>
+          </a:fillRef>
+          <a:effectRef idx="2">
+            <a:schemeClr val="accent1"/>
+          </a:effectRef>
+          <a:fontRef idx="minor">
+            <a:schemeClr val="lt1"/>
+          </a:fontRef>
+        </p:style>
+        <p:txBody>
+          <a:bodyPr rtlCol="0" anchor="ctr"/>
+          <a:lstStyle/>
+          <a:p>
+            <a:pPr algn="ctr"/>
+            <a:r>
+              <a:rPr lang="it-IT" dirty="0">
+                <a:latin typeface="ＭＳ ゴシック"/>
+                <a:ea typeface="ＭＳ ゴシック"/>
+                <a:cs typeface="ＭＳ ゴシック"/>
+              </a:rPr>
+              <a:t>☐</a:t>
+            </a:r>
+            <a:r>
+              <a:rPr lang="it-IT" dirty="0" err="1"/>
+              <a:t>Column</a:t>
+            </a:r>
+            <a:r>
+              <a:rPr lang="it-IT" dirty="0"/>
+              <a:t> 2</a:t>
+            </a:r>
+          </a:p>
+        </p:txBody>
+      </p:sp>
+      <p:sp>
+        <p:nvSpPr>
+          <p:cNvPr id="27" name="Rettangolo 26"/>
+          <p:cNvSpPr/>
+          <p:nvPr/>
+        </p:nvSpPr>
+        <p:spPr>
+          <a:xfrm>
+            <a:off x="7109507" y="3189661"/>
+            <a:ext cx="1328391" cy="375164"/>
+          </a:xfrm>
+          <a:prstGeom prst="rect">
+            <a:avLst/>
+          </a:prstGeom>
+        </p:spPr>
+        <p:style>
+          <a:lnRef idx="1">
+            <a:schemeClr val="accent1"/>
+          </a:lnRef>
+          <a:fillRef idx="3">
+            <a:schemeClr val="accent1"/>
+          </a:fillRef>
+          <a:effectRef idx="2">
+            <a:schemeClr val="accent1"/>
+          </a:effectRef>
+          <a:fontRef idx="minor">
+            <a:schemeClr val="lt1"/>
+          </a:fontRef>
+        </p:style>
+        <p:txBody>
+          <a:bodyPr rtlCol="0" anchor="ctr"/>
+          <a:lstStyle/>
+          <a:p>
+            <a:pPr algn="ctr"/>
+            <a:r>
+              <a:rPr lang="it-IT" dirty="0">
+                <a:latin typeface="Wingdings"/>
+                <a:ea typeface="Wingdings"/>
+                <a:cs typeface="Wingdings"/>
+                <a:sym typeface="Wingdings"/>
+              </a:rPr>
+              <a:t></a:t>
+            </a:r>
+            <a:r>
+              <a:rPr lang="it-IT" dirty="0" err="1"/>
+              <a:t>Column</a:t>
+            </a:r>
+            <a:r>
+              <a:rPr lang="it-IT" dirty="0"/>
+              <a:t> 3</a:t>
+            </a:r>
+          </a:p>
+        </p:txBody>
+      </p:sp>
+      <p:sp>
+        <p:nvSpPr>
+          <p:cNvPr id="30" name="Rettangolo 29"/>
+          <p:cNvSpPr/>
+          <p:nvPr/>
+        </p:nvSpPr>
+        <p:spPr>
+          <a:xfrm>
+            <a:off x="800682" y="1457016"/>
+            <a:ext cx="1808438" cy="466985"/>
+          </a:xfrm>
+          <a:prstGeom prst="rect">
+            <a:avLst/>
+          </a:prstGeom>
+        </p:spPr>
+        <p:style>
+          <a:lnRef idx="2">
+            <a:schemeClr val="accent1">
+              <a:shade val="50000"/>
+            </a:schemeClr>
+          </a:lnRef>
+          <a:fillRef idx="1">
+            <a:schemeClr val="accent1"/>
+          </a:fillRef>
+          <a:effectRef idx="0">
+            <a:schemeClr val="accent1"/>
+          </a:effectRef>
+          <a:fontRef idx="minor">
+            <a:schemeClr val="lt1"/>
+          </a:fontRef>
+        </p:style>
+        <p:txBody>
+          <a:bodyPr rtlCol="0" anchor="ctr"/>
+          <a:lstStyle/>
+          <a:p>
+            <a:pPr algn="ctr"/>
+            <a:r>
+              <a:rPr lang="it-IT" dirty="0"/>
               <a:t>Processi</a:t>
             </a:r>
-            <a:endParaRPr lang="it-IT" dirty="0"/>
           </a:p>
         </p:txBody>
       </p:sp>
@@ -4005,7 +5745,7 @@
         </p:nvSpPr>
         <p:spPr>
           <a:xfrm>
-            <a:off x="806566" y="1884624"/>
+            <a:off x="800682" y="1924001"/>
             <a:ext cx="1808438" cy="466985"/>
           </a:xfrm>
           <a:prstGeom prst="rect">
@@ -4032,7 +5772,7 @@
           <a:p>
             <a:pPr algn="ctr"/>
             <a:r>
-              <a:rPr lang="it-IT" dirty="0" err="1" smtClean="0"/>
+              <a:rPr lang="it-IT" dirty="0" err="1"/>
               <a:t>Workflow</a:t>
             </a:r>
             <a:endParaRPr lang="it-IT" dirty="0"/>
@@ -4047,7 +5787,7 @@
         </p:nvSpPr>
         <p:spPr>
           <a:xfrm>
-            <a:off x="806566" y="2351609"/>
+            <a:off x="800682" y="2390986"/>
             <a:ext cx="1808438" cy="466985"/>
           </a:xfrm>
           <a:prstGeom prst="rect">
@@ -4074,10 +5814,9 @@
           <a:p>
             <a:pPr algn="ctr"/>
             <a:r>
-              <a:rPr lang="it-IT" dirty="0" smtClean="0"/>
+              <a:rPr lang="it-IT" dirty="0"/>
               <a:t>Presidi</a:t>
             </a:r>
-            <a:endParaRPr lang="it-IT" dirty="0"/>
           </a:p>
         </p:txBody>
       </p:sp>
@@ -4089,7 +5828,7 @@
         </p:nvSpPr>
         <p:spPr>
           <a:xfrm>
-            <a:off x="800682" y="2825172"/>
+            <a:off x="794798" y="2864549"/>
             <a:ext cx="1808438" cy="466985"/>
           </a:xfrm>
           <a:prstGeom prst="rect">
@@ -4116,10 +5855,9 @@
           <a:p>
             <a:pPr algn="ctr"/>
             <a:r>
-              <a:rPr lang="it-IT" dirty="0" smtClean="0"/>
+              <a:rPr lang="it-IT" dirty="0"/>
               <a:t>Rischi</a:t>
             </a:r>
-            <a:endParaRPr lang="it-IT" dirty="0"/>
           </a:p>
         </p:txBody>
       </p:sp>
@@ -4131,7 +5869,7 @@
         </p:nvSpPr>
         <p:spPr>
           <a:xfrm>
-            <a:off x="806566" y="3298735"/>
+            <a:off x="800682" y="3338112"/>
             <a:ext cx="1808438" cy="466985"/>
           </a:xfrm>
           <a:prstGeom prst="rect">
@@ -4158,10 +5896,9 @@
           <a:p>
             <a:pPr algn="ctr"/>
             <a:r>
-              <a:rPr lang="it-IT" dirty="0" smtClean="0"/>
+              <a:rPr lang="it-IT" dirty="0"/>
               <a:t>Segnalazioni</a:t>
             </a:r>
-            <a:endParaRPr lang="it-IT" dirty="0"/>
           </a:p>
         </p:txBody>
       </p:sp>
@@ -4173,7 +5910,7 @@
         </p:nvSpPr>
         <p:spPr>
           <a:xfrm>
-            <a:off x="800682" y="3766257"/>
+            <a:off x="3235684" y="4668985"/>
             <a:ext cx="1808438" cy="466985"/>
           </a:xfrm>
           <a:prstGeom prst="rect">
@@ -4200,10 +5937,9 @@
           <a:p>
             <a:pPr algn="ctr"/>
             <a:r>
-              <a:rPr lang="it-IT" dirty="0" smtClean="0"/>
+              <a:rPr lang="it-IT" dirty="0"/>
               <a:t>Questionari</a:t>
             </a:r>
-            <a:endParaRPr lang="it-IT" dirty="0"/>
           </a:p>
         </p:txBody>
       </p:sp>
@@ -4215,7 +5951,7 @@
         </p:nvSpPr>
         <p:spPr>
           <a:xfrm>
-            <a:off x="806566" y="4233242"/>
+            <a:off x="3241568" y="5135970"/>
             <a:ext cx="1808438" cy="466985"/>
           </a:xfrm>
           <a:prstGeom prst="rect">
@@ -4242,7 +5978,7 @@
           <a:p>
             <a:pPr algn="ctr"/>
             <a:r>
-              <a:rPr lang="it-IT" dirty="0" err="1" smtClean="0"/>
+              <a:rPr lang="it-IT" dirty="0" err="1"/>
               <a:t>Checklist</a:t>
             </a:r>
             <a:endParaRPr lang="it-IT" dirty="0"/>
@@ -4257,7 +5993,7 @@
         </p:nvSpPr>
         <p:spPr>
           <a:xfrm>
-            <a:off x="800682" y="4700227"/>
+            <a:off x="3235684" y="5602955"/>
             <a:ext cx="1808438" cy="466985"/>
           </a:xfrm>
           <a:prstGeom prst="rect">
@@ -4284,10 +6020,9 @@
           <a:p>
             <a:pPr algn="ctr"/>
             <a:r>
-              <a:rPr lang="it-IT" dirty="0" smtClean="0"/>
+              <a:rPr lang="it-IT" dirty="0"/>
               <a:t>Modulistica</a:t>
             </a:r>
-            <a:endParaRPr lang="it-IT" dirty="0"/>
           </a:p>
         </p:txBody>
       </p:sp>
@@ -4299,7 +6034,7 @@
         </p:nvSpPr>
         <p:spPr>
           <a:xfrm>
-            <a:off x="800682" y="5173790"/>
+            <a:off x="794798" y="3805633"/>
             <a:ext cx="1808438" cy="466985"/>
           </a:xfrm>
           <a:prstGeom prst="rect">
@@ -4326,10 +6061,9 @@
           <a:p>
             <a:pPr algn="ctr"/>
             <a:r>
-              <a:rPr lang="it-IT" dirty="0" smtClean="0"/>
-              <a:t>Modelli di test</a:t>
-            </a:r>
-            <a:endParaRPr lang="it-IT" dirty="0"/>
+              <a:rPr lang="it-IT" dirty="0"/>
+              <a:t>Modelli di test &gt;</a:t>
+            </a:r>
           </a:p>
         </p:txBody>
       </p:sp>
@@ -4341,7 +6075,7 @@
         </p:nvSpPr>
         <p:spPr>
           <a:xfrm>
-            <a:off x="800682" y="5603724"/>
+            <a:off x="794798" y="4235567"/>
             <a:ext cx="1808438" cy="466985"/>
           </a:xfrm>
           <a:prstGeom prst="rect">
@@ -4368,10 +6102,9 @@
           <a:p>
             <a:pPr algn="ctr"/>
             <a:r>
-              <a:rPr lang="it-IT" dirty="0" smtClean="0"/>
-              <a:t>Sondaggi</a:t>
-            </a:r>
-            <a:endParaRPr lang="it-IT" dirty="0"/>
+              <a:rPr lang="it-IT" dirty="0"/>
+              <a:t>Sondaggi &gt;</a:t>
+            </a:r>
           </a:p>
         </p:txBody>
       </p:sp>
@@ -4383,8 +6116,8 @@
         </p:nvSpPr>
         <p:spPr>
           <a:xfrm>
-            <a:off x="800682" y="6070709"/>
-            <a:ext cx="1808438" cy="556045"/>
+            <a:off x="794798" y="4702552"/>
+            <a:ext cx="1808438" cy="516668"/>
           </a:xfrm>
           <a:prstGeom prst="rect">
             <a:avLst/>
@@ -4410,10 +6143,9 @@
           <a:p>
             <a:pPr algn="ctr"/>
             <a:r>
-              <a:rPr lang="it-IT" dirty="0" smtClean="0"/>
+              <a:rPr lang="it-IT" dirty="0"/>
               <a:t>Configurazioni &gt;</a:t>
             </a:r>
-            <a:endParaRPr lang="it-IT" dirty="0"/>
           </a:p>
         </p:txBody>
       </p:sp>
@@ -4426,7 +6158,7 @@
           <p:nvPr/>
         </p:nvPicPr>
         <p:blipFill>
-          <a:blip r:embed="rId4"/>
+          <a:blip r:embed="rId8"/>
           <a:stretch>
             <a:fillRect/>
           </a:stretch>
@@ -4475,18 +6207,17 @@
           <a:lstStyle/>
           <a:p>
             <a:r>
-              <a:rPr lang="it-IT" dirty="0" smtClean="0"/>
+              <a:rPr lang="it-IT" dirty="0"/>
               <a:t>    </a:t>
             </a:r>
             <a:r>
-              <a:rPr lang="it-IT" dirty="0" err="1" smtClean="0"/>
+              <a:rPr lang="it-IT" dirty="0" err="1"/>
               <a:t>Alacritas</a:t>
             </a:r>
             <a:r>
-              <a:rPr lang="it-IT" dirty="0" smtClean="0"/>
+              <a:rPr lang="it-IT" dirty="0"/>
               <a:t>   </a:t>
             </a:r>
-            <a:endParaRPr lang="it-IT" dirty="0"/>
           </a:p>
         </p:txBody>
       </p:sp>
@@ -4499,7 +6230,7 @@
           <p:nvPr/>
         </p:nvPicPr>
         <p:blipFill>
-          <a:blip r:embed="rId4"/>
+          <a:blip r:embed="rId8"/>
           <a:stretch>
             <a:fillRect/>
           </a:stretch>
@@ -4514,6 +6245,108 @@
           </a:prstGeom>
         </p:spPr>
       </p:pic>
+      <p:pic>
+        <p:nvPicPr>
+          <p:cNvPr id="18" name="Immagine 17" descr="dashboard-icon.png"/>
+          <p:cNvPicPr>
+            <a:picLocks noChangeAspect="1"/>
+          </p:cNvPicPr>
+          <p:nvPr/>
+        </p:nvPicPr>
+        <p:blipFill>
+          <a:blip r:embed="rId9">
+            <a:extLst>
+              <a:ext uri="{28A0092B-C50C-407E-A947-70E740481C1C}">
+                <a14:useLocalDpi xmlns:a14="http://schemas.microsoft.com/office/drawing/2010/main" val="0"/>
+              </a:ext>
+            </a:extLst>
+          </a:blip>
+          <a:stretch>
+            <a:fillRect/>
+          </a:stretch>
+        </p:blipFill>
+        <p:spPr>
+          <a:xfrm>
+            <a:off x="4567028" y="1417638"/>
+            <a:ext cx="495703" cy="495703"/>
+          </a:xfrm>
+          <a:prstGeom prst="rect">
+            <a:avLst/>
+          </a:prstGeom>
+        </p:spPr>
+      </p:pic>
+      <p:cxnSp>
+        <p:nvCxnSpPr>
+          <p:cNvPr id="10" name="Connettore 2 9"/>
+          <p:cNvCxnSpPr>
+            <a:stCxn id="38" idx="3"/>
+            <a:endCxn id="44" idx="1"/>
+          </p:cNvCxnSpPr>
+          <p:nvPr/>
+        </p:nvCxnSpPr>
+        <p:spPr>
+          <a:xfrm>
+            <a:off x="2603236" y="4039126"/>
+            <a:ext cx="621761" cy="419311"/>
+          </a:xfrm>
+          <a:prstGeom prst="straightConnector1">
+            <a:avLst/>
+          </a:prstGeom>
+          <a:ln>
+            <a:tailEnd type="arrow"/>
+          </a:ln>
+        </p:spPr>
+        <p:style>
+          <a:lnRef idx="2">
+            <a:schemeClr val="accent1"/>
+          </a:lnRef>
+          <a:fillRef idx="0">
+            <a:schemeClr val="accent1"/>
+          </a:fillRef>
+          <a:effectRef idx="1">
+            <a:schemeClr val="accent1"/>
+          </a:effectRef>
+          <a:fontRef idx="minor">
+            <a:schemeClr val="tx1"/>
+          </a:fontRef>
+        </p:style>
+      </p:cxnSp>
+      <p:cxnSp>
+        <p:nvCxnSpPr>
+          <p:cNvPr id="14" name="Connettore 2 13"/>
+          <p:cNvCxnSpPr>
+            <a:stCxn id="39" idx="3"/>
+            <a:endCxn id="44" idx="1"/>
+          </p:cNvCxnSpPr>
+          <p:nvPr/>
+        </p:nvCxnSpPr>
+        <p:spPr>
+          <a:xfrm flipV="1">
+            <a:off x="2603236" y="4458437"/>
+            <a:ext cx="621761" cy="10623"/>
+          </a:xfrm>
+          <a:prstGeom prst="straightConnector1">
+            <a:avLst/>
+          </a:prstGeom>
+          <a:ln>
+            <a:tailEnd type="arrow"/>
+          </a:ln>
+        </p:spPr>
+        <p:style>
+          <a:lnRef idx="2">
+            <a:schemeClr val="accent1"/>
+          </a:lnRef>
+          <a:fillRef idx="0">
+            <a:schemeClr val="accent1"/>
+          </a:fillRef>
+          <a:effectRef idx="1">
+            <a:schemeClr val="accent1"/>
+          </a:effectRef>
+          <a:fontRef idx="minor">
+            <a:schemeClr val="tx1"/>
+          </a:fontRef>
+        </p:style>
+      </p:cxnSp>
       <p:sp>
         <p:nvSpPr>
           <p:cNvPr id="44" name="Rettangolo 43"/>
@@ -4522,46 +6355,8 @@
         </p:nvSpPr>
         <p:spPr>
           <a:xfrm>
-            <a:off x="5781116" y="1351531"/>
-            <a:ext cx="1328391" cy="710889"/>
-          </a:xfrm>
-          <a:prstGeom prst="rect">
-            <a:avLst/>
-          </a:prstGeom>
-        </p:spPr>
-        <p:style>
-          <a:lnRef idx="1">
-            <a:schemeClr val="accent1"/>
-          </a:lnRef>
-          <a:fillRef idx="3">
-            <a:schemeClr val="accent1"/>
-          </a:fillRef>
-          <a:effectRef idx="2">
-            <a:schemeClr val="accent1"/>
-          </a:effectRef>
-          <a:fontRef idx="minor">
-            <a:schemeClr val="lt1"/>
-          </a:fontRef>
-        </p:style>
-        <p:txBody>
-          <a:bodyPr rtlCol="0" anchor="ctr"/>
-          <a:lstStyle/>
-          <a:p>
-            <a:pPr algn="ctr"/>
-            <a:endParaRPr lang="it-IT"/>
-          </a:p>
-        </p:txBody>
-      </p:sp>
-      <p:sp>
-        <p:nvSpPr>
-          <p:cNvPr id="45" name="Rettangolo 44"/>
-          <p:cNvSpPr/>
-          <p:nvPr/>
-        </p:nvSpPr>
-        <p:spPr>
-          <a:xfrm>
-            <a:off x="5781116" y="1312092"/>
-            <a:ext cx="1328391" cy="375164"/>
+            <a:off x="3224997" y="4224944"/>
+            <a:ext cx="1808438" cy="466985"/>
           </a:xfrm>
           <a:prstGeom prst="rect">
             <a:avLst/>
@@ -4587,67 +6382,16 @@
           <a:p>
             <a:pPr algn="ctr"/>
             <a:r>
-              <a:rPr lang="it-IT" dirty="0" smtClean="0"/>
-              <a:t>User </a:t>
-            </a:r>
-            <a:r>
-              <a:rPr lang="it-IT" dirty="0" err="1" smtClean="0"/>
-              <a:t>Profile</a:t>
-            </a:r>
-            <a:endParaRPr lang="it-IT" dirty="0"/>
-          </a:p>
-        </p:txBody>
-      </p:sp>
-      <p:sp>
-        <p:nvSpPr>
-          <p:cNvPr id="46" name="Rettangolo 45"/>
-          <p:cNvSpPr/>
-          <p:nvPr/>
-        </p:nvSpPr>
-        <p:spPr>
-          <a:xfrm>
-            <a:off x="5781116" y="1687256"/>
-            <a:ext cx="1328391" cy="375164"/>
-          </a:xfrm>
-          <a:prstGeom prst="rect">
-            <a:avLst/>
-          </a:prstGeom>
-        </p:spPr>
-        <p:style>
-          <a:lnRef idx="1">
-            <a:schemeClr val="accent1"/>
-          </a:lnRef>
-          <a:fillRef idx="3">
-            <a:schemeClr val="accent1"/>
-          </a:fillRef>
-          <a:effectRef idx="2">
-            <a:schemeClr val="accent1"/>
-          </a:effectRef>
-          <a:fontRef idx="minor">
-            <a:schemeClr val="lt1"/>
-          </a:fontRef>
-        </p:style>
-        <p:txBody>
-          <a:bodyPr rtlCol="0" anchor="ctr"/>
-          <a:lstStyle/>
-          <a:p>
-            <a:pPr algn="ctr"/>
-            <a:r>
-              <a:rPr lang="it-IT" dirty="0" smtClean="0">
-                <a:latin typeface="ＭＳ ゴシック"/>
-                <a:ea typeface="ＭＳ ゴシック"/>
-                <a:cs typeface="ＭＳ ゴシック"/>
-              </a:rPr>
-              <a:t>Dashboard</a:t>
-            </a:r>
-            <a:endParaRPr lang="it-IT" dirty="0"/>
+              <a:rPr lang="it-IT" dirty="0"/>
+              <a:t>Generico</a:t>
+            </a:r>
           </a:p>
         </p:txBody>
       </p:sp>
     </p:spTree>
     <p:extLst>
       <p:ext uri="{BB962C8B-B14F-4D97-AF65-F5344CB8AC3E}">
-        <p14:creationId xmlns:p14="http://schemas.microsoft.com/office/powerpoint/2010/main" val="353263147"/>
+        <p14:creationId xmlns:p14="http://schemas.microsoft.com/office/powerpoint/2010/main" val="3479467549"/>
       </p:ext>
     </p:extLst>
   </p:cSld>
@@ -4685,1457 +6429,6 @@
           </p:nvPr>
         </p:nvSpPr>
         <p:spPr>
-          <a:xfrm>
-            <a:off x="457200" y="274638"/>
-            <a:ext cx="8229600" cy="581318"/>
-          </a:xfrm>
-        </p:spPr>
-        <p:txBody>
-          <a:bodyPr>
-            <a:normAutofit fontScale="90000"/>
-          </a:bodyPr>
-          <a:lstStyle/>
-          <a:p>
-            <a:r>
-              <a:rPr lang="it-IT" dirty="0" smtClean="0"/>
-              <a:t>Vista principale</a:t>
-            </a:r>
-            <a:endParaRPr lang="it-IT" dirty="0"/>
-          </a:p>
-        </p:txBody>
-      </p:sp>
-      <p:sp>
-        <p:nvSpPr>
-          <p:cNvPr id="4" name="Rettangolo 3"/>
-          <p:cNvSpPr/>
-          <p:nvPr/>
-        </p:nvSpPr>
-        <p:spPr>
-          <a:xfrm>
-            <a:off x="800682" y="1417638"/>
-            <a:ext cx="7886118" cy="5209116"/>
-          </a:xfrm>
-          <a:prstGeom prst="rect">
-            <a:avLst/>
-          </a:prstGeom>
-        </p:spPr>
-        <p:style>
-          <a:lnRef idx="2">
-            <a:schemeClr val="accent1"/>
-          </a:lnRef>
-          <a:fillRef idx="1">
-            <a:schemeClr val="lt1"/>
-          </a:fillRef>
-          <a:effectRef idx="0">
-            <a:schemeClr val="accent1"/>
-          </a:effectRef>
-          <a:fontRef idx="minor">
-            <a:schemeClr val="dk1"/>
-          </a:fontRef>
-        </p:style>
-        <p:txBody>
-          <a:bodyPr rtlCol="0" anchor="ctr"/>
-          <a:lstStyle/>
-          <a:p>
-            <a:pPr algn="ctr"/>
-            <a:r>
-              <a:rPr lang="it-IT" dirty="0" err="1" smtClean="0"/>
-              <a:t>Table</a:t>
-            </a:r>
-            <a:endParaRPr lang="it-IT" dirty="0" smtClean="0"/>
-          </a:p>
-          <a:p>
-            <a:pPr algn="ctr"/>
-            <a:endParaRPr lang="it-IT" dirty="0"/>
-          </a:p>
-          <a:p>
-            <a:pPr algn="ctr"/>
-            <a:endParaRPr lang="it-IT" dirty="0" smtClean="0"/>
-          </a:p>
-          <a:p>
-            <a:pPr algn="ctr"/>
-            <a:endParaRPr lang="it-IT" dirty="0"/>
-          </a:p>
-          <a:p>
-            <a:pPr algn="ctr"/>
-            <a:endParaRPr lang="it-IT" dirty="0"/>
-          </a:p>
-        </p:txBody>
-      </p:sp>
-      <p:sp>
-        <p:nvSpPr>
-          <p:cNvPr id="5" name="Rettangolo 4"/>
-          <p:cNvSpPr/>
-          <p:nvPr/>
-        </p:nvSpPr>
-        <p:spPr>
-          <a:xfrm>
-            <a:off x="800682" y="855956"/>
-            <a:ext cx="7886118" cy="561682"/>
-          </a:xfrm>
-          <a:prstGeom prst="rect">
-            <a:avLst/>
-          </a:prstGeom>
-        </p:spPr>
-        <p:style>
-          <a:lnRef idx="2">
-            <a:schemeClr val="accent1"/>
-          </a:lnRef>
-          <a:fillRef idx="1">
-            <a:schemeClr val="lt1"/>
-          </a:fillRef>
-          <a:effectRef idx="0">
-            <a:schemeClr val="accent1"/>
-          </a:effectRef>
-          <a:fontRef idx="minor">
-            <a:schemeClr val="dk1"/>
-          </a:fontRef>
-        </p:style>
-        <p:txBody>
-          <a:bodyPr rtlCol="0" anchor="ctr"/>
-          <a:lstStyle/>
-          <a:p>
-            <a:r>
-              <a:rPr lang="it-IT" dirty="0" err="1" smtClean="0"/>
-              <a:t>Gorico</a:t>
-            </a:r>
-            <a:r>
-              <a:rPr lang="it-IT" dirty="0" smtClean="0"/>
-              <a:t>		Azienda 					        Amedeo Poli</a:t>
-            </a:r>
-            <a:endParaRPr lang="it-IT" dirty="0"/>
-          </a:p>
-        </p:txBody>
-      </p:sp>
-      <p:pic>
-        <p:nvPicPr>
-          <p:cNvPr id="6" name="Immagine 5" descr="Schermata 2018-08-13 alle 10.02.11.png"/>
-          <p:cNvPicPr>
-            <a:picLocks noChangeAspect="1"/>
-          </p:cNvPicPr>
-          <p:nvPr/>
-        </p:nvPicPr>
-        <p:blipFill>
-          <a:blip r:embed="rId2">
-            <a:extLst>
-              <a:ext uri="{28A0092B-C50C-407E-A947-70E740481C1C}">
-                <a14:useLocalDpi xmlns:a14="http://schemas.microsoft.com/office/drawing/2010/main" val="0"/>
-              </a:ext>
-            </a:extLst>
-          </a:blip>
-          <a:stretch>
-            <a:fillRect/>
-          </a:stretch>
-        </p:blipFill>
-        <p:spPr>
-          <a:xfrm>
-            <a:off x="7485398" y="922338"/>
-            <a:ext cx="952500" cy="495300"/>
-          </a:xfrm>
-          <a:prstGeom prst="rect">
-            <a:avLst/>
-          </a:prstGeom>
-        </p:spPr>
-      </p:pic>
-      <p:sp>
-        <p:nvSpPr>
-          <p:cNvPr id="7" name="Rettangolo 6"/>
-          <p:cNvSpPr/>
-          <p:nvPr/>
-        </p:nvSpPr>
-        <p:spPr>
-          <a:xfrm>
-            <a:off x="2609120" y="1417639"/>
-            <a:ext cx="6075290" cy="556582"/>
-          </a:xfrm>
-          <a:prstGeom prst="rect">
-            <a:avLst/>
-          </a:prstGeom>
-        </p:spPr>
-        <p:style>
-          <a:lnRef idx="2">
-            <a:schemeClr val="accent1"/>
-          </a:lnRef>
-          <a:fillRef idx="1">
-            <a:schemeClr val="lt1"/>
-          </a:fillRef>
-          <a:effectRef idx="0">
-            <a:schemeClr val="accent1"/>
-          </a:effectRef>
-          <a:fontRef idx="minor">
-            <a:schemeClr val="dk1"/>
-          </a:fontRef>
-        </p:style>
-        <p:txBody>
-          <a:bodyPr rtlCol="0" anchor="ctr"/>
-          <a:lstStyle/>
-          <a:p>
-            <a:pPr algn="ctr"/>
-            <a:endParaRPr lang="it-IT"/>
-          </a:p>
-        </p:txBody>
-      </p:sp>
-      <p:pic>
-        <p:nvPicPr>
-          <p:cNvPr id="8" name="Immagine 7" descr="Schermata 2018-08-13 alle 10.04.23.png"/>
-          <p:cNvPicPr>
-            <a:picLocks noChangeAspect="1"/>
-          </p:cNvPicPr>
-          <p:nvPr/>
-        </p:nvPicPr>
-        <p:blipFill>
-          <a:blip r:embed="rId3">
-            <a:extLst>
-              <a:ext uri="{28A0092B-C50C-407E-A947-70E740481C1C}">
-                <a14:useLocalDpi xmlns:a14="http://schemas.microsoft.com/office/drawing/2010/main" val="0"/>
-              </a:ext>
-            </a:extLst>
-          </a:blip>
-          <a:stretch>
-            <a:fillRect/>
-          </a:stretch>
-        </p:blipFill>
-        <p:spPr>
-          <a:xfrm>
-            <a:off x="2808470" y="1466801"/>
-            <a:ext cx="457200" cy="457200"/>
-          </a:xfrm>
-          <a:prstGeom prst="rect">
-            <a:avLst/>
-          </a:prstGeom>
-        </p:spPr>
-      </p:pic>
-      <p:sp>
-        <p:nvSpPr>
-          <p:cNvPr id="9" name="Rettangolo 8"/>
-          <p:cNvSpPr/>
-          <p:nvPr/>
-        </p:nvSpPr>
-        <p:spPr>
-          <a:xfrm>
-            <a:off x="800682" y="1457014"/>
-            <a:ext cx="1808438" cy="5169739"/>
-          </a:xfrm>
-          <a:prstGeom prst="rect">
-            <a:avLst/>
-          </a:prstGeom>
-        </p:spPr>
-        <p:style>
-          <a:lnRef idx="2">
-            <a:schemeClr val="accent1"/>
-          </a:lnRef>
-          <a:fillRef idx="1">
-            <a:schemeClr val="lt1"/>
-          </a:fillRef>
-          <a:effectRef idx="0">
-            <a:schemeClr val="accent1"/>
-          </a:effectRef>
-          <a:fontRef idx="minor">
-            <a:schemeClr val="dk1"/>
-          </a:fontRef>
-        </p:style>
-        <p:txBody>
-          <a:bodyPr rtlCol="0" anchor="ctr"/>
-          <a:lstStyle/>
-          <a:p>
-            <a:pPr algn="ctr"/>
-            <a:endParaRPr lang="it-IT" dirty="0" smtClean="0"/>
-          </a:p>
-          <a:p>
-            <a:pPr algn="ctr"/>
-            <a:endParaRPr lang="it-IT" dirty="0"/>
-          </a:p>
-          <a:p>
-            <a:pPr algn="ctr"/>
-            <a:endParaRPr lang="it-IT" dirty="0" smtClean="0"/>
-          </a:p>
-          <a:p>
-            <a:pPr algn="ctr"/>
-            <a:endParaRPr lang="it-IT" dirty="0"/>
-          </a:p>
-          <a:p>
-            <a:pPr algn="ctr"/>
-            <a:endParaRPr lang="it-IT" dirty="0" smtClean="0"/>
-          </a:p>
-          <a:p>
-            <a:pPr algn="ctr"/>
-            <a:endParaRPr lang="it-IT" dirty="0"/>
-          </a:p>
-          <a:p>
-            <a:pPr algn="ctr"/>
-            <a:endParaRPr lang="it-IT" dirty="0" smtClean="0"/>
-          </a:p>
-          <a:p>
-            <a:pPr algn="ctr"/>
-            <a:endParaRPr lang="it-IT" dirty="0"/>
-          </a:p>
-          <a:p>
-            <a:pPr algn="ctr"/>
-            <a:endParaRPr lang="it-IT" dirty="0" smtClean="0"/>
-          </a:p>
-          <a:p>
-            <a:pPr algn="ctr"/>
-            <a:endParaRPr lang="it-IT" dirty="0"/>
-          </a:p>
-          <a:p>
-            <a:pPr algn="ctr"/>
-            <a:endParaRPr lang="it-IT" dirty="0" smtClean="0"/>
-          </a:p>
-          <a:p>
-            <a:pPr algn="ctr"/>
-            <a:endParaRPr lang="it-IT" dirty="0"/>
-          </a:p>
-          <a:p>
-            <a:pPr algn="ctr"/>
-            <a:endParaRPr lang="it-IT" dirty="0" smtClean="0"/>
-          </a:p>
-          <a:p>
-            <a:pPr algn="ctr"/>
-            <a:endParaRPr lang="it-IT" dirty="0"/>
-          </a:p>
-          <a:p>
-            <a:pPr algn="ctr"/>
-            <a:endParaRPr lang="it-IT" dirty="0" smtClean="0"/>
-          </a:p>
-          <a:p>
-            <a:pPr algn="ctr"/>
-            <a:endParaRPr lang="it-IT" dirty="0"/>
-          </a:p>
-        </p:txBody>
-      </p:sp>
-      <p:pic>
-        <p:nvPicPr>
-          <p:cNvPr id="11" name="Immagine 10" descr="Schermata 2018-08-13 alle 10.04.04.png"/>
-          <p:cNvPicPr>
-            <a:picLocks noChangeAspect="1"/>
-          </p:cNvPicPr>
-          <p:nvPr/>
-        </p:nvPicPr>
-        <p:blipFill>
-          <a:blip r:embed="rId4">
-            <a:extLst>
-              <a:ext uri="{28A0092B-C50C-407E-A947-70E740481C1C}">
-                <a14:useLocalDpi xmlns:a14="http://schemas.microsoft.com/office/drawing/2010/main" val="0"/>
-              </a:ext>
-            </a:extLst>
-          </a:blip>
-          <a:stretch>
-            <a:fillRect/>
-          </a:stretch>
-        </p:blipFill>
-        <p:spPr>
-          <a:xfrm>
-            <a:off x="3472210" y="1456142"/>
-            <a:ext cx="457200" cy="457200"/>
-          </a:xfrm>
-          <a:prstGeom prst="rect">
-            <a:avLst/>
-          </a:prstGeom>
-        </p:spPr>
-      </p:pic>
-      <p:pic>
-        <p:nvPicPr>
-          <p:cNvPr id="16" name="Immagine 15"/>
-          <p:cNvPicPr>
-            <a:picLocks noChangeAspect="1"/>
-          </p:cNvPicPr>
-          <p:nvPr/>
-        </p:nvPicPr>
-        <p:blipFill>
-          <a:blip r:embed="rId5"/>
-          <a:stretch>
-            <a:fillRect/>
-          </a:stretch>
-        </p:blipFill>
-        <p:spPr>
-          <a:xfrm>
-            <a:off x="6925182" y="1466801"/>
-            <a:ext cx="1120432" cy="548496"/>
-          </a:xfrm>
-          <a:prstGeom prst="rect">
-            <a:avLst/>
-          </a:prstGeom>
-        </p:spPr>
-      </p:pic>
-      <p:pic>
-        <p:nvPicPr>
-          <p:cNvPr id="13" name="Immagine 12"/>
-          <p:cNvPicPr>
-            <a:picLocks noChangeAspect="1"/>
-          </p:cNvPicPr>
-          <p:nvPr/>
-        </p:nvPicPr>
-        <p:blipFill>
-          <a:blip r:embed="rId6"/>
-          <a:stretch>
-            <a:fillRect/>
-          </a:stretch>
-        </p:blipFill>
-        <p:spPr>
-          <a:xfrm>
-            <a:off x="7920692" y="1456142"/>
-            <a:ext cx="517206" cy="517206"/>
-          </a:xfrm>
-          <a:prstGeom prst="rect">
-            <a:avLst/>
-          </a:prstGeom>
-        </p:spPr>
-      </p:pic>
-      <p:sp>
-        <p:nvSpPr>
-          <p:cNvPr id="17" name="Rettangolo 16"/>
-          <p:cNvSpPr/>
-          <p:nvPr/>
-        </p:nvSpPr>
-        <p:spPr>
-          <a:xfrm>
-            <a:off x="2609120" y="1974221"/>
-            <a:ext cx="6077680" cy="607452"/>
-          </a:xfrm>
-          <a:prstGeom prst="rect">
-            <a:avLst/>
-          </a:prstGeom>
-        </p:spPr>
-        <p:style>
-          <a:lnRef idx="2">
-            <a:schemeClr val="accent1"/>
-          </a:lnRef>
-          <a:fillRef idx="1">
-            <a:schemeClr val="lt1"/>
-          </a:fillRef>
-          <a:effectRef idx="0">
-            <a:schemeClr val="accent1"/>
-          </a:effectRef>
-          <a:fontRef idx="minor">
-            <a:schemeClr val="dk1"/>
-          </a:fontRef>
-        </p:style>
-        <p:txBody>
-          <a:bodyPr rtlCol="0" anchor="ctr"/>
-          <a:lstStyle/>
-          <a:p>
-            <a:r>
-              <a:rPr lang="it-IT" dirty="0"/>
-              <a:t> </a:t>
-            </a:r>
-            <a:r>
-              <a:rPr lang="it-IT" dirty="0" smtClean="0"/>
-              <a:t>__</a:t>
-            </a:r>
-            <a:r>
-              <a:rPr lang="it-IT" i="1" u="sng" dirty="0" smtClean="0"/>
-              <a:t>Filtro__</a:t>
-            </a:r>
-            <a:r>
-              <a:rPr lang="it-IT" dirty="0" smtClean="0"/>
-              <a:t>              </a:t>
-            </a:r>
-            <a:endParaRPr lang="it-IT" dirty="0"/>
-          </a:p>
-        </p:txBody>
-      </p:sp>
-      <p:pic>
-        <p:nvPicPr>
-          <p:cNvPr id="22" name="Immagine 21" descr="Schermata 2018-08-13 alle 10.04.34.png"/>
-          <p:cNvPicPr>
-            <a:picLocks noChangeAspect="1"/>
-          </p:cNvPicPr>
-          <p:nvPr/>
-        </p:nvPicPr>
-        <p:blipFill>
-          <a:blip r:embed="rId7">
-            <a:extLst>
-              <a:ext uri="{28A0092B-C50C-407E-A947-70E740481C1C}">
-                <a14:useLocalDpi xmlns:a14="http://schemas.microsoft.com/office/drawing/2010/main" val="0"/>
-              </a:ext>
-            </a:extLst>
-          </a:blip>
-          <a:stretch>
-            <a:fillRect/>
-          </a:stretch>
-        </p:blipFill>
-        <p:spPr>
-          <a:xfrm>
-            <a:off x="4004516" y="1457015"/>
-            <a:ext cx="469365" cy="456327"/>
-          </a:xfrm>
-          <a:prstGeom prst="rect">
-            <a:avLst/>
-          </a:prstGeom>
-        </p:spPr>
-      </p:pic>
-      <p:pic>
-        <p:nvPicPr>
-          <p:cNvPr id="23" name="Immagine 22"/>
-          <p:cNvPicPr>
-            <a:picLocks noChangeAspect="1"/>
-          </p:cNvPicPr>
-          <p:nvPr/>
-        </p:nvPicPr>
-        <p:blipFill>
-          <a:blip r:embed="rId8"/>
-          <a:stretch>
-            <a:fillRect/>
-          </a:stretch>
-        </p:blipFill>
-        <p:spPr>
-          <a:xfrm>
-            <a:off x="7951604" y="2160273"/>
-            <a:ext cx="486294" cy="280933"/>
-          </a:xfrm>
-          <a:prstGeom prst="rect">
-            <a:avLst/>
-          </a:prstGeom>
-        </p:spPr>
-      </p:pic>
-      <p:sp>
-        <p:nvSpPr>
-          <p:cNvPr id="24" name="Rettangolo 23"/>
-          <p:cNvSpPr/>
-          <p:nvPr/>
-        </p:nvSpPr>
-        <p:spPr>
-          <a:xfrm>
-            <a:off x="7109507" y="2441206"/>
-            <a:ext cx="1328391" cy="1123619"/>
-          </a:xfrm>
-          <a:prstGeom prst="rect">
-            <a:avLst/>
-          </a:prstGeom>
-        </p:spPr>
-        <p:style>
-          <a:lnRef idx="1">
-            <a:schemeClr val="accent1"/>
-          </a:lnRef>
-          <a:fillRef idx="3">
-            <a:schemeClr val="accent1"/>
-          </a:fillRef>
-          <a:effectRef idx="2">
-            <a:schemeClr val="accent1"/>
-          </a:effectRef>
-          <a:fontRef idx="minor">
-            <a:schemeClr val="lt1"/>
-          </a:fontRef>
-        </p:style>
-        <p:txBody>
-          <a:bodyPr rtlCol="0" anchor="ctr"/>
-          <a:lstStyle/>
-          <a:p>
-            <a:pPr algn="ctr"/>
-            <a:endParaRPr lang="it-IT"/>
-          </a:p>
-        </p:txBody>
-      </p:sp>
-      <p:sp>
-        <p:nvSpPr>
-          <p:cNvPr id="25" name="Rettangolo 24"/>
-          <p:cNvSpPr/>
-          <p:nvPr/>
-        </p:nvSpPr>
-        <p:spPr>
-          <a:xfrm>
-            <a:off x="7109507" y="2441206"/>
-            <a:ext cx="1328391" cy="375164"/>
-          </a:xfrm>
-          <a:prstGeom prst="rect">
-            <a:avLst/>
-          </a:prstGeom>
-        </p:spPr>
-        <p:style>
-          <a:lnRef idx="1">
-            <a:schemeClr val="accent1"/>
-          </a:lnRef>
-          <a:fillRef idx="3">
-            <a:schemeClr val="accent1"/>
-          </a:fillRef>
-          <a:effectRef idx="2">
-            <a:schemeClr val="accent1"/>
-          </a:effectRef>
-          <a:fontRef idx="minor">
-            <a:schemeClr val="lt1"/>
-          </a:fontRef>
-        </p:style>
-        <p:txBody>
-          <a:bodyPr rtlCol="0" anchor="ctr"/>
-          <a:lstStyle/>
-          <a:p>
-            <a:pPr algn="ctr"/>
-            <a:r>
-              <a:rPr lang="it-IT" dirty="0" smtClean="0">
-                <a:latin typeface="Wingdings"/>
-                <a:ea typeface="Wingdings"/>
-                <a:cs typeface="Wingdings"/>
-                <a:sym typeface="Wingdings"/>
-              </a:rPr>
-              <a:t></a:t>
-            </a:r>
-            <a:r>
-              <a:rPr lang="it-IT" dirty="0" smtClean="0"/>
-              <a:t>Column1</a:t>
-            </a:r>
-            <a:endParaRPr lang="it-IT" dirty="0"/>
-          </a:p>
-        </p:txBody>
-      </p:sp>
-      <p:sp>
-        <p:nvSpPr>
-          <p:cNvPr id="26" name="Rettangolo 25"/>
-          <p:cNvSpPr/>
-          <p:nvPr/>
-        </p:nvSpPr>
-        <p:spPr>
-          <a:xfrm>
-            <a:off x="7109507" y="2816370"/>
-            <a:ext cx="1328391" cy="375164"/>
-          </a:xfrm>
-          <a:prstGeom prst="rect">
-            <a:avLst/>
-          </a:prstGeom>
-        </p:spPr>
-        <p:style>
-          <a:lnRef idx="1">
-            <a:schemeClr val="accent1"/>
-          </a:lnRef>
-          <a:fillRef idx="3">
-            <a:schemeClr val="accent1"/>
-          </a:fillRef>
-          <a:effectRef idx="2">
-            <a:schemeClr val="accent1"/>
-          </a:effectRef>
-          <a:fontRef idx="minor">
-            <a:schemeClr val="lt1"/>
-          </a:fontRef>
-        </p:style>
-        <p:txBody>
-          <a:bodyPr rtlCol="0" anchor="ctr"/>
-          <a:lstStyle/>
-          <a:p>
-            <a:pPr algn="ctr"/>
-            <a:r>
-              <a:rPr lang="it-IT" dirty="0" smtClean="0">
-                <a:latin typeface="ＭＳ ゴシック"/>
-                <a:ea typeface="ＭＳ ゴシック"/>
-                <a:cs typeface="ＭＳ ゴシック"/>
-              </a:rPr>
-              <a:t>☐</a:t>
-            </a:r>
-            <a:r>
-              <a:rPr lang="it-IT" dirty="0" err="1" smtClean="0"/>
-              <a:t>Column</a:t>
-            </a:r>
-            <a:r>
-              <a:rPr lang="it-IT" dirty="0" smtClean="0"/>
-              <a:t> 2</a:t>
-            </a:r>
-            <a:endParaRPr lang="it-IT" dirty="0"/>
-          </a:p>
-        </p:txBody>
-      </p:sp>
-      <p:sp>
-        <p:nvSpPr>
-          <p:cNvPr id="27" name="Rettangolo 26"/>
-          <p:cNvSpPr/>
-          <p:nvPr/>
-        </p:nvSpPr>
-        <p:spPr>
-          <a:xfrm>
-            <a:off x="7109507" y="3189661"/>
-            <a:ext cx="1328391" cy="375164"/>
-          </a:xfrm>
-          <a:prstGeom prst="rect">
-            <a:avLst/>
-          </a:prstGeom>
-        </p:spPr>
-        <p:style>
-          <a:lnRef idx="1">
-            <a:schemeClr val="accent1"/>
-          </a:lnRef>
-          <a:fillRef idx="3">
-            <a:schemeClr val="accent1"/>
-          </a:fillRef>
-          <a:effectRef idx="2">
-            <a:schemeClr val="accent1"/>
-          </a:effectRef>
-          <a:fontRef idx="minor">
-            <a:schemeClr val="lt1"/>
-          </a:fontRef>
-        </p:style>
-        <p:txBody>
-          <a:bodyPr rtlCol="0" anchor="ctr"/>
-          <a:lstStyle/>
-          <a:p>
-            <a:pPr algn="ctr"/>
-            <a:r>
-              <a:rPr lang="it-IT" dirty="0" smtClean="0">
-                <a:latin typeface="Wingdings"/>
-                <a:ea typeface="Wingdings"/>
-                <a:cs typeface="Wingdings"/>
-                <a:sym typeface="Wingdings"/>
-              </a:rPr>
-              <a:t></a:t>
-            </a:r>
-            <a:r>
-              <a:rPr lang="it-IT" dirty="0" err="1" smtClean="0"/>
-              <a:t>Column</a:t>
-            </a:r>
-            <a:r>
-              <a:rPr lang="it-IT" dirty="0" smtClean="0"/>
-              <a:t> 3</a:t>
-            </a:r>
-            <a:endParaRPr lang="it-IT" dirty="0"/>
-          </a:p>
-        </p:txBody>
-      </p:sp>
-      <p:sp>
-        <p:nvSpPr>
-          <p:cNvPr id="30" name="Rettangolo 29"/>
-          <p:cNvSpPr/>
-          <p:nvPr/>
-        </p:nvSpPr>
-        <p:spPr>
-          <a:xfrm>
-            <a:off x="800682" y="1457016"/>
-            <a:ext cx="1808438" cy="466985"/>
-          </a:xfrm>
-          <a:prstGeom prst="rect">
-            <a:avLst/>
-          </a:prstGeom>
-        </p:spPr>
-        <p:style>
-          <a:lnRef idx="2">
-            <a:schemeClr val="accent1">
-              <a:shade val="50000"/>
-            </a:schemeClr>
-          </a:lnRef>
-          <a:fillRef idx="1">
-            <a:schemeClr val="accent1"/>
-          </a:fillRef>
-          <a:effectRef idx="0">
-            <a:schemeClr val="accent1"/>
-          </a:effectRef>
-          <a:fontRef idx="minor">
-            <a:schemeClr val="lt1"/>
-          </a:fontRef>
-        </p:style>
-        <p:txBody>
-          <a:bodyPr rtlCol="0" anchor="ctr"/>
-          <a:lstStyle/>
-          <a:p>
-            <a:pPr algn="ctr"/>
-            <a:r>
-              <a:rPr lang="it-IT" dirty="0" smtClean="0"/>
-              <a:t>Processi</a:t>
-            </a:r>
-            <a:endParaRPr lang="it-IT" dirty="0"/>
-          </a:p>
-        </p:txBody>
-      </p:sp>
-      <p:sp>
-        <p:nvSpPr>
-          <p:cNvPr id="31" name="Rettangolo 30"/>
-          <p:cNvSpPr/>
-          <p:nvPr/>
-        </p:nvSpPr>
-        <p:spPr>
-          <a:xfrm>
-            <a:off x="800682" y="1924001"/>
-            <a:ext cx="1808438" cy="466985"/>
-          </a:xfrm>
-          <a:prstGeom prst="rect">
-            <a:avLst/>
-          </a:prstGeom>
-        </p:spPr>
-        <p:style>
-          <a:lnRef idx="2">
-            <a:schemeClr val="accent1"/>
-          </a:lnRef>
-          <a:fillRef idx="1">
-            <a:schemeClr val="lt1"/>
-          </a:fillRef>
-          <a:effectRef idx="0">
-            <a:schemeClr val="accent1"/>
-          </a:effectRef>
-          <a:fontRef idx="minor">
-            <a:schemeClr val="dk1"/>
-          </a:fontRef>
-        </p:style>
-        <p:txBody>
-          <a:bodyPr rtlCol="0" anchor="ctr"/>
-          <a:lstStyle/>
-          <a:p>
-            <a:pPr algn="ctr"/>
-            <a:r>
-              <a:rPr lang="it-IT" dirty="0" err="1" smtClean="0"/>
-              <a:t>Workflow</a:t>
-            </a:r>
-            <a:endParaRPr lang="it-IT" dirty="0"/>
-          </a:p>
-        </p:txBody>
-      </p:sp>
-      <p:sp>
-        <p:nvSpPr>
-          <p:cNvPr id="32" name="Rettangolo 31"/>
-          <p:cNvSpPr/>
-          <p:nvPr/>
-        </p:nvSpPr>
-        <p:spPr>
-          <a:xfrm>
-            <a:off x="800682" y="2390986"/>
-            <a:ext cx="1808438" cy="466985"/>
-          </a:xfrm>
-          <a:prstGeom prst="rect">
-            <a:avLst/>
-          </a:prstGeom>
-        </p:spPr>
-        <p:style>
-          <a:lnRef idx="2">
-            <a:schemeClr val="accent1"/>
-          </a:lnRef>
-          <a:fillRef idx="1">
-            <a:schemeClr val="lt1"/>
-          </a:fillRef>
-          <a:effectRef idx="0">
-            <a:schemeClr val="accent1"/>
-          </a:effectRef>
-          <a:fontRef idx="minor">
-            <a:schemeClr val="dk1"/>
-          </a:fontRef>
-        </p:style>
-        <p:txBody>
-          <a:bodyPr rtlCol="0" anchor="ctr"/>
-          <a:lstStyle/>
-          <a:p>
-            <a:pPr algn="ctr"/>
-            <a:r>
-              <a:rPr lang="it-IT" dirty="0" smtClean="0"/>
-              <a:t>Presidi</a:t>
-            </a:r>
-            <a:endParaRPr lang="it-IT" dirty="0"/>
-          </a:p>
-        </p:txBody>
-      </p:sp>
-      <p:sp>
-        <p:nvSpPr>
-          <p:cNvPr id="33" name="Rettangolo 32"/>
-          <p:cNvSpPr/>
-          <p:nvPr/>
-        </p:nvSpPr>
-        <p:spPr>
-          <a:xfrm>
-            <a:off x="794798" y="2864549"/>
-            <a:ext cx="1808438" cy="466985"/>
-          </a:xfrm>
-          <a:prstGeom prst="rect">
-            <a:avLst/>
-          </a:prstGeom>
-        </p:spPr>
-        <p:style>
-          <a:lnRef idx="2">
-            <a:schemeClr val="accent1"/>
-          </a:lnRef>
-          <a:fillRef idx="1">
-            <a:schemeClr val="lt1"/>
-          </a:fillRef>
-          <a:effectRef idx="0">
-            <a:schemeClr val="accent1"/>
-          </a:effectRef>
-          <a:fontRef idx="minor">
-            <a:schemeClr val="dk1"/>
-          </a:fontRef>
-        </p:style>
-        <p:txBody>
-          <a:bodyPr rtlCol="0" anchor="ctr"/>
-          <a:lstStyle/>
-          <a:p>
-            <a:pPr algn="ctr"/>
-            <a:r>
-              <a:rPr lang="it-IT" dirty="0" smtClean="0"/>
-              <a:t>Rischi</a:t>
-            </a:r>
-            <a:endParaRPr lang="it-IT" dirty="0"/>
-          </a:p>
-        </p:txBody>
-      </p:sp>
-      <p:sp>
-        <p:nvSpPr>
-          <p:cNvPr id="34" name="Rettangolo 33"/>
-          <p:cNvSpPr/>
-          <p:nvPr/>
-        </p:nvSpPr>
-        <p:spPr>
-          <a:xfrm>
-            <a:off x="800682" y="3338112"/>
-            <a:ext cx="1808438" cy="466985"/>
-          </a:xfrm>
-          <a:prstGeom prst="rect">
-            <a:avLst/>
-          </a:prstGeom>
-        </p:spPr>
-        <p:style>
-          <a:lnRef idx="2">
-            <a:schemeClr val="accent1"/>
-          </a:lnRef>
-          <a:fillRef idx="1">
-            <a:schemeClr val="lt1"/>
-          </a:fillRef>
-          <a:effectRef idx="0">
-            <a:schemeClr val="accent1"/>
-          </a:effectRef>
-          <a:fontRef idx="minor">
-            <a:schemeClr val="dk1"/>
-          </a:fontRef>
-        </p:style>
-        <p:txBody>
-          <a:bodyPr rtlCol="0" anchor="ctr"/>
-          <a:lstStyle/>
-          <a:p>
-            <a:pPr algn="ctr"/>
-            <a:r>
-              <a:rPr lang="it-IT" dirty="0" smtClean="0"/>
-              <a:t>Segnalazioni</a:t>
-            </a:r>
-            <a:endParaRPr lang="it-IT" dirty="0"/>
-          </a:p>
-        </p:txBody>
-      </p:sp>
-      <p:sp>
-        <p:nvSpPr>
-          <p:cNvPr id="35" name="Rettangolo 34"/>
-          <p:cNvSpPr/>
-          <p:nvPr/>
-        </p:nvSpPr>
-        <p:spPr>
-          <a:xfrm>
-            <a:off x="3235684" y="4668985"/>
-            <a:ext cx="1808438" cy="466985"/>
-          </a:xfrm>
-          <a:prstGeom prst="rect">
-            <a:avLst/>
-          </a:prstGeom>
-        </p:spPr>
-        <p:style>
-          <a:lnRef idx="2">
-            <a:schemeClr val="accent1"/>
-          </a:lnRef>
-          <a:fillRef idx="1">
-            <a:schemeClr val="lt1"/>
-          </a:fillRef>
-          <a:effectRef idx="0">
-            <a:schemeClr val="accent1"/>
-          </a:effectRef>
-          <a:fontRef idx="minor">
-            <a:schemeClr val="dk1"/>
-          </a:fontRef>
-        </p:style>
-        <p:txBody>
-          <a:bodyPr rtlCol="0" anchor="ctr"/>
-          <a:lstStyle/>
-          <a:p>
-            <a:pPr algn="ctr"/>
-            <a:r>
-              <a:rPr lang="it-IT" dirty="0" smtClean="0"/>
-              <a:t>Questionari</a:t>
-            </a:r>
-            <a:endParaRPr lang="it-IT" dirty="0"/>
-          </a:p>
-        </p:txBody>
-      </p:sp>
-      <p:sp>
-        <p:nvSpPr>
-          <p:cNvPr id="36" name="Rettangolo 35"/>
-          <p:cNvSpPr/>
-          <p:nvPr/>
-        </p:nvSpPr>
-        <p:spPr>
-          <a:xfrm>
-            <a:off x="3241568" y="5135970"/>
-            <a:ext cx="1808438" cy="466985"/>
-          </a:xfrm>
-          <a:prstGeom prst="rect">
-            <a:avLst/>
-          </a:prstGeom>
-        </p:spPr>
-        <p:style>
-          <a:lnRef idx="2">
-            <a:schemeClr val="accent1"/>
-          </a:lnRef>
-          <a:fillRef idx="1">
-            <a:schemeClr val="lt1"/>
-          </a:fillRef>
-          <a:effectRef idx="0">
-            <a:schemeClr val="accent1"/>
-          </a:effectRef>
-          <a:fontRef idx="minor">
-            <a:schemeClr val="dk1"/>
-          </a:fontRef>
-        </p:style>
-        <p:txBody>
-          <a:bodyPr rtlCol="0" anchor="ctr"/>
-          <a:lstStyle/>
-          <a:p>
-            <a:pPr algn="ctr"/>
-            <a:r>
-              <a:rPr lang="it-IT" dirty="0" err="1" smtClean="0"/>
-              <a:t>Checklist</a:t>
-            </a:r>
-            <a:endParaRPr lang="it-IT" dirty="0"/>
-          </a:p>
-        </p:txBody>
-      </p:sp>
-      <p:sp>
-        <p:nvSpPr>
-          <p:cNvPr id="37" name="Rettangolo 36"/>
-          <p:cNvSpPr/>
-          <p:nvPr/>
-        </p:nvSpPr>
-        <p:spPr>
-          <a:xfrm>
-            <a:off x="3235684" y="5602955"/>
-            <a:ext cx="1808438" cy="466985"/>
-          </a:xfrm>
-          <a:prstGeom prst="rect">
-            <a:avLst/>
-          </a:prstGeom>
-        </p:spPr>
-        <p:style>
-          <a:lnRef idx="2">
-            <a:schemeClr val="accent1"/>
-          </a:lnRef>
-          <a:fillRef idx="1">
-            <a:schemeClr val="lt1"/>
-          </a:fillRef>
-          <a:effectRef idx="0">
-            <a:schemeClr val="accent1"/>
-          </a:effectRef>
-          <a:fontRef idx="minor">
-            <a:schemeClr val="dk1"/>
-          </a:fontRef>
-        </p:style>
-        <p:txBody>
-          <a:bodyPr rtlCol="0" anchor="ctr"/>
-          <a:lstStyle/>
-          <a:p>
-            <a:pPr algn="ctr"/>
-            <a:r>
-              <a:rPr lang="it-IT" dirty="0" smtClean="0"/>
-              <a:t>Modulistica</a:t>
-            </a:r>
-            <a:endParaRPr lang="it-IT" dirty="0"/>
-          </a:p>
-        </p:txBody>
-      </p:sp>
-      <p:sp>
-        <p:nvSpPr>
-          <p:cNvPr id="38" name="Rettangolo 37"/>
-          <p:cNvSpPr/>
-          <p:nvPr/>
-        </p:nvSpPr>
-        <p:spPr>
-          <a:xfrm>
-            <a:off x="794798" y="3805633"/>
-            <a:ext cx="1808438" cy="466985"/>
-          </a:xfrm>
-          <a:prstGeom prst="rect">
-            <a:avLst/>
-          </a:prstGeom>
-        </p:spPr>
-        <p:style>
-          <a:lnRef idx="2">
-            <a:schemeClr val="accent1"/>
-          </a:lnRef>
-          <a:fillRef idx="1">
-            <a:schemeClr val="lt1"/>
-          </a:fillRef>
-          <a:effectRef idx="0">
-            <a:schemeClr val="accent1"/>
-          </a:effectRef>
-          <a:fontRef idx="minor">
-            <a:schemeClr val="dk1"/>
-          </a:fontRef>
-        </p:style>
-        <p:txBody>
-          <a:bodyPr rtlCol="0" anchor="ctr"/>
-          <a:lstStyle/>
-          <a:p>
-            <a:pPr algn="ctr"/>
-            <a:r>
-              <a:rPr lang="it-IT" dirty="0" smtClean="0"/>
-              <a:t>Modelli di </a:t>
-            </a:r>
-            <a:r>
-              <a:rPr lang="it-IT" dirty="0" smtClean="0"/>
-              <a:t>test &gt;</a:t>
-            </a:r>
-            <a:endParaRPr lang="it-IT" dirty="0"/>
-          </a:p>
-        </p:txBody>
-      </p:sp>
-      <p:sp>
-        <p:nvSpPr>
-          <p:cNvPr id="39" name="Rettangolo 38"/>
-          <p:cNvSpPr/>
-          <p:nvPr/>
-        </p:nvSpPr>
-        <p:spPr>
-          <a:xfrm>
-            <a:off x="794798" y="4235567"/>
-            <a:ext cx="1808438" cy="466985"/>
-          </a:xfrm>
-          <a:prstGeom prst="rect">
-            <a:avLst/>
-          </a:prstGeom>
-        </p:spPr>
-        <p:style>
-          <a:lnRef idx="2">
-            <a:schemeClr val="accent1"/>
-          </a:lnRef>
-          <a:fillRef idx="1">
-            <a:schemeClr val="lt1"/>
-          </a:fillRef>
-          <a:effectRef idx="0">
-            <a:schemeClr val="accent1"/>
-          </a:effectRef>
-          <a:fontRef idx="minor">
-            <a:schemeClr val="dk1"/>
-          </a:fontRef>
-        </p:style>
-        <p:txBody>
-          <a:bodyPr rtlCol="0" anchor="ctr"/>
-          <a:lstStyle/>
-          <a:p>
-            <a:pPr algn="ctr"/>
-            <a:r>
-              <a:rPr lang="it-IT" dirty="0" smtClean="0"/>
-              <a:t>Sondaggi &gt;</a:t>
-            </a:r>
-            <a:endParaRPr lang="it-IT" dirty="0"/>
-          </a:p>
-        </p:txBody>
-      </p:sp>
-      <p:sp>
-        <p:nvSpPr>
-          <p:cNvPr id="40" name="Rettangolo 39"/>
-          <p:cNvSpPr/>
-          <p:nvPr/>
-        </p:nvSpPr>
-        <p:spPr>
-          <a:xfrm>
-            <a:off x="794798" y="4702552"/>
-            <a:ext cx="1808438" cy="516668"/>
-          </a:xfrm>
-          <a:prstGeom prst="rect">
-            <a:avLst/>
-          </a:prstGeom>
-        </p:spPr>
-        <p:style>
-          <a:lnRef idx="2">
-            <a:schemeClr val="accent1"/>
-          </a:lnRef>
-          <a:fillRef idx="1">
-            <a:schemeClr val="lt1"/>
-          </a:fillRef>
-          <a:effectRef idx="0">
-            <a:schemeClr val="accent1"/>
-          </a:effectRef>
-          <a:fontRef idx="minor">
-            <a:schemeClr val="dk1"/>
-          </a:fontRef>
-        </p:style>
-        <p:txBody>
-          <a:bodyPr rtlCol="0" anchor="ctr"/>
-          <a:lstStyle/>
-          <a:p>
-            <a:pPr algn="ctr"/>
-            <a:r>
-              <a:rPr lang="it-IT" dirty="0" smtClean="0"/>
-              <a:t>Configurazioni &gt;</a:t>
-            </a:r>
-            <a:endParaRPr lang="it-IT" dirty="0"/>
-          </a:p>
-        </p:txBody>
-      </p:sp>
-      <p:pic>
-        <p:nvPicPr>
-          <p:cNvPr id="41" name="Immagine 40"/>
-          <p:cNvPicPr>
-            <a:picLocks noChangeAspect="1"/>
-          </p:cNvPicPr>
-          <p:nvPr/>
-        </p:nvPicPr>
-        <p:blipFill>
-          <a:blip r:embed="rId8"/>
-          <a:stretch>
-            <a:fillRect/>
-          </a:stretch>
-        </p:blipFill>
-        <p:spPr>
-          <a:xfrm>
-            <a:off x="6623213" y="1028739"/>
-            <a:ext cx="486294" cy="280933"/>
-          </a:xfrm>
-          <a:prstGeom prst="rect">
-            <a:avLst/>
-          </a:prstGeom>
-        </p:spPr>
-      </p:pic>
-      <p:sp>
-        <p:nvSpPr>
-          <p:cNvPr id="42" name="Rettangolo 41"/>
-          <p:cNvSpPr/>
-          <p:nvPr/>
-        </p:nvSpPr>
-        <p:spPr>
-          <a:xfrm>
-            <a:off x="3037070" y="1028739"/>
-            <a:ext cx="1996365" cy="280933"/>
-          </a:xfrm>
-          <a:prstGeom prst="rect">
-            <a:avLst/>
-          </a:prstGeom>
-        </p:spPr>
-        <p:style>
-          <a:lnRef idx="1">
-            <a:schemeClr val="accent1"/>
-          </a:lnRef>
-          <a:fillRef idx="3">
-            <a:schemeClr val="accent1"/>
-          </a:fillRef>
-          <a:effectRef idx="2">
-            <a:schemeClr val="accent1"/>
-          </a:effectRef>
-          <a:fontRef idx="minor">
-            <a:schemeClr val="lt1"/>
-          </a:fontRef>
-        </p:style>
-        <p:txBody>
-          <a:bodyPr rtlCol="0" anchor="ctr"/>
-          <a:lstStyle/>
-          <a:p>
-            <a:r>
-              <a:rPr lang="it-IT" dirty="0" smtClean="0"/>
-              <a:t>    </a:t>
-            </a:r>
-            <a:r>
-              <a:rPr lang="it-IT" dirty="0" err="1" smtClean="0"/>
-              <a:t>Alacritas</a:t>
-            </a:r>
-            <a:r>
-              <a:rPr lang="it-IT" dirty="0" smtClean="0"/>
-              <a:t>   </a:t>
-            </a:r>
-            <a:endParaRPr lang="it-IT" dirty="0"/>
-          </a:p>
-        </p:txBody>
-      </p:sp>
-      <p:pic>
-        <p:nvPicPr>
-          <p:cNvPr id="43" name="Immagine 42"/>
-          <p:cNvPicPr>
-            <a:picLocks noChangeAspect="1"/>
-          </p:cNvPicPr>
-          <p:nvPr/>
-        </p:nvPicPr>
-        <p:blipFill>
-          <a:blip r:embed="rId8"/>
-          <a:stretch>
-            <a:fillRect/>
-          </a:stretch>
-        </p:blipFill>
-        <p:spPr>
-          <a:xfrm>
-            <a:off x="4547142" y="1040672"/>
-            <a:ext cx="486294" cy="280933"/>
-          </a:xfrm>
-          <a:prstGeom prst="rect">
-            <a:avLst/>
-          </a:prstGeom>
-        </p:spPr>
-      </p:pic>
-      <p:pic>
-        <p:nvPicPr>
-          <p:cNvPr id="18" name="Immagine 17" descr="dashboard-icon.png"/>
-          <p:cNvPicPr>
-            <a:picLocks noChangeAspect="1"/>
-          </p:cNvPicPr>
-          <p:nvPr/>
-        </p:nvPicPr>
-        <p:blipFill>
-          <a:blip r:embed="rId9">
-            <a:extLst>
-              <a:ext uri="{28A0092B-C50C-407E-A947-70E740481C1C}">
-                <a14:useLocalDpi xmlns:a14="http://schemas.microsoft.com/office/drawing/2010/main" val="0"/>
-              </a:ext>
-            </a:extLst>
-          </a:blip>
-          <a:stretch>
-            <a:fillRect/>
-          </a:stretch>
-        </p:blipFill>
-        <p:spPr>
-          <a:xfrm>
-            <a:off x="4567028" y="1417638"/>
-            <a:ext cx="495703" cy="495703"/>
-          </a:xfrm>
-          <a:prstGeom prst="rect">
-            <a:avLst/>
-          </a:prstGeom>
-        </p:spPr>
-      </p:pic>
-      <p:cxnSp>
-        <p:nvCxnSpPr>
-          <p:cNvPr id="10" name="Connettore 2 9"/>
-          <p:cNvCxnSpPr>
-            <a:stCxn id="38" idx="3"/>
-            <a:endCxn id="44" idx="1"/>
-          </p:cNvCxnSpPr>
-          <p:nvPr/>
-        </p:nvCxnSpPr>
-        <p:spPr>
-          <a:xfrm>
-            <a:off x="2603236" y="4039126"/>
-            <a:ext cx="621761" cy="419311"/>
-          </a:xfrm>
-          <a:prstGeom prst="straightConnector1">
-            <a:avLst/>
-          </a:prstGeom>
-          <a:ln>
-            <a:tailEnd type="arrow"/>
-          </a:ln>
-        </p:spPr>
-        <p:style>
-          <a:lnRef idx="2">
-            <a:schemeClr val="accent1"/>
-          </a:lnRef>
-          <a:fillRef idx="0">
-            <a:schemeClr val="accent1"/>
-          </a:fillRef>
-          <a:effectRef idx="1">
-            <a:schemeClr val="accent1"/>
-          </a:effectRef>
-          <a:fontRef idx="minor">
-            <a:schemeClr val="tx1"/>
-          </a:fontRef>
-        </p:style>
-      </p:cxnSp>
-      <p:cxnSp>
-        <p:nvCxnSpPr>
-          <p:cNvPr id="14" name="Connettore 2 13"/>
-          <p:cNvCxnSpPr>
-            <a:stCxn id="39" idx="3"/>
-            <a:endCxn id="44" idx="1"/>
-          </p:cNvCxnSpPr>
-          <p:nvPr/>
-        </p:nvCxnSpPr>
-        <p:spPr>
-          <a:xfrm flipV="1">
-            <a:off x="2603236" y="4458437"/>
-            <a:ext cx="621761" cy="10623"/>
-          </a:xfrm>
-          <a:prstGeom prst="straightConnector1">
-            <a:avLst/>
-          </a:prstGeom>
-          <a:ln>
-            <a:tailEnd type="arrow"/>
-          </a:ln>
-        </p:spPr>
-        <p:style>
-          <a:lnRef idx="2">
-            <a:schemeClr val="accent1"/>
-          </a:lnRef>
-          <a:fillRef idx="0">
-            <a:schemeClr val="accent1"/>
-          </a:fillRef>
-          <a:effectRef idx="1">
-            <a:schemeClr val="accent1"/>
-          </a:effectRef>
-          <a:fontRef idx="minor">
-            <a:schemeClr val="tx1"/>
-          </a:fontRef>
-        </p:style>
-      </p:cxnSp>
-      <p:sp>
-        <p:nvSpPr>
-          <p:cNvPr id="44" name="Rettangolo 43"/>
-          <p:cNvSpPr/>
-          <p:nvPr/>
-        </p:nvSpPr>
-        <p:spPr>
-          <a:xfrm>
-            <a:off x="3224997" y="4224944"/>
-            <a:ext cx="1808438" cy="466985"/>
-          </a:xfrm>
-          <a:prstGeom prst="rect">
-            <a:avLst/>
-          </a:prstGeom>
-        </p:spPr>
-        <p:style>
-          <a:lnRef idx="2">
-            <a:schemeClr val="accent1"/>
-          </a:lnRef>
-          <a:fillRef idx="1">
-            <a:schemeClr val="lt1"/>
-          </a:fillRef>
-          <a:effectRef idx="0">
-            <a:schemeClr val="accent1"/>
-          </a:effectRef>
-          <a:fontRef idx="minor">
-            <a:schemeClr val="dk1"/>
-          </a:fontRef>
-        </p:style>
-        <p:txBody>
-          <a:bodyPr rtlCol="0" anchor="ctr"/>
-          <a:lstStyle/>
-          <a:p>
-            <a:pPr algn="ctr"/>
-            <a:r>
-              <a:rPr lang="it-IT" dirty="0" smtClean="0"/>
-              <a:t>Generico</a:t>
-            </a:r>
-            <a:endParaRPr lang="it-IT" dirty="0"/>
-          </a:p>
-        </p:txBody>
-      </p:sp>
-    </p:spTree>
-    <p:extLst>
-      <p:ext uri="{BB962C8B-B14F-4D97-AF65-F5344CB8AC3E}">
-        <p14:creationId xmlns:p14="http://schemas.microsoft.com/office/powerpoint/2010/main" val="3479467549"/>
-      </p:ext>
-    </p:extLst>
-  </p:cSld>
-  <p:clrMapOvr>
-    <a:masterClrMapping/>
-  </p:clrMapOvr>
-</p:sld>
-</file>
-
-<file path=ppt/slides/slide4.xml><?xml version="1.0" encoding="utf-8"?>
-<p:sld xmlns:a="http://schemas.openxmlformats.org/drawingml/2006/main" xmlns:r="http://schemas.openxmlformats.org/officeDocument/2006/relationships" xmlns:p="http://schemas.openxmlformats.org/presentationml/2006/main">
-  <p:cSld>
-    <p:spTree>
-      <p:nvGrpSpPr>
-        <p:cNvPr id="1" name=""/>
-        <p:cNvGrpSpPr/>
-        <p:nvPr/>
-      </p:nvGrpSpPr>
-      <p:grpSpPr>
-        <a:xfrm>
-          <a:off x="0" y="0"/>
-          <a:ext cx="0" cy="0"/>
-          <a:chOff x="0" y="0"/>
-          <a:chExt cx="0" cy="0"/>
-        </a:xfrm>
-      </p:grpSpPr>
-      <p:sp>
-        <p:nvSpPr>
-          <p:cNvPr id="2" name="Titolo 1"/>
-          <p:cNvSpPr>
-            <a:spLocks noGrp="1"/>
-          </p:cNvSpPr>
-          <p:nvPr>
-            <p:ph type="title"/>
-          </p:nvPr>
-        </p:nvSpPr>
-        <p:spPr>
           <a:ln>
             <a:noFill/>
           </a:ln>
@@ -6145,7 +6438,7 @@
           <a:lstStyle/>
           <a:p>
             <a:r>
-              <a:rPr lang="it-IT" dirty="0" err="1" smtClean="0"/>
+              <a:rPr lang="it-IT" dirty="0" err="1"/>
               <a:t>Table</a:t>
             </a:r>
             <a:endParaRPr lang="it-IT" dirty="0"/>
@@ -6178,12 +6471,48 @@
                 <a:tableStyleId>{5C22544A-7EE6-4342-B048-85BDC9FD1C3A}</a:tableStyleId>
               </a:tblPr>
               <a:tblGrid>
-                <a:gridCol w="1175657"/>
-                <a:gridCol w="1175657"/>
-                <a:gridCol w="1175657"/>
-                <a:gridCol w="1175657"/>
-                <a:gridCol w="1175657"/>
-                <a:gridCol w="1175657"/>
+                <a:gridCol w="1175657">
+                  <a:extLst>
+                    <a:ext uri="{9D8B030D-6E8A-4147-A177-3AD203B41FA5}">
+                      <a16:colId xmlns:a16="http://schemas.microsoft.com/office/drawing/2014/main" val="20000"/>
+                    </a:ext>
+                  </a:extLst>
+                </a:gridCol>
+                <a:gridCol w="1175657">
+                  <a:extLst>
+                    <a:ext uri="{9D8B030D-6E8A-4147-A177-3AD203B41FA5}">
+                      <a16:colId xmlns:a16="http://schemas.microsoft.com/office/drawing/2014/main" val="20001"/>
+                    </a:ext>
+                  </a:extLst>
+                </a:gridCol>
+                <a:gridCol w="1175657">
+                  <a:extLst>
+                    <a:ext uri="{9D8B030D-6E8A-4147-A177-3AD203B41FA5}">
+                      <a16:colId xmlns:a16="http://schemas.microsoft.com/office/drawing/2014/main" val="20002"/>
+                    </a:ext>
+                  </a:extLst>
+                </a:gridCol>
+                <a:gridCol w="1175657">
+                  <a:extLst>
+                    <a:ext uri="{9D8B030D-6E8A-4147-A177-3AD203B41FA5}">
+                      <a16:colId xmlns:a16="http://schemas.microsoft.com/office/drawing/2014/main" val="20003"/>
+                    </a:ext>
+                  </a:extLst>
+                </a:gridCol>
+                <a:gridCol w="1175657">
+                  <a:extLst>
+                    <a:ext uri="{9D8B030D-6E8A-4147-A177-3AD203B41FA5}">
+                      <a16:colId xmlns:a16="http://schemas.microsoft.com/office/drawing/2014/main" val="20004"/>
+                    </a:ext>
+                  </a:extLst>
+                </a:gridCol>
+                <a:gridCol w="1175657">
+                  <a:extLst>
+                    <a:ext uri="{9D8B030D-6E8A-4147-A177-3AD203B41FA5}">
+                      <a16:colId xmlns:a16="http://schemas.microsoft.com/office/drawing/2014/main" val="20005"/>
+                    </a:ext>
+                  </a:extLst>
+                </a:gridCol>
               </a:tblGrid>
               <a:tr h="370840">
                 <a:tc>
@@ -6193,14 +6522,13 @@
                     <a:p>
                       <a:pPr algn="ctr"/>
                       <a:r>
-                        <a:rPr lang="it-IT" dirty="0" err="1" smtClean="0"/>
+                        <a:rPr lang="it-IT" dirty="0" err="1"/>
                         <a:t>Column</a:t>
                       </a:r>
                       <a:r>
-                        <a:rPr lang="it-IT" dirty="0" smtClean="0"/>
+                        <a:rPr lang="it-IT" dirty="0"/>
                         <a:t> 1</a:t>
                       </a:r>
-                      <a:endParaRPr lang="it-IT" dirty="0"/>
                     </a:p>
                   </a:txBody>
                   <a:tcPr/>
@@ -6228,11 +6556,11 @@
                         <a:defRPr/>
                       </a:pPr>
                       <a:r>
-                        <a:rPr lang="it-IT" dirty="0" err="1" smtClean="0"/>
+                        <a:rPr lang="it-IT" dirty="0" err="1"/>
                         <a:t>Column</a:t>
                       </a:r>
                       <a:r>
-                        <a:rPr lang="it-IT" dirty="0" smtClean="0"/>
+                        <a:rPr lang="it-IT" dirty="0"/>
                         <a:t> 2</a:t>
                       </a:r>
                     </a:p>
@@ -6246,7 +6574,7 @@
                     <a:p>
                       <a:pPr algn="ctr"/>
                       <a:r>
-                        <a:rPr lang="mr-IN" dirty="0" smtClean="0"/>
+                        <a:rPr lang="mr-IN" dirty="0"/>
                         <a:t>…</a:t>
                       </a:r>
                       <a:endParaRPr lang="it-IT" dirty="0"/>
@@ -6287,6 +6615,11 @@
                   </a:txBody>
                   <a:tcPr/>
                 </a:tc>
+                <a:extLst>
+                  <a:ext uri="{0D108BD9-81ED-4DB2-BD59-A6C34878D82A}">
+                    <a16:rowId xmlns:a16="http://schemas.microsoft.com/office/drawing/2014/main" val="10000"/>
+                  </a:ext>
+                </a:extLst>
               </a:tr>
               <a:tr h="370840">
                 <a:tc>
@@ -6349,6 +6682,11 @@
                   </a:txBody>
                   <a:tcPr/>
                 </a:tc>
+                <a:extLst>
+                  <a:ext uri="{0D108BD9-81ED-4DB2-BD59-A6C34878D82A}">
+                    <a16:rowId xmlns:a16="http://schemas.microsoft.com/office/drawing/2014/main" val="10001"/>
+                  </a:ext>
+                </a:extLst>
               </a:tr>
               <a:tr h="370840">
                 <a:tc>
@@ -6411,6 +6749,11 @@
                   </a:txBody>
                   <a:tcPr/>
                 </a:tc>
+                <a:extLst>
+                  <a:ext uri="{0D108BD9-81ED-4DB2-BD59-A6C34878D82A}">
+                    <a16:rowId xmlns:a16="http://schemas.microsoft.com/office/drawing/2014/main" val="10002"/>
+                  </a:ext>
+                </a:extLst>
               </a:tr>
               <a:tr h="370840">
                 <a:tc>
@@ -6473,6 +6816,11 @@
                   </a:txBody>
                   <a:tcPr/>
                 </a:tc>
+                <a:extLst>
+                  <a:ext uri="{0D108BD9-81ED-4DB2-BD59-A6C34878D82A}">
+                    <a16:rowId xmlns:a16="http://schemas.microsoft.com/office/drawing/2014/main" val="10003"/>
+                  </a:ext>
+                </a:extLst>
               </a:tr>
               <a:tr h="370840">
                 <a:tc>
@@ -6535,6 +6883,11 @@
                   </a:txBody>
                   <a:tcPr/>
                 </a:tc>
+                <a:extLst>
+                  <a:ext uri="{0D108BD9-81ED-4DB2-BD59-A6C34878D82A}">
+                    <a16:rowId xmlns:a16="http://schemas.microsoft.com/office/drawing/2014/main" val="10004"/>
+                  </a:ext>
+                </a:extLst>
               </a:tr>
               <a:tr h="370840">
                 <a:tc>
@@ -6597,6 +6950,11 @@
                   </a:txBody>
                   <a:tcPr/>
                 </a:tc>
+                <a:extLst>
+                  <a:ext uri="{0D108BD9-81ED-4DB2-BD59-A6C34878D82A}">
+                    <a16:rowId xmlns:a16="http://schemas.microsoft.com/office/drawing/2014/main" val="10005"/>
+                  </a:ext>
+                </a:extLst>
               </a:tr>
               <a:tr h="370840">
                 <a:tc>
@@ -6659,6 +7017,11 @@
                   </a:txBody>
                   <a:tcPr/>
                 </a:tc>
+                <a:extLst>
+                  <a:ext uri="{0D108BD9-81ED-4DB2-BD59-A6C34878D82A}">
+                    <a16:rowId xmlns:a16="http://schemas.microsoft.com/office/drawing/2014/main" val="10006"/>
+                  </a:ext>
+                </a:extLst>
               </a:tr>
               <a:tr h="370840">
                 <a:tc>
@@ -6721,6 +7084,11 @@
                   </a:txBody>
                   <a:tcPr/>
                 </a:tc>
+                <a:extLst>
+                  <a:ext uri="{0D108BD9-81ED-4DB2-BD59-A6C34878D82A}">
+                    <a16:rowId xmlns:a16="http://schemas.microsoft.com/office/drawing/2014/main" val="10007"/>
+                  </a:ext>
+                </a:extLst>
               </a:tr>
             </a:tbl>
           </a:graphicData>
@@ -6820,10 +7188,9 @@
           <a:lstStyle/>
           <a:p>
             <a:r>
-              <a:rPr lang="it-IT" dirty="0" smtClean="0"/>
+              <a:rPr lang="it-IT" dirty="0"/>
               <a:t>Select</a:t>
             </a:r>
-            <a:endParaRPr lang="it-IT" dirty="0"/>
           </a:p>
         </p:txBody>
       </p:sp>
@@ -6837,17 +7204,10 @@
   <p:clrMapOvr>
     <a:masterClrMapping/>
   </p:clrMapOvr>
-  <p:timing>
-    <p:tnLst>
-      <p:par>
-        <p:cTn xmlns:p14="http://schemas.microsoft.com/office/powerpoint/2010/main" id="1" dur="indefinite" restart="never" nodeType="tmRoot"/>
-      </p:par>
-    </p:tnLst>
-  </p:timing>
 </p:sld>
 </file>
 
-<file path=ppt/slides/slide5.xml><?xml version="1.0" encoding="utf-8"?>
+<file path=ppt/slides/slide4.xml><?xml version="1.0" encoding="utf-8"?>
 <p:sld xmlns:a="http://schemas.openxmlformats.org/drawingml/2006/main" xmlns:r="http://schemas.openxmlformats.org/officeDocument/2006/relationships" xmlns:p="http://schemas.openxmlformats.org/presentationml/2006/main">
   <p:cSld>
     <p:spTree>
@@ -6887,14 +7247,21 @@
           <a:lstStyle/>
           <a:p>
             <a:r>
-              <a:rPr lang="it-IT" dirty="0" err="1" smtClean="0"/>
+              <a:rPr lang="it-IT" dirty="0" err="1"/>
               <a:t>Generic</a:t>
             </a:r>
             <a:r>
-              <a:rPr lang="it-IT" dirty="0" smtClean="0"/>
-              <a:t> record</a:t>
-            </a:r>
-            <a:endParaRPr lang="it-IT" dirty="0"/>
+              <a:rPr lang="it-IT" dirty="0"/>
+              <a:t> record (record </a:t>
+            </a:r>
+            <a:r>
+              <a:rPr lang="it-IT" dirty="0" err="1"/>
+              <a:t>detail</a:t>
+            </a:r>
+            <a:r>
+              <a:rPr lang="it-IT" dirty="0"/>
+              <a:t>)</a:t>
+            </a:r>
           </a:p>
         </p:txBody>
       </p:sp>
@@ -6932,15 +7299,15 @@
           <a:lstStyle/>
           <a:p>
             <a:pPr algn="ctr"/>
-            <a:endParaRPr lang="it-IT" dirty="0" smtClean="0"/>
-          </a:p>
-          <a:p>
-            <a:pPr algn="ctr"/>
             <a:endParaRPr lang="it-IT" dirty="0"/>
           </a:p>
           <a:p>
             <a:pPr algn="ctr"/>
-            <a:endParaRPr lang="it-IT" dirty="0" smtClean="0"/>
+            <a:endParaRPr lang="it-IT" dirty="0"/>
+          </a:p>
+          <a:p>
+            <a:pPr algn="ctr"/>
+            <a:endParaRPr lang="it-IT" dirty="0"/>
           </a:p>
           <a:p>
             <a:pPr algn="ctr"/>
@@ -6986,14 +7353,13 @@
           <a:lstStyle/>
           <a:p>
             <a:r>
-              <a:rPr lang="it-IT" dirty="0" err="1" smtClean="0"/>
+              <a:rPr lang="it-IT" dirty="0" err="1"/>
               <a:t>Gorico</a:t>
             </a:r>
             <a:r>
-              <a:rPr lang="it-IT" dirty="0" smtClean="0"/>
+              <a:rPr lang="it-IT" dirty="0"/>
               <a:t>		Azienda 					        Amedeo Poli</a:t>
             </a:r>
-            <a:endParaRPr lang="it-IT" dirty="0"/>
           </a:p>
         </p:txBody>
       </p:sp>
@@ -7129,63 +7495,63 @@
           <a:lstStyle/>
           <a:p>
             <a:pPr algn="ctr"/>
-            <a:endParaRPr lang="it-IT" dirty="0" smtClean="0"/>
-          </a:p>
-          <a:p>
-            <a:pPr algn="ctr"/>
             <a:endParaRPr lang="it-IT" dirty="0"/>
           </a:p>
           <a:p>
             <a:pPr algn="ctr"/>
-            <a:endParaRPr lang="it-IT" dirty="0" smtClean="0"/>
-          </a:p>
-          <a:p>
-            <a:pPr algn="ctr"/>
             <a:endParaRPr lang="it-IT" dirty="0"/>
           </a:p>
           <a:p>
             <a:pPr algn="ctr"/>
-            <a:endParaRPr lang="it-IT" dirty="0" smtClean="0"/>
-          </a:p>
-          <a:p>
-            <a:pPr algn="ctr"/>
             <a:endParaRPr lang="it-IT" dirty="0"/>
           </a:p>
           <a:p>
             <a:pPr algn="ctr"/>
-            <a:endParaRPr lang="it-IT" dirty="0" smtClean="0"/>
-          </a:p>
-          <a:p>
-            <a:pPr algn="ctr"/>
             <a:endParaRPr lang="it-IT" dirty="0"/>
           </a:p>
           <a:p>
             <a:pPr algn="ctr"/>
-            <a:endParaRPr lang="it-IT" dirty="0" smtClean="0"/>
-          </a:p>
-          <a:p>
-            <a:pPr algn="ctr"/>
             <a:endParaRPr lang="it-IT" dirty="0"/>
           </a:p>
           <a:p>
             <a:pPr algn="ctr"/>
-            <a:endParaRPr lang="it-IT" dirty="0" smtClean="0"/>
-          </a:p>
-          <a:p>
-            <a:pPr algn="ctr"/>
             <a:endParaRPr lang="it-IT" dirty="0"/>
           </a:p>
           <a:p>
             <a:pPr algn="ctr"/>
-            <a:endParaRPr lang="it-IT" dirty="0" smtClean="0"/>
-          </a:p>
-          <a:p>
-            <a:pPr algn="ctr"/>
             <a:endParaRPr lang="it-IT" dirty="0"/>
           </a:p>
           <a:p>
             <a:pPr algn="ctr"/>
-            <a:endParaRPr lang="it-IT" dirty="0" smtClean="0"/>
+            <a:endParaRPr lang="it-IT" dirty="0"/>
+          </a:p>
+          <a:p>
+            <a:pPr algn="ctr"/>
+            <a:endParaRPr lang="it-IT" dirty="0"/>
+          </a:p>
+          <a:p>
+            <a:pPr algn="ctr"/>
+            <a:endParaRPr lang="it-IT" dirty="0"/>
+          </a:p>
+          <a:p>
+            <a:pPr algn="ctr"/>
+            <a:endParaRPr lang="it-IT" dirty="0"/>
+          </a:p>
+          <a:p>
+            <a:pPr algn="ctr"/>
+            <a:endParaRPr lang="it-IT" dirty="0"/>
+          </a:p>
+          <a:p>
+            <a:pPr algn="ctr"/>
+            <a:endParaRPr lang="it-IT" dirty="0"/>
+          </a:p>
+          <a:p>
+            <a:pPr algn="ctr"/>
+            <a:endParaRPr lang="it-IT" dirty="0"/>
+          </a:p>
+          <a:p>
+            <a:pPr algn="ctr"/>
+            <a:endParaRPr lang="it-IT" dirty="0"/>
           </a:p>
           <a:p>
             <a:pPr algn="ctr"/>
@@ -7354,10 +7720,9 @@
           <a:p>
             <a:pPr algn="ctr"/>
             <a:r>
-              <a:rPr lang="it-IT" dirty="0" smtClean="0"/>
+              <a:rPr lang="it-IT" dirty="0"/>
               <a:t>Processi</a:t>
             </a:r>
-            <a:endParaRPr lang="it-IT" dirty="0"/>
           </a:p>
         </p:txBody>
       </p:sp>
@@ -7396,7 +7761,7 @@
           <a:p>
             <a:pPr algn="ctr"/>
             <a:r>
-              <a:rPr lang="it-IT" dirty="0" err="1" smtClean="0"/>
+              <a:rPr lang="it-IT" dirty="0" err="1"/>
               <a:t>Workflow</a:t>
             </a:r>
             <a:endParaRPr lang="it-IT" dirty="0"/>
@@ -7438,10 +7803,9 @@
           <a:p>
             <a:pPr algn="ctr"/>
             <a:r>
-              <a:rPr lang="it-IT" dirty="0" smtClean="0"/>
+              <a:rPr lang="it-IT" dirty="0"/>
               <a:t>Presidi</a:t>
             </a:r>
-            <a:endParaRPr lang="it-IT" dirty="0"/>
           </a:p>
         </p:txBody>
       </p:sp>
@@ -7480,10 +7844,9 @@
           <a:p>
             <a:pPr algn="ctr"/>
             <a:r>
-              <a:rPr lang="it-IT" dirty="0" smtClean="0"/>
+              <a:rPr lang="it-IT" dirty="0"/>
               <a:t>Rischi</a:t>
             </a:r>
-            <a:endParaRPr lang="it-IT" dirty="0"/>
           </a:p>
         </p:txBody>
       </p:sp>
@@ -7522,10 +7885,9 @@
           <a:p>
             <a:pPr algn="ctr"/>
             <a:r>
-              <a:rPr lang="it-IT" dirty="0" smtClean="0"/>
+              <a:rPr lang="it-IT" dirty="0"/>
               <a:t>Segnalazioni</a:t>
             </a:r>
-            <a:endParaRPr lang="it-IT" dirty="0"/>
           </a:p>
         </p:txBody>
       </p:sp>
@@ -7564,14 +7926,9 @@
           <a:p>
             <a:pPr algn="ctr"/>
             <a:r>
-              <a:rPr lang="it-IT" dirty="0" smtClean="0"/>
-              <a:t>Modelli di </a:t>
-            </a:r>
-            <a:r>
-              <a:rPr lang="it-IT" dirty="0" smtClean="0"/>
-              <a:t>test &gt;</a:t>
-            </a:r>
-            <a:endParaRPr lang="it-IT" dirty="0"/>
+              <a:rPr lang="it-IT" dirty="0"/>
+              <a:t>Modelli di test &gt;</a:t>
+            </a:r>
           </a:p>
         </p:txBody>
       </p:sp>
@@ -7610,10 +7967,9 @@
           <a:p>
             <a:pPr algn="ctr"/>
             <a:r>
-              <a:rPr lang="it-IT" dirty="0" smtClean="0"/>
+              <a:rPr lang="it-IT" dirty="0"/>
               <a:t>Sondaggi &gt;</a:t>
             </a:r>
-            <a:endParaRPr lang="it-IT" dirty="0"/>
           </a:p>
         </p:txBody>
       </p:sp>
@@ -7652,10 +8008,9 @@
           <a:p>
             <a:pPr algn="ctr"/>
             <a:r>
-              <a:rPr lang="it-IT" dirty="0" smtClean="0"/>
+              <a:rPr lang="it-IT" dirty="0"/>
               <a:t>Configurazioni &gt;</a:t>
             </a:r>
-            <a:endParaRPr lang="it-IT" dirty="0"/>
           </a:p>
         </p:txBody>
       </p:sp>
@@ -7717,18 +8072,17 @@
           <a:lstStyle/>
           <a:p>
             <a:r>
-              <a:rPr lang="it-IT" dirty="0" smtClean="0"/>
+              <a:rPr lang="it-IT" dirty="0"/>
               <a:t>    </a:t>
             </a:r>
             <a:r>
-              <a:rPr lang="it-IT" dirty="0" err="1" smtClean="0"/>
+              <a:rPr lang="it-IT" dirty="0" err="1"/>
               <a:t>Alacritas</a:t>
             </a:r>
             <a:r>
-              <a:rPr lang="it-IT" dirty="0" smtClean="0"/>
+              <a:rPr lang="it-IT" dirty="0"/>
               <a:t>   </a:t>
             </a:r>
-            <a:endParaRPr lang="it-IT" dirty="0"/>
           </a:p>
         </p:txBody>
       </p:sp>
@@ -7821,10 +8175,9 @@
           <a:p>
             <a:pPr algn="ctr"/>
             <a:r>
-              <a:rPr lang="it-IT" dirty="0" smtClean="0"/>
+              <a:rPr lang="it-IT" dirty="0"/>
               <a:t>&lt; Indietro</a:t>
             </a:r>
-            <a:endParaRPr lang="it-IT" dirty="0"/>
           </a:p>
         </p:txBody>
       </p:sp>
@@ -7863,10 +8216,9 @@
           <a:p>
             <a:pPr algn="ctr"/>
             <a:r>
-              <a:rPr lang="it-IT" dirty="0" smtClean="0"/>
+              <a:rPr lang="it-IT" dirty="0"/>
               <a:t>|&lt;   &lt;   Record x di y   &gt;   &gt;|</a:t>
             </a:r>
-            <a:endParaRPr lang="it-IT" dirty="0"/>
           </a:p>
         </p:txBody>
       </p:sp>
@@ -8015,10 +8367,9 @@
           <a:p>
             <a:pPr algn="ctr"/>
             <a:r>
-              <a:rPr lang="it-IT" dirty="0" smtClean="0"/>
+              <a:rPr lang="it-IT" dirty="0"/>
               <a:t>Record Form</a:t>
             </a:r>
-            <a:endParaRPr lang="it-IT" dirty="0"/>
           </a:p>
         </p:txBody>
       </p:sp>
@@ -8048,7 +8399,7 @@
               <a:buAutoNum type="alphaLcPeriod"/>
             </a:pPr>
             <a:r>
-              <a:rPr lang="it-IT" dirty="0" smtClean="0"/>
+              <a:rPr lang="it-IT" dirty="0"/>
               <a:t>Links alle tabelle di record collegate</a:t>
             </a:r>
           </a:p>
@@ -8057,14 +8408,13 @@
               <a:buAutoNum type="alphaLcPeriod"/>
             </a:pPr>
             <a:r>
-              <a:rPr lang="it-IT" dirty="0" err="1" smtClean="0"/>
+              <a:rPr lang="it-IT" dirty="0" err="1"/>
               <a:t>Tab</a:t>
             </a:r>
             <a:r>
-              <a:rPr lang="it-IT" dirty="0" smtClean="0"/>
+              <a:rPr lang="it-IT" dirty="0"/>
               <a:t> con vista tabelle collegate</a:t>
             </a:r>
-            <a:endParaRPr lang="it-IT" dirty="0"/>
           </a:p>
         </p:txBody>
       </p:sp>
@@ -8072,6 +8422,575 @@
     <p:extLst>
       <p:ext uri="{BB962C8B-B14F-4D97-AF65-F5344CB8AC3E}">
         <p14:creationId xmlns:p14="http://schemas.microsoft.com/office/powerpoint/2010/main" val="1104059026"/>
+      </p:ext>
+    </p:extLst>
+  </p:cSld>
+  <p:clrMapOvr>
+    <a:masterClrMapping/>
+  </p:clrMapOvr>
+</p:sld>
+</file>
+
+<file path=ppt/slides/slide5.xml><?xml version="1.0" encoding="utf-8"?>
+<p:sld xmlns:a="http://schemas.openxmlformats.org/drawingml/2006/main" xmlns:r="http://schemas.openxmlformats.org/officeDocument/2006/relationships" xmlns:p="http://schemas.openxmlformats.org/presentationml/2006/main">
+  <p:cSld>
+    <p:spTree>
+      <p:nvGrpSpPr>
+        <p:cNvPr id="1" name=""/>
+        <p:cNvGrpSpPr/>
+        <p:nvPr/>
+      </p:nvGrpSpPr>
+      <p:grpSpPr>
+        <a:xfrm>
+          <a:off x="0" y="0"/>
+          <a:ext cx="0" cy="0"/>
+          <a:chOff x="0" y="0"/>
+          <a:chExt cx="0" cy="0"/>
+        </a:xfrm>
+      </p:grpSpPr>
+      <p:sp>
+        <p:nvSpPr>
+          <p:cNvPr id="2" name="Titolo 1"/>
+          <p:cNvSpPr>
+            <a:spLocks noGrp="1"/>
+          </p:cNvSpPr>
+          <p:nvPr>
+            <p:ph type="title"/>
+          </p:nvPr>
+        </p:nvSpPr>
+        <p:spPr>
+          <a:xfrm>
+            <a:off x="457200" y="274638"/>
+            <a:ext cx="8229600" cy="581318"/>
+          </a:xfrm>
+        </p:spPr>
+        <p:txBody>
+          <a:bodyPr>
+            <a:normAutofit fontScale="90000"/>
+          </a:bodyPr>
+          <a:lstStyle/>
+          <a:p>
+            <a:r>
+              <a:rPr lang="it-IT" dirty="0" err="1"/>
+              <a:t>Generic</a:t>
+            </a:r>
+            <a:r>
+              <a:rPr lang="it-IT" dirty="0"/>
+              <a:t> record (record </a:t>
+            </a:r>
+            <a:r>
+              <a:rPr lang="it-IT" dirty="0" err="1"/>
+              <a:t>detail</a:t>
+            </a:r>
+            <a:r>
+              <a:rPr lang="it-IT" dirty="0"/>
+              <a:t>/ </a:t>
+            </a:r>
+            <a:r>
+              <a:rPr lang="it-IT" dirty="0" err="1"/>
+              <a:t>element</a:t>
+            </a:r>
+            <a:r>
+              <a:rPr lang="it-IT" dirty="0"/>
+              <a:t>)</a:t>
+            </a:r>
+          </a:p>
+        </p:txBody>
+      </p:sp>
+      <p:sp>
+        <p:nvSpPr>
+          <p:cNvPr id="35" name="CasellaDiTesto 34">
+            <a:extLst>
+              <a:ext uri="{FF2B5EF4-FFF2-40B4-BE49-F238E27FC236}">
+                <a16:creationId xmlns:a16="http://schemas.microsoft.com/office/drawing/2014/main" id="{5DFD051A-C09A-44CC-B08A-1BDE43A28F00}"/>
+              </a:ext>
+            </a:extLst>
+          </p:cNvPr>
+          <p:cNvSpPr txBox="1"/>
+          <p:nvPr/>
+        </p:nvSpPr>
+        <p:spPr>
+          <a:xfrm>
+            <a:off x="1094282" y="1417818"/>
+            <a:ext cx="7285218" cy="1200329"/>
+          </a:xfrm>
+          <a:prstGeom prst="rect">
+            <a:avLst/>
+          </a:prstGeom>
+          <a:noFill/>
+        </p:spPr>
+        <p:txBody>
+          <a:bodyPr wrap="square" rtlCol="0">
+            <a:spAutoFit/>
+          </a:bodyPr>
+          <a:lstStyle/>
+          <a:p>
+            <a:r>
+              <a:rPr lang="it-IT" dirty="0"/>
+              <a:t>Nel record sarebbe anche necessario aggiungere un menù a tendina con una serie di comandi (il cui effetto non è altro che eseguire query di aggiornamento/ inserimento). Tali comandi variano da un business </a:t>
+            </a:r>
+            <a:r>
+              <a:rPr lang="it-IT" dirty="0" err="1"/>
+              <a:t>object</a:t>
+            </a:r>
+            <a:r>
+              <a:rPr lang="it-IT" dirty="0"/>
+              <a:t> all’altro (da una tabella all’altra).</a:t>
+            </a:r>
+          </a:p>
+        </p:txBody>
+      </p:sp>
+    </p:spTree>
+    <p:extLst>
+      <p:ext uri="{BB962C8B-B14F-4D97-AF65-F5344CB8AC3E}">
+        <p14:creationId xmlns:p14="http://schemas.microsoft.com/office/powerpoint/2010/main" val="311431093"/>
+      </p:ext>
+    </p:extLst>
+  </p:cSld>
+  <p:clrMapOvr>
+    <a:masterClrMapping/>
+  </p:clrMapOvr>
+</p:sld>
+</file>
+
+<file path=ppt/slides/slide6.xml><?xml version="1.0" encoding="utf-8"?>
+<p:sld xmlns:a="http://schemas.openxmlformats.org/drawingml/2006/main" xmlns:r="http://schemas.openxmlformats.org/officeDocument/2006/relationships" xmlns:p="http://schemas.openxmlformats.org/presentationml/2006/main">
+  <p:cSld>
+    <p:spTree>
+      <p:nvGrpSpPr>
+        <p:cNvPr id="1" name=""/>
+        <p:cNvGrpSpPr/>
+        <p:nvPr/>
+      </p:nvGrpSpPr>
+      <p:grpSpPr>
+        <a:xfrm>
+          <a:off x="0" y="0"/>
+          <a:ext cx="0" cy="0"/>
+          <a:chOff x="0" y="0"/>
+          <a:chExt cx="0" cy="0"/>
+        </a:xfrm>
+      </p:grpSpPr>
+      <p:sp>
+        <p:nvSpPr>
+          <p:cNvPr id="4" name="Titolo 3">
+            <a:extLst>
+              <a:ext uri="{FF2B5EF4-FFF2-40B4-BE49-F238E27FC236}">
+                <a16:creationId xmlns:a16="http://schemas.microsoft.com/office/drawing/2014/main" id="{5E3C0A3E-16B7-4799-AEC3-552BE0E90CCE}"/>
+              </a:ext>
+            </a:extLst>
+          </p:cNvPr>
+          <p:cNvSpPr>
+            <a:spLocks noGrp="1"/>
+          </p:cNvSpPr>
+          <p:nvPr>
+            <p:ph type="title"/>
+          </p:nvPr>
+        </p:nvSpPr>
+        <p:spPr>
+          <a:xfrm>
+            <a:off x="554636" y="2263307"/>
+            <a:ext cx="8154649" cy="1362075"/>
+          </a:xfrm>
+        </p:spPr>
+        <p:txBody>
+          <a:bodyPr>
+            <a:normAutofit fontScale="90000"/>
+          </a:bodyPr>
+          <a:lstStyle/>
+          <a:p>
+            <a:pPr algn="ctr"/>
+            <a:r>
+              <a:rPr lang="it-IT" dirty="0"/>
+              <a:t>Record particolari (PRIMO CASO): </a:t>
+            </a:r>
+            <a:br>
+              <a:rPr lang="it-IT" dirty="0"/>
+            </a:br>
+            <a:r>
+              <a:rPr lang="it-IT" dirty="0"/>
+              <a:t>modelli di test e relativi </a:t>
+            </a:r>
+            <a:br>
+              <a:rPr lang="it-IT" dirty="0"/>
+            </a:br>
+            <a:r>
+              <a:rPr lang="it-IT" dirty="0"/>
+              <a:t>sotto-record</a:t>
+            </a:r>
+            <a:endParaRPr lang="en-GB" dirty="0"/>
+          </a:p>
+        </p:txBody>
+      </p:sp>
+    </p:spTree>
+    <p:extLst>
+      <p:ext uri="{BB962C8B-B14F-4D97-AF65-F5344CB8AC3E}">
+        <p14:creationId xmlns:p14="http://schemas.microsoft.com/office/powerpoint/2010/main" val="1933332964"/>
+      </p:ext>
+    </p:extLst>
+  </p:cSld>
+  <p:clrMapOvr>
+    <a:masterClrMapping/>
+  </p:clrMapOvr>
+</p:sld>
+</file>
+
+<file path=ppt/slides/slide7.xml><?xml version="1.0" encoding="utf-8"?>
+<p:sld xmlns:a="http://schemas.openxmlformats.org/drawingml/2006/main" xmlns:r="http://schemas.openxmlformats.org/officeDocument/2006/relationships" xmlns:p="http://schemas.openxmlformats.org/presentationml/2006/main">
+  <p:cSld>
+    <p:spTree>
+      <p:nvGrpSpPr>
+        <p:cNvPr id="1" name=""/>
+        <p:cNvGrpSpPr/>
+        <p:nvPr/>
+      </p:nvGrpSpPr>
+      <p:grpSpPr>
+        <a:xfrm>
+          <a:off x="0" y="0"/>
+          <a:ext cx="0" cy="0"/>
+          <a:chOff x="0" y="0"/>
+          <a:chExt cx="0" cy="0"/>
+        </a:xfrm>
+      </p:grpSpPr>
+      <p:sp>
+        <p:nvSpPr>
+          <p:cNvPr id="2" name="Titolo 1"/>
+          <p:cNvSpPr>
+            <a:spLocks noGrp="1"/>
+          </p:cNvSpPr>
+          <p:nvPr>
+            <p:ph type="title"/>
+          </p:nvPr>
+        </p:nvSpPr>
+        <p:spPr>
+          <a:xfrm>
+            <a:off x="457200" y="475357"/>
+            <a:ext cx="8229600" cy="581318"/>
+          </a:xfrm>
+        </p:spPr>
+        <p:txBody>
+          <a:bodyPr>
+            <a:normAutofit fontScale="90000"/>
+          </a:bodyPr>
+          <a:lstStyle/>
+          <a:p>
+            <a:r>
+              <a:rPr lang="it-IT" dirty="0"/>
+              <a:t>Record particolare (modelli di test)</a:t>
+            </a:r>
+          </a:p>
+        </p:txBody>
+      </p:sp>
+      <p:sp>
+        <p:nvSpPr>
+          <p:cNvPr id="14" name="CasellaDiTesto 13">
+            <a:extLst>
+              <a:ext uri="{FF2B5EF4-FFF2-40B4-BE49-F238E27FC236}">
+                <a16:creationId xmlns:a16="http://schemas.microsoft.com/office/drawing/2014/main" id="{6907433D-6EFD-45F6-876C-60A61519091E}"/>
+              </a:ext>
+            </a:extLst>
+          </p:cNvPr>
+          <p:cNvSpPr txBox="1"/>
+          <p:nvPr/>
+        </p:nvSpPr>
+        <p:spPr>
+          <a:xfrm>
+            <a:off x="899410" y="1879483"/>
+            <a:ext cx="7285218" cy="923330"/>
+          </a:xfrm>
+          <a:prstGeom prst="rect">
+            <a:avLst/>
+          </a:prstGeom>
+          <a:noFill/>
+        </p:spPr>
+        <p:txBody>
+          <a:bodyPr wrap="square" rtlCol="0">
+            <a:spAutoFit/>
+          </a:bodyPr>
+          <a:lstStyle/>
+          <a:p>
+            <a:r>
+              <a:rPr lang="it-IT" dirty="0"/>
+              <a:t>La sezione «Record Form» di cui alla slide precedente differisce dalle classiche poiché i campi mostrati sono legati a due tabelle (invece che 1) </a:t>
+            </a:r>
+            <a:r>
+              <a:rPr lang="it-IT" dirty="0" err="1"/>
+              <a:t>modelli_test</a:t>
+            </a:r>
+            <a:r>
+              <a:rPr lang="it-IT" dirty="0"/>
+              <a:t> e </a:t>
+            </a:r>
+            <a:r>
+              <a:rPr lang="it-IT" dirty="0" err="1"/>
+              <a:t>modelli_test_vr</a:t>
+            </a:r>
+            <a:r>
+              <a:rPr lang="it-IT" dirty="0"/>
+              <a:t>.</a:t>
+            </a:r>
+          </a:p>
+        </p:txBody>
+      </p:sp>
+    </p:spTree>
+    <p:extLst>
+      <p:ext uri="{BB962C8B-B14F-4D97-AF65-F5344CB8AC3E}">
+        <p14:creationId xmlns:p14="http://schemas.microsoft.com/office/powerpoint/2010/main" val="3320307538"/>
+      </p:ext>
+    </p:extLst>
+  </p:cSld>
+  <p:clrMapOvr>
+    <a:masterClrMapping/>
+  </p:clrMapOvr>
+</p:sld>
+</file>
+
+<file path=ppt/slides/slide8.xml><?xml version="1.0" encoding="utf-8"?>
+<p:sld xmlns:a="http://schemas.openxmlformats.org/drawingml/2006/main" xmlns:r="http://schemas.openxmlformats.org/officeDocument/2006/relationships" xmlns:p="http://schemas.openxmlformats.org/presentationml/2006/main">
+  <p:cSld>
+    <p:spTree>
+      <p:nvGrpSpPr>
+        <p:cNvPr id="1" name=""/>
+        <p:cNvGrpSpPr/>
+        <p:nvPr/>
+      </p:nvGrpSpPr>
+      <p:grpSpPr>
+        <a:xfrm>
+          <a:off x="0" y="0"/>
+          <a:ext cx="0" cy="0"/>
+          <a:chOff x="0" y="0"/>
+          <a:chExt cx="0" cy="0"/>
+        </a:xfrm>
+      </p:grpSpPr>
+      <p:sp>
+        <p:nvSpPr>
+          <p:cNvPr id="2" name="Titolo 1"/>
+          <p:cNvSpPr>
+            <a:spLocks noGrp="1"/>
+          </p:cNvSpPr>
+          <p:nvPr>
+            <p:ph type="title"/>
+          </p:nvPr>
+        </p:nvSpPr>
+        <p:spPr>
+          <a:xfrm>
+            <a:off x="457200" y="184698"/>
+            <a:ext cx="8229600" cy="581318"/>
+          </a:xfrm>
+        </p:spPr>
+        <p:txBody>
+          <a:bodyPr>
+            <a:normAutofit fontScale="90000"/>
+          </a:bodyPr>
+          <a:lstStyle/>
+          <a:p>
+            <a:r>
+              <a:rPr lang="it-IT" dirty="0"/>
+              <a:t>Record particolare (modelli di test)</a:t>
+            </a:r>
+          </a:p>
+        </p:txBody>
+      </p:sp>
+      <p:sp>
+        <p:nvSpPr>
+          <p:cNvPr id="14" name="CasellaDiTesto 13">
+            <a:extLst>
+              <a:ext uri="{FF2B5EF4-FFF2-40B4-BE49-F238E27FC236}">
+                <a16:creationId xmlns:a16="http://schemas.microsoft.com/office/drawing/2014/main" id="{6907433D-6EFD-45F6-876C-60A61519091E}"/>
+              </a:ext>
+            </a:extLst>
+          </p:cNvPr>
+          <p:cNvSpPr txBox="1"/>
+          <p:nvPr/>
+        </p:nvSpPr>
+        <p:spPr>
+          <a:xfrm>
+            <a:off x="172386" y="956153"/>
+            <a:ext cx="8971613" cy="1754326"/>
+          </a:xfrm>
+          <a:prstGeom prst="rect">
+            <a:avLst/>
+          </a:prstGeom>
+          <a:noFill/>
+        </p:spPr>
+        <p:txBody>
+          <a:bodyPr wrap="square" rtlCol="0">
+            <a:spAutoFit/>
+          </a:bodyPr>
+          <a:lstStyle/>
+          <a:p>
+            <a:r>
+              <a:rPr lang="it-IT" dirty="0"/>
+              <a:t>Una delle tabelle sottostanti (domande) non visualizza, analogamente alle tabelle collegate, il classico inserimento di soli record a mo’ di lista(le domande del modello di test). Ciascuna riga (domanda) deve anche mostrare le risposte previste (tabella «</a:t>
+            </a:r>
+            <a:r>
+              <a:rPr lang="it-IT" dirty="0" err="1"/>
+              <a:t>risposte_previste</a:t>
+            </a:r>
+            <a:r>
+              <a:rPr lang="it-IT" dirty="0"/>
+              <a:t>») a associate a ciascuna domanda (vedi immagine sotto). Il set di risposte è selezionabile da un menù a tendina o diversamente se si vuole inserire risposte più dettagliate è necessario andare ne dettaglio della domanda (vedi slide successiva).</a:t>
+            </a:r>
+          </a:p>
+        </p:txBody>
+      </p:sp>
+      <p:pic>
+        <p:nvPicPr>
+          <p:cNvPr id="16" name="Immagine 15">
+            <a:extLst>
+              <a:ext uri="{FF2B5EF4-FFF2-40B4-BE49-F238E27FC236}">
+                <a16:creationId xmlns:a16="http://schemas.microsoft.com/office/drawing/2014/main" id="{9523CE57-D39B-42A5-A60D-C3F0C06BCD78}"/>
+              </a:ext>
+            </a:extLst>
+          </p:cNvPr>
+          <p:cNvPicPr>
+            <a:picLocks noChangeAspect="1"/>
+          </p:cNvPicPr>
+          <p:nvPr/>
+        </p:nvPicPr>
+        <p:blipFill>
+          <a:blip r:embed="rId2"/>
+          <a:stretch>
+            <a:fillRect/>
+          </a:stretch>
+        </p:blipFill>
+        <p:spPr>
+          <a:xfrm>
+            <a:off x="905692" y="2710479"/>
+            <a:ext cx="7574226" cy="3962823"/>
+          </a:xfrm>
+          <a:prstGeom prst="rect">
+            <a:avLst/>
+          </a:prstGeom>
+        </p:spPr>
+      </p:pic>
+    </p:spTree>
+    <p:extLst>
+      <p:ext uri="{BB962C8B-B14F-4D97-AF65-F5344CB8AC3E}">
+        <p14:creationId xmlns:p14="http://schemas.microsoft.com/office/powerpoint/2010/main" val="3746389435"/>
+      </p:ext>
+    </p:extLst>
+  </p:cSld>
+  <p:clrMapOvr>
+    <a:masterClrMapping/>
+  </p:clrMapOvr>
+</p:sld>
+</file>
+
+<file path=ppt/slides/slide9.xml><?xml version="1.0" encoding="utf-8"?>
+<p:sld xmlns:a="http://schemas.openxmlformats.org/drawingml/2006/main" xmlns:r="http://schemas.openxmlformats.org/officeDocument/2006/relationships" xmlns:p="http://schemas.openxmlformats.org/presentationml/2006/main">
+  <p:cSld>
+    <p:spTree>
+      <p:nvGrpSpPr>
+        <p:cNvPr id="1" name=""/>
+        <p:cNvGrpSpPr/>
+        <p:nvPr/>
+      </p:nvGrpSpPr>
+      <p:grpSpPr>
+        <a:xfrm>
+          <a:off x="0" y="0"/>
+          <a:ext cx="0" cy="0"/>
+          <a:chOff x="0" y="0"/>
+          <a:chExt cx="0" cy="0"/>
+        </a:xfrm>
+      </p:grpSpPr>
+      <p:sp>
+        <p:nvSpPr>
+          <p:cNvPr id="2" name="Titolo 1"/>
+          <p:cNvSpPr>
+            <a:spLocks noGrp="1"/>
+          </p:cNvSpPr>
+          <p:nvPr>
+            <p:ph type="title"/>
+          </p:nvPr>
+        </p:nvSpPr>
+        <p:spPr>
+          <a:xfrm>
+            <a:off x="457200" y="184698"/>
+            <a:ext cx="8229600" cy="581318"/>
+          </a:xfrm>
+        </p:spPr>
+        <p:txBody>
+          <a:bodyPr>
+            <a:normAutofit fontScale="90000"/>
+          </a:bodyPr>
+          <a:lstStyle/>
+          <a:p>
+            <a:r>
+              <a:rPr lang="it-IT" dirty="0"/>
+              <a:t>Record di dettaglio della domanda</a:t>
+            </a:r>
+          </a:p>
+        </p:txBody>
+      </p:sp>
+      <p:sp>
+        <p:nvSpPr>
+          <p:cNvPr id="14" name="CasellaDiTesto 13">
+            <a:extLst>
+              <a:ext uri="{FF2B5EF4-FFF2-40B4-BE49-F238E27FC236}">
+                <a16:creationId xmlns:a16="http://schemas.microsoft.com/office/drawing/2014/main" id="{6907433D-6EFD-45F6-876C-60A61519091E}"/>
+              </a:ext>
+            </a:extLst>
+          </p:cNvPr>
+          <p:cNvSpPr txBox="1"/>
+          <p:nvPr/>
+        </p:nvSpPr>
+        <p:spPr>
+          <a:xfrm>
+            <a:off x="172386" y="956153"/>
+            <a:ext cx="8971613" cy="646331"/>
+          </a:xfrm>
+          <a:prstGeom prst="rect">
+            <a:avLst/>
+          </a:prstGeom>
+          <a:noFill/>
+        </p:spPr>
+        <p:txBody>
+          <a:bodyPr wrap="square" rtlCol="0">
+            <a:spAutoFit/>
+          </a:bodyPr>
+          <a:lstStyle/>
+          <a:p>
+            <a:r>
+              <a:rPr lang="it-IT" dirty="0"/>
+              <a:t>Nel record di dettaglio della domanda è possibile inserire molti dettagli sulla domanda stessa tra cui set di risposte non standard.</a:t>
+            </a:r>
+          </a:p>
+        </p:txBody>
+      </p:sp>
+      <p:pic>
+        <p:nvPicPr>
+          <p:cNvPr id="3" name="Immagine 2">
+            <a:extLst>
+              <a:ext uri="{FF2B5EF4-FFF2-40B4-BE49-F238E27FC236}">
+                <a16:creationId xmlns:a16="http://schemas.microsoft.com/office/drawing/2014/main" id="{16D8FB50-14E8-4BD9-AF67-7AE8AE8D0293}"/>
+              </a:ext>
+            </a:extLst>
+          </p:cNvPr>
+          <p:cNvPicPr>
+            <a:picLocks noChangeAspect="1"/>
+          </p:cNvPicPr>
+          <p:nvPr/>
+        </p:nvPicPr>
+        <p:blipFill>
+          <a:blip r:embed="rId2"/>
+          <a:stretch>
+            <a:fillRect/>
+          </a:stretch>
+        </p:blipFill>
+        <p:spPr>
+          <a:xfrm>
+            <a:off x="337279" y="1792621"/>
+            <a:ext cx="8229600" cy="4629150"/>
+          </a:xfrm>
+          <a:prstGeom prst="rect">
+            <a:avLst/>
+          </a:prstGeom>
+        </p:spPr>
+      </p:pic>
+    </p:spTree>
+    <p:extLst>
+      <p:ext uri="{BB962C8B-B14F-4D97-AF65-F5344CB8AC3E}">
+        <p14:creationId xmlns:p14="http://schemas.microsoft.com/office/powerpoint/2010/main" val="1667045770"/>
       </p:ext>
     </p:extLst>
   </p:cSld>
